--- a/RD_MI_Part1.pptx
+++ b/RD_MI_Part1.pptx
@@ -1,22 +1,26 @@
 
 <file path=ppt/presentation.xml><?xml version="1.0" encoding="utf-8"?>
-<p:presentation xmlns:a="http://schemas.openxmlformats.org/drawingml/2006/main" xmlns:r="http://schemas.openxmlformats.org/officeDocument/2006/relationships" xmlns:p="http://schemas.openxmlformats.org/presentationml/2006/main" saveSubsetFonts="1" autoCompressPictures="0">
+<p:presentation xmlns:a="http://schemas.openxmlformats.org/drawingml/2006/main" xmlns:r="http://schemas.openxmlformats.org/officeDocument/2006/relationships" xmlns:p="http://schemas.openxmlformats.org/presentationml/2006/main" autoCompressPictures="0">
   <p:sldMasterIdLst>
     <p:sldMasterId id="2147483648" r:id="rId1"/>
   </p:sldMasterIdLst>
+  <p:notesMasterIdLst>
+    <p:notesMasterId r:id="rId4"/>
+  </p:notesMasterIdLst>
   <p:sldIdLst>
-    <p:sldId id="256" r:id="rId2"/>
-    <p:sldId id="257" r:id="rId3"/>
-    <p:sldId id="258" r:id="rId4"/>
-    <p:sldId id="259" r:id="rId5"/>
-    <p:sldId id="260" r:id="rId6"/>
-    <p:sldId id="261" r:id="rId7"/>
+    <p:sldId id="256" r:id="rId3"/>
+    <p:sldId id="262" r:id="rId5"/>
+    <p:sldId id="257" r:id="rId6"/>
+    <p:sldId id="258" r:id="rId7"/>
+    <p:sldId id="259" r:id="rId8"/>
+    <p:sldId id="260" r:id="rId9"/>
+    <p:sldId id="261" r:id="rId10"/>
   </p:sldIdLst>
-  <p:notesMasterIdLst>
-    <p:notesMasterId r:id="rId8"/>
-  </p:notesMasterIdLst>
   <p:sldSz cx="12192000" cy="6858000"/>
   <p:notesSz cx="6858000" cy="12192000"/>
+  <p:custDataLst>
+    <p:tags r:id="rId15"/>
+  </p:custDataLst>
   <p:defaultTextStyle>
     <a:lvl1pPr marL="0" algn="l" defTabSz="914400" rtl="0" eaLnBrk="1" latinLnBrk="0" hangingPunct="1">
       <a:defRPr sz="1800" kern="1200">
@@ -112,6 +116,12 @@
 </p:presentation>
 </file>
 
+<file path=ppt/commentAuthors.xml><?xml version="1.0" encoding="utf-8"?>
+<p:cmAuthorLst xmlns:a="http://schemas.openxmlformats.org/drawingml/2006/main" xmlns:r="http://schemas.openxmlformats.org/officeDocument/2006/relationships" xmlns:p="http://schemas.openxmlformats.org/presentationml/2006/main">
+  <p:cmAuthor id="1" name=" " initials="CV" lastIdx="3" clrIdx="0"/>
+</p:cmAuthorLst>
+</file>
+
 <file path=ppt/notesMasters/notesMaster1.xml><?xml version="1.0" encoding="utf-8"?>
 <p:notesMaster xmlns:a="http://schemas.openxmlformats.org/drawingml/2006/main" xmlns:r="http://schemas.openxmlformats.org/officeDocument/2006/relationships" xmlns:p="http://schemas.openxmlformats.org/presentationml/2006/main">
   <p:cSld>
@@ -194,7 +204,6 @@
           <a:p>
             <a:fld id="{5282F153-3F37-0F45-9E97-73ACFA13230C}" type="datetimeFigureOut">
               <a:rPr lang="en-US"/>
-              <a:t>7/23/19</a:t>
             </a:fld>
             <a:endParaRPr lang="en-US"/>
           </a:p>
@@ -261,6 +270,7 @@
               <a:rPr lang="en-US"/>
               <a:t>Click to edit Master text styles</a:t>
             </a:r>
+            <a:endParaRPr lang="en-US"/>
           </a:p>
           <a:p>
             <a:pPr lvl="1"/>
@@ -268,6 +278,7 @@
               <a:rPr lang="en-US"/>
               <a:t>Second level</a:t>
             </a:r>
+            <a:endParaRPr lang="en-US"/>
           </a:p>
           <a:p>
             <a:pPr lvl="2"/>
@@ -275,6 +286,7 @@
               <a:rPr lang="en-US"/>
               <a:t>Third level</a:t>
             </a:r>
+            <a:endParaRPr lang="en-US"/>
           </a:p>
           <a:p>
             <a:pPr lvl="3"/>
@@ -282,6 +294,7 @@
               <a:rPr lang="en-US"/>
               <a:t>Fourth level</a:t>
             </a:r>
+            <a:endParaRPr lang="en-US"/>
           </a:p>
           <a:p>
             <a:pPr lvl="4"/>
@@ -289,6 +302,7 @@
               <a:rPr lang="en-US"/>
               <a:t>Fifth level</a:t>
             </a:r>
+            <a:endParaRPr lang="en-US"/>
           </a:p>
         </p:txBody>
       </p:sp>
@@ -352,18 +366,12 @@
           <a:p>
             <a:fld id="{CE5E9CC1-C706-0F49-92D6-E571CC5EEA8F}" type="slidenum">
               <a:rPr lang="en-US"/>
-              <a:t>‹#›</a:t>
             </a:fld>
             <a:endParaRPr lang="en-US"/>
           </a:p>
         </p:txBody>
       </p:sp>
     </p:spTree>
-    <p:extLst>
-      <p:ext uri="{BB962C8B-B14F-4D97-AF65-F5344CB8AC3E}">
-        <p14:creationId xmlns:p14="http://schemas.microsoft.com/office/powerpoint/2010/main" val="1024086991"/>
-      </p:ext>
-    </p:extLst>
   </p:cSld>
   <p:clrMap bg1="lt1" tx1="dk1" bg2="lt2" tx2="dk2" accent1="accent1" accent2="accent2" accent3="accent3" accent4="accent4" accent5="accent5" accent6="accent6" hlink="hlink" folHlink="folHlink"/>
   <p:notesStyle>
@@ -505,10 +513,6 @@
           <a:bodyPr/>
           <a:lstStyle/>
           <a:p>
-            <a:r>
-              <a:rPr lang="en-US" dirty="0"/>
-              <a:t/>
-            </a:r>
             <a:endParaRPr lang="en-US" dirty="0"/>
           </a:p>
         </p:txBody>
@@ -530,18 +534,12 @@
           <a:p>
             <a:fld id="{F7021451-1387-4CA6-816F-3879F97B5CBC}" type="slidenum">
               <a:rPr lang="en-US"/>
-              <a:t>1</a:t>
             </a:fld>
             <a:endParaRPr lang="en-US"/>
           </a:p>
         </p:txBody>
       </p:sp>
     </p:spTree>
-    <p:extLst>
-      <p:ext uri="{BB962C8B-B14F-4D97-AF65-F5344CB8AC3E}">
-        <p14:creationId xmlns:p14="http://schemas.microsoft.com/office/powerpoint/2010/main" val="1024086991"/>
-      </p:ext>
-    </p:extLst>
   </p:cSld>
   <p:clrMapOvr>
     <a:masterClrMapping/>
@@ -568,7 +566,7 @@
       </p:grpSpPr>
       <p:sp>
         <p:nvSpPr>
-          <p:cNvPr id="2" name="Slide Image Placeholder 1"/>
+          <p:cNvPr id="2" name="Folienbildplatzhalter 1"/>
           <p:cNvSpPr>
             <a:spLocks noGrp="1" noRot="1" noChangeAspect="1"/>
           </p:cNvSpPr>
@@ -576,11 +574,16 @@
             <p:ph type="sldImg"/>
           </p:nvPr>
         </p:nvSpPr>
-        <p:spPr/>
-      </p:sp>
-      <p:sp>
-        <p:nvSpPr>
-          <p:cNvPr id="3" name="Notes Placeholder 2"/>
+        <p:spPr>
+          <a:xfrm>
+            <a:off x="476250" y="611188"/>
+            <a:ext cx="5903913" cy="3321050"/>
+          </a:xfrm>
+        </p:spPr>
+      </p:sp>
+      <p:sp>
+        <p:nvSpPr>
+          <p:cNvPr id="3" name="Notizenplatzhalter 2"/>
           <p:cNvSpPr>
             <a:spLocks noGrp="1"/>
           </p:cNvSpPr>
@@ -593,22 +596,21 @@
           <a:bodyPr/>
           <a:lstStyle/>
           <a:p>
-            <a:r>
-              <a:rPr lang="en-US" dirty="0"/>
-              <a:t/>
-            </a:r>
-            <a:endParaRPr lang="en-US" dirty="0"/>
+            <a:pPr marL="0" indent="0">
+              <a:buNone/>
+            </a:pPr>
+            <a:endParaRPr lang="de-DE" dirty="0"/>
           </a:p>
         </p:txBody>
       </p:sp>
       <p:sp>
         <p:nvSpPr>
-          <p:cNvPr id="4" name="Slide Number Placeholder 3"/>
+          <p:cNvPr id="4" name="Fußzeilenplatzhalter 3"/>
           <p:cNvSpPr>
             <a:spLocks noGrp="1"/>
           </p:cNvSpPr>
           <p:nvPr>
-            <p:ph type="sldNum" sz="quarter" idx="10"/>
+            <p:ph type="ftr" sz="quarter" idx="4"/>
           </p:nvPr>
         </p:nvSpPr>
         <p:spPr/>
@@ -616,20 +618,53 @@
           <a:bodyPr/>
           <a:lstStyle/>
           <a:p>
-            <a:fld id="{F7021451-1387-4CA6-816F-3879F97B5CBC}" type="slidenum">
-              <a:rPr lang="en-US"/>
-              <a:t>2</a:t>
+            <a:r>
+              <a:rPr lang="en-US" sz="800">
+                <a:solidFill>
+                  <a:schemeClr val="bg2"/>
+                </a:solidFill>
+              </a:rPr>
+              <a:t>Presentation title    |    ONLY FOR INTERNAL USE</a:t>
+            </a:r>
+            <a:endParaRPr lang="en-US" sz="800" dirty="0">
+              <a:solidFill>
+                <a:schemeClr val="bg2"/>
+              </a:solidFill>
+            </a:endParaRPr>
+          </a:p>
+        </p:txBody>
+      </p:sp>
+      <p:sp>
+        <p:nvSpPr>
+          <p:cNvPr id="5" name="Foliennummernplatzhalter 4"/>
+          <p:cNvSpPr>
+            <a:spLocks noGrp="1"/>
+          </p:cNvSpPr>
+          <p:nvPr>
+            <p:ph type="sldNum" sz="quarter" idx="5"/>
+          </p:nvPr>
+        </p:nvSpPr>
+        <p:spPr/>
+        <p:txBody>
+          <a:bodyPr/>
+          <a:lstStyle/>
+          <a:p>
+            <a:fld id="{D388EF01-4040-4B6C-80FD-9D313BD6F632}" type="slidenum">
+              <a:rPr lang="en-US" sz="800" smtClean="0">
+                <a:solidFill>
+                  <a:schemeClr val="bg2"/>
+                </a:solidFill>
+              </a:rPr>
             </a:fld>
-            <a:endParaRPr lang="en-US"/>
+            <a:endParaRPr lang="en-US" sz="800" dirty="0">
+              <a:solidFill>
+                <a:schemeClr val="bg2"/>
+              </a:solidFill>
+            </a:endParaRPr>
           </a:p>
         </p:txBody>
       </p:sp>
     </p:spTree>
-    <p:extLst>
-      <p:ext uri="{BB962C8B-B14F-4D97-AF65-F5344CB8AC3E}">
-        <p14:creationId xmlns:p14="http://schemas.microsoft.com/office/powerpoint/2010/main" val="1024086991"/>
-      </p:ext>
-    </p:extLst>
   </p:cSld>
   <p:clrMapOvr>
     <a:masterClrMapping/>
@@ -681,10 +716,6 @@
           <a:bodyPr/>
           <a:lstStyle/>
           <a:p>
-            <a:r>
-              <a:rPr lang="en-US" dirty="0"/>
-              <a:t/>
-            </a:r>
             <a:endParaRPr lang="en-US" dirty="0"/>
           </a:p>
         </p:txBody>
@@ -706,18 +737,12 @@
           <a:p>
             <a:fld id="{F7021451-1387-4CA6-816F-3879F97B5CBC}" type="slidenum">
               <a:rPr lang="en-US"/>
-              <a:t>3</a:t>
             </a:fld>
             <a:endParaRPr lang="en-US"/>
           </a:p>
         </p:txBody>
       </p:sp>
     </p:spTree>
-    <p:extLst>
-      <p:ext uri="{BB962C8B-B14F-4D97-AF65-F5344CB8AC3E}">
-        <p14:creationId xmlns:p14="http://schemas.microsoft.com/office/powerpoint/2010/main" val="1024086991"/>
-      </p:ext>
-    </p:extLst>
   </p:cSld>
   <p:clrMapOvr>
     <a:masterClrMapping/>
@@ -769,10 +794,6 @@
           <a:bodyPr/>
           <a:lstStyle/>
           <a:p>
-            <a:r>
-              <a:rPr lang="en-US" dirty="0"/>
-              <a:t/>
-            </a:r>
             <a:endParaRPr lang="en-US" dirty="0"/>
           </a:p>
         </p:txBody>
@@ -794,18 +815,12 @@
           <a:p>
             <a:fld id="{F7021451-1387-4CA6-816F-3879F97B5CBC}" type="slidenum">
               <a:rPr lang="en-US"/>
-              <a:t>4</a:t>
             </a:fld>
             <a:endParaRPr lang="en-US"/>
           </a:p>
         </p:txBody>
       </p:sp>
     </p:spTree>
-    <p:extLst>
-      <p:ext uri="{BB962C8B-B14F-4D97-AF65-F5344CB8AC3E}">
-        <p14:creationId xmlns:p14="http://schemas.microsoft.com/office/powerpoint/2010/main" val="1024086991"/>
-      </p:ext>
-    </p:extLst>
   </p:cSld>
   <p:clrMapOvr>
     <a:masterClrMapping/>
@@ -857,10 +872,6 @@
           <a:bodyPr/>
           <a:lstStyle/>
           <a:p>
-            <a:r>
-              <a:rPr lang="en-US" dirty="0"/>
-              <a:t/>
-            </a:r>
             <a:endParaRPr lang="en-US" dirty="0"/>
           </a:p>
         </p:txBody>
@@ -882,18 +893,12 @@
           <a:p>
             <a:fld id="{F7021451-1387-4CA6-816F-3879F97B5CBC}" type="slidenum">
               <a:rPr lang="en-US"/>
-              <a:t>5</a:t>
             </a:fld>
             <a:endParaRPr lang="en-US"/>
           </a:p>
         </p:txBody>
       </p:sp>
     </p:spTree>
-    <p:extLst>
-      <p:ext uri="{BB962C8B-B14F-4D97-AF65-F5344CB8AC3E}">
-        <p14:creationId xmlns:p14="http://schemas.microsoft.com/office/powerpoint/2010/main" val="1024086991"/>
-      </p:ext>
-    </p:extLst>
   </p:cSld>
   <p:clrMapOvr>
     <a:masterClrMapping/>
@@ -945,10 +950,6 @@
           <a:bodyPr/>
           <a:lstStyle/>
           <a:p>
-            <a:r>
-              <a:rPr lang="en-US" dirty="0"/>
-              <a:t/>
-            </a:r>
             <a:endParaRPr lang="en-US" dirty="0"/>
           </a:p>
         </p:txBody>
@@ -970,18 +971,90 @@
           <a:p>
             <a:fld id="{F7021451-1387-4CA6-816F-3879F97B5CBC}" type="slidenum">
               <a:rPr lang="en-US"/>
-              <a:t>6</a:t>
             </a:fld>
             <a:endParaRPr lang="en-US"/>
           </a:p>
         </p:txBody>
       </p:sp>
     </p:spTree>
-    <p:extLst>
-      <p:ext uri="{BB962C8B-B14F-4D97-AF65-F5344CB8AC3E}">
-        <p14:creationId xmlns:p14="http://schemas.microsoft.com/office/powerpoint/2010/main" val="1024086991"/>
-      </p:ext>
-    </p:extLst>
+  </p:cSld>
+  <p:clrMapOvr>
+    <a:masterClrMapping/>
+  </p:clrMapOvr>
+</p:notes>
+</file>
+
+<file path=ppt/notesSlides/notesSlide7.xml><?xml version="1.0" encoding="utf-8"?>
+<p:notes xmlns:a="http://schemas.openxmlformats.org/drawingml/2006/main" xmlns:r="http://schemas.openxmlformats.org/officeDocument/2006/relationships" xmlns:p="http://schemas.openxmlformats.org/presentationml/2006/main">
+  <p:cSld>
+    <p:spTree>
+      <p:nvGrpSpPr>
+        <p:cNvPr id="1" name=""/>
+        <p:cNvGrpSpPr/>
+        <p:nvPr/>
+      </p:nvGrpSpPr>
+      <p:grpSpPr>
+        <a:xfrm>
+          <a:off x="0" y="0"/>
+          <a:ext cx="0" cy="0"/>
+          <a:chOff x="0" y="0"/>
+          <a:chExt cx="0" cy="0"/>
+        </a:xfrm>
+      </p:grpSpPr>
+      <p:sp>
+        <p:nvSpPr>
+          <p:cNvPr id="2" name="Slide Image Placeholder 1"/>
+          <p:cNvSpPr>
+            <a:spLocks noGrp="1" noRot="1" noChangeAspect="1"/>
+          </p:cNvSpPr>
+          <p:nvPr>
+            <p:ph type="sldImg"/>
+          </p:nvPr>
+        </p:nvSpPr>
+        <p:spPr/>
+      </p:sp>
+      <p:sp>
+        <p:nvSpPr>
+          <p:cNvPr id="3" name="Notes Placeholder 2"/>
+          <p:cNvSpPr>
+            <a:spLocks noGrp="1"/>
+          </p:cNvSpPr>
+          <p:nvPr>
+            <p:ph type="body" idx="1"/>
+          </p:nvPr>
+        </p:nvSpPr>
+        <p:spPr/>
+        <p:txBody>
+          <a:bodyPr/>
+          <a:lstStyle/>
+          <a:p>
+            <a:endParaRPr lang="en-US" dirty="0"/>
+          </a:p>
+        </p:txBody>
+      </p:sp>
+      <p:sp>
+        <p:nvSpPr>
+          <p:cNvPr id="4" name="Slide Number Placeholder 3"/>
+          <p:cNvSpPr>
+            <a:spLocks noGrp="1"/>
+          </p:cNvSpPr>
+          <p:nvPr>
+            <p:ph type="sldNum" sz="quarter" idx="10"/>
+          </p:nvPr>
+        </p:nvSpPr>
+        <p:spPr/>
+        <p:txBody>
+          <a:bodyPr/>
+          <a:lstStyle/>
+          <a:p>
+            <a:fld id="{F7021451-1387-4CA6-816F-3879F97B5CBC}" type="slidenum">
+              <a:rPr lang="en-US"/>
+            </a:fld>
+            <a:endParaRPr lang="en-US"/>
+          </a:p>
+        </p:txBody>
+      </p:sp>
+    </p:spTree>
   </p:cSld>
   <p:clrMapOvr>
     <a:masterClrMapping/>
@@ -1019,9 +1092,553 @@
 </p:sldLayout>
 </file>
 
+<file path=ppt/slideLayouts/slideLayout2.xml><?xml version="1.0" encoding="utf-8"?>
+<p:sldLayout xmlns:a="http://schemas.openxmlformats.org/drawingml/2006/main" xmlns:r="http://schemas.openxmlformats.org/officeDocument/2006/relationships" xmlns:p="http://schemas.openxmlformats.org/presentationml/2006/main" preserve="1" userDrawn="1">
+  <p:cSld name="One content dark">
+    <p:bg>
+      <p:bgPr>
+        <a:solidFill>
+          <a:schemeClr val="bg2"/>
+        </a:solidFill>
+        <a:effectLst/>
+      </p:bgPr>
+    </p:bg>
+    <p:spTree>
+      <p:nvGrpSpPr>
+        <p:cNvPr id="1" name=""/>
+        <p:cNvGrpSpPr/>
+        <p:nvPr/>
+      </p:nvGrpSpPr>
+      <p:grpSpPr>
+        <a:xfrm>
+          <a:off x="0" y="0"/>
+          <a:ext cx="0" cy="0"/>
+          <a:chOff x="0" y="0"/>
+          <a:chExt cx="0" cy="0"/>
+        </a:xfrm>
+      </p:grpSpPr>
+      <p:sp>
+        <p:nvSpPr>
+          <p:cNvPr id="12" name="Titel 11"/>
+          <p:cNvSpPr>
+            <a:spLocks noGrp="1"/>
+          </p:cNvSpPr>
+          <p:nvPr>
+            <p:ph type="title" hasCustomPrompt="1"/>
+          </p:nvPr>
+        </p:nvSpPr>
+        <p:spPr bwMode="gray">
+          <a:xfrm>
+            <a:off x="479424" y="477000"/>
+            <a:ext cx="11233151" cy="720000"/>
+          </a:xfrm>
+        </p:spPr>
+        <p:txBody>
+          <a:bodyPr/>
+          <a:lstStyle>
+            <a:lvl1pPr>
+              <a:defRPr>
+                <a:solidFill>
+                  <a:schemeClr val="tx2"/>
+                </a:solidFill>
+              </a:defRPr>
+            </a:lvl1pPr>
+          </a:lstStyle>
+          <a:p>
+            <a:r>
+              <a:rPr lang="en-US" dirty="0" err="1"/>
+              <a:t>Folientitel</a:t>
+            </a:r>
+            <a:endParaRPr lang="en-US" dirty="0"/>
+          </a:p>
+        </p:txBody>
+      </p:sp>
+      <p:sp>
+        <p:nvSpPr>
+          <p:cNvPr id="3" name="Inhaltsplatzhalter 2"/>
+          <p:cNvSpPr>
+            <a:spLocks noGrp="1"/>
+          </p:cNvSpPr>
+          <p:nvPr>
+            <p:ph idx="1" hasCustomPrompt="1"/>
+          </p:nvPr>
+        </p:nvSpPr>
+        <p:spPr bwMode="gray">
+          <a:xfrm>
+            <a:off x="479424" y="1412876"/>
+            <a:ext cx="11233151" cy="4392000"/>
+          </a:xfrm>
+        </p:spPr>
+        <p:txBody>
+          <a:bodyPr/>
+          <a:lstStyle>
+            <a:lvl1pPr>
+              <a:buClr>
+                <a:schemeClr val="tx2"/>
+              </a:buClr>
+              <a:defRPr>
+                <a:solidFill>
+                  <a:schemeClr val="bg1"/>
+                </a:solidFill>
+              </a:defRPr>
+            </a:lvl1pPr>
+            <a:lvl2pPr>
+              <a:buClr>
+                <a:schemeClr val="tx2"/>
+              </a:buClr>
+              <a:defRPr>
+                <a:solidFill>
+                  <a:schemeClr val="bg1"/>
+                </a:solidFill>
+              </a:defRPr>
+            </a:lvl2pPr>
+            <a:lvl3pPr>
+              <a:buClr>
+                <a:schemeClr val="tx2"/>
+              </a:buClr>
+              <a:defRPr>
+                <a:solidFill>
+                  <a:schemeClr val="bg1"/>
+                </a:solidFill>
+              </a:defRPr>
+            </a:lvl3pPr>
+            <a:lvl4pPr>
+              <a:buClr>
+                <a:schemeClr val="tx2"/>
+              </a:buClr>
+              <a:defRPr>
+                <a:solidFill>
+                  <a:schemeClr val="bg1"/>
+                </a:solidFill>
+              </a:defRPr>
+            </a:lvl4pPr>
+            <a:lvl5pPr>
+              <a:buClr>
+                <a:schemeClr val="tx2"/>
+              </a:buClr>
+              <a:defRPr>
+                <a:solidFill>
+                  <a:schemeClr val="bg1"/>
+                </a:solidFill>
+              </a:defRPr>
+            </a:lvl5pPr>
+            <a:lvl6pPr>
+              <a:buClr>
+                <a:schemeClr val="tx2"/>
+              </a:buClr>
+              <a:defRPr>
+                <a:solidFill>
+                  <a:schemeClr val="bg1"/>
+                </a:solidFill>
+              </a:defRPr>
+            </a:lvl6pPr>
+            <a:lvl7pPr>
+              <a:buClr>
+                <a:schemeClr val="tx2"/>
+              </a:buClr>
+              <a:defRPr>
+                <a:solidFill>
+                  <a:schemeClr val="bg1"/>
+                </a:solidFill>
+              </a:defRPr>
+            </a:lvl7pPr>
+            <a:lvl8pPr>
+              <a:buClr>
+                <a:schemeClr val="tx2"/>
+              </a:buClr>
+              <a:defRPr>
+                <a:solidFill>
+                  <a:schemeClr val="bg1"/>
+                </a:solidFill>
+              </a:defRPr>
+            </a:lvl8pPr>
+            <a:lvl9pPr>
+              <a:buClr>
+                <a:schemeClr val="tx2"/>
+              </a:buClr>
+              <a:defRPr>
+                <a:solidFill>
+                  <a:schemeClr val="bg1"/>
+                </a:solidFill>
+              </a:defRPr>
+            </a:lvl9pPr>
+          </a:lstStyle>
+          <a:p>
+            <a:pPr lvl="0"/>
+            <a:r>
+              <a:rPr lang="en-US"/>
+              <a:t>Edit text by clicking. Use the "Increase/decrease list level" buttons on the Start tab to switch between the set up text levels. For an optional subheading, set the text in bold.</a:t>
+            </a:r>
+            <a:endParaRPr lang="en-US"/>
+          </a:p>
+          <a:p>
+            <a:pPr lvl="1"/>
+            <a:r>
+              <a:rPr lang="en-US"/>
+              <a:t>Second level</a:t>
+            </a:r>
+            <a:endParaRPr lang="en-US"/>
+          </a:p>
+          <a:p>
+            <a:pPr lvl="2"/>
+            <a:r>
+              <a:rPr lang="en-US"/>
+              <a:t>Third level</a:t>
+            </a:r>
+            <a:endParaRPr lang="en-US"/>
+          </a:p>
+          <a:p>
+            <a:pPr lvl="3"/>
+            <a:r>
+              <a:rPr lang="en-US"/>
+              <a:t>Fourth level</a:t>
+            </a:r>
+            <a:endParaRPr lang="en-US"/>
+          </a:p>
+          <a:p>
+            <a:pPr lvl="4"/>
+            <a:r>
+              <a:rPr lang="en-US"/>
+              <a:t>Fifth level</a:t>
+            </a:r>
+            <a:endParaRPr lang="en-US"/>
+          </a:p>
+          <a:p>
+            <a:pPr lvl="5"/>
+            <a:r>
+              <a:rPr lang="en-US"/>
+              <a:t>Sixth level</a:t>
+            </a:r>
+            <a:endParaRPr lang="en-US"/>
+          </a:p>
+          <a:p>
+            <a:pPr lvl="6"/>
+            <a:r>
+              <a:rPr lang="en-US"/>
+              <a:t>Seventh level</a:t>
+            </a:r>
+            <a:endParaRPr lang="en-US"/>
+          </a:p>
+          <a:p>
+            <a:pPr lvl="7"/>
+            <a:r>
+              <a:rPr lang="en-US"/>
+              <a:t>Eighth level</a:t>
+            </a:r>
+            <a:endParaRPr lang="en-US"/>
+          </a:p>
+          <a:p>
+            <a:pPr lvl="8"/>
+            <a:r>
+              <a:rPr lang="en-US"/>
+              <a:t>Ninth level</a:t>
+            </a:r>
+            <a:endParaRPr lang="en-US" dirty="0"/>
+          </a:p>
+        </p:txBody>
+      </p:sp>
+      <p:sp>
+        <p:nvSpPr>
+          <p:cNvPr id="8" name="Textplatzhalter 7"/>
+          <p:cNvSpPr>
+            <a:spLocks noGrp="1"/>
+          </p:cNvSpPr>
+          <p:nvPr>
+            <p:ph type="body" sz="quarter" idx="13" hasCustomPrompt="1"/>
+          </p:nvPr>
+        </p:nvSpPr>
+        <p:spPr bwMode="gray">
+          <a:xfrm>
+            <a:off x="480000" y="5805280"/>
+            <a:ext cx="11232000" cy="144000"/>
+          </a:xfrm>
+        </p:spPr>
+        <p:txBody>
+          <a:bodyPr anchor="b"/>
+          <a:lstStyle>
+            <a:lvl1pPr marL="0" indent="0">
+              <a:lnSpc>
+                <a:spcPct val="100000"/>
+              </a:lnSpc>
+              <a:spcBef>
+                <a:spcPts val="0"/>
+              </a:spcBef>
+              <a:spcAft>
+                <a:spcPts val="0"/>
+              </a:spcAft>
+              <a:buFont typeface="Arial" panose="020B0604020202020204" pitchFamily="34" charset="0"/>
+              <a:buNone/>
+              <a:defRPr sz="800" b="0">
+                <a:solidFill>
+                  <a:schemeClr val="bg1"/>
+                </a:solidFill>
+              </a:defRPr>
+            </a:lvl1pPr>
+            <a:lvl2pPr marL="0" indent="0">
+              <a:lnSpc>
+                <a:spcPct val="100000"/>
+              </a:lnSpc>
+              <a:spcBef>
+                <a:spcPts val="0"/>
+              </a:spcBef>
+              <a:spcAft>
+                <a:spcPts val="0"/>
+              </a:spcAft>
+              <a:buFont typeface="Arial" panose="020B0604020202020204" pitchFamily="34" charset="0"/>
+              <a:buNone/>
+              <a:defRPr sz="800" b="0">
+                <a:solidFill>
+                  <a:schemeClr val="bg1"/>
+                </a:solidFill>
+              </a:defRPr>
+            </a:lvl2pPr>
+            <a:lvl3pPr marL="0" indent="0">
+              <a:lnSpc>
+                <a:spcPct val="100000"/>
+              </a:lnSpc>
+              <a:spcBef>
+                <a:spcPts val="0"/>
+              </a:spcBef>
+              <a:spcAft>
+                <a:spcPts val="0"/>
+              </a:spcAft>
+              <a:buNone/>
+              <a:defRPr sz="800" b="0">
+                <a:solidFill>
+                  <a:schemeClr val="bg1"/>
+                </a:solidFill>
+              </a:defRPr>
+            </a:lvl3pPr>
+            <a:lvl4pPr marL="0" indent="0">
+              <a:lnSpc>
+                <a:spcPct val="100000"/>
+              </a:lnSpc>
+              <a:spcBef>
+                <a:spcPts val="0"/>
+              </a:spcBef>
+              <a:spcAft>
+                <a:spcPts val="0"/>
+              </a:spcAft>
+              <a:buNone/>
+              <a:defRPr sz="800" b="0">
+                <a:solidFill>
+                  <a:schemeClr val="bg1"/>
+                </a:solidFill>
+              </a:defRPr>
+            </a:lvl4pPr>
+            <a:lvl5pPr marL="0" indent="0">
+              <a:lnSpc>
+                <a:spcPct val="100000"/>
+              </a:lnSpc>
+              <a:spcBef>
+                <a:spcPts val="0"/>
+              </a:spcBef>
+              <a:spcAft>
+                <a:spcPts val="0"/>
+              </a:spcAft>
+              <a:buNone/>
+              <a:defRPr sz="800" b="0">
+                <a:solidFill>
+                  <a:schemeClr val="bg1"/>
+                </a:solidFill>
+              </a:defRPr>
+            </a:lvl5pPr>
+            <a:lvl6pPr marL="0" indent="0">
+              <a:lnSpc>
+                <a:spcPct val="100000"/>
+              </a:lnSpc>
+              <a:spcBef>
+                <a:spcPts val="0"/>
+              </a:spcBef>
+              <a:spcAft>
+                <a:spcPts val="0"/>
+              </a:spcAft>
+              <a:buNone/>
+              <a:defRPr sz="800" b="0">
+                <a:solidFill>
+                  <a:schemeClr val="bg1"/>
+                </a:solidFill>
+              </a:defRPr>
+            </a:lvl6pPr>
+            <a:lvl7pPr marL="0" indent="0">
+              <a:lnSpc>
+                <a:spcPct val="100000"/>
+              </a:lnSpc>
+              <a:spcBef>
+                <a:spcPts val="0"/>
+              </a:spcBef>
+              <a:spcAft>
+                <a:spcPts val="0"/>
+              </a:spcAft>
+              <a:buNone/>
+              <a:defRPr sz="800" b="0">
+                <a:solidFill>
+                  <a:schemeClr val="bg1"/>
+                </a:solidFill>
+              </a:defRPr>
+            </a:lvl7pPr>
+            <a:lvl8pPr marL="0" indent="0">
+              <a:lnSpc>
+                <a:spcPct val="100000"/>
+              </a:lnSpc>
+              <a:spcBef>
+                <a:spcPts val="0"/>
+              </a:spcBef>
+              <a:spcAft>
+                <a:spcPts val="0"/>
+              </a:spcAft>
+              <a:buNone/>
+              <a:defRPr sz="800" b="0">
+                <a:solidFill>
+                  <a:schemeClr val="bg1"/>
+                </a:solidFill>
+              </a:defRPr>
+            </a:lvl8pPr>
+            <a:lvl9pPr marL="0" indent="0">
+              <a:lnSpc>
+                <a:spcPct val="100000"/>
+              </a:lnSpc>
+              <a:spcBef>
+                <a:spcPts val="0"/>
+              </a:spcBef>
+              <a:spcAft>
+                <a:spcPts val="0"/>
+              </a:spcAft>
+              <a:buNone/>
+              <a:defRPr sz="800" b="0">
+                <a:solidFill>
+                  <a:schemeClr val="bg1"/>
+                </a:solidFill>
+              </a:defRPr>
+            </a:lvl9pPr>
+          </a:lstStyle>
+          <a:p>
+            <a:pPr lvl="0"/>
+            <a:r>
+              <a:rPr lang="en-US" dirty="0"/>
+              <a:t>Footnote/Source</a:t>
+            </a:r>
+            <a:endParaRPr lang="en-US" dirty="0"/>
+          </a:p>
+        </p:txBody>
+      </p:sp>
+      <p:sp>
+        <p:nvSpPr>
+          <p:cNvPr id="9" name="Fußzeilenplatzhalter 8"/>
+          <p:cNvSpPr>
+            <a:spLocks noGrp="1"/>
+          </p:cNvSpPr>
+          <p:nvPr>
+            <p:ph type="ftr" sz="quarter" idx="14"/>
+          </p:nvPr>
+        </p:nvSpPr>
+        <p:spPr bwMode="gray">
+          <a:xfrm>
+            <a:off x="6312024" y="6246836"/>
+            <a:ext cx="5040560" cy="288000"/>
+          </a:xfrm>
+        </p:spPr>
+        <p:txBody>
+          <a:bodyPr/>
+          <a:lstStyle>
+            <a:lvl1pPr>
+              <a:defRPr>
+                <a:solidFill>
+                  <a:schemeClr val="bg1"/>
+                </a:solidFill>
+              </a:defRPr>
+            </a:lvl1pPr>
+          </a:lstStyle>
+          <a:p>
+            <a:r>
+              <a:rPr lang="en-US" dirty="0"/>
+              <a:t>Presentation title    |    ONLY FOR INTERNAL USE</a:t>
+            </a:r>
+            <a:endParaRPr lang="en-US" dirty="0"/>
+          </a:p>
+        </p:txBody>
+      </p:sp>
+      <p:sp>
+        <p:nvSpPr>
+          <p:cNvPr id="10" name="Foliennummernplatzhalter 9"/>
+          <p:cNvSpPr>
+            <a:spLocks noGrp="1"/>
+          </p:cNvSpPr>
+          <p:nvPr>
+            <p:ph type="sldNum" sz="quarter" idx="15"/>
+          </p:nvPr>
+        </p:nvSpPr>
+        <p:spPr bwMode="gray">
+          <a:xfrm>
+            <a:off x="11424592" y="6246836"/>
+            <a:ext cx="288000" cy="288000"/>
+          </a:xfrm>
+        </p:spPr>
+        <p:txBody>
+          <a:bodyPr/>
+          <a:lstStyle>
+            <a:lvl1pPr>
+              <a:defRPr>
+                <a:solidFill>
+                  <a:schemeClr val="bg1"/>
+                </a:solidFill>
+              </a:defRPr>
+            </a:lvl1pPr>
+          </a:lstStyle>
+          <a:p>
+            <a:fld id="{8FF9B0DE-3FEB-4AA0-B465-B80EF7C1333D}" type="slidenum">
+              <a:rPr lang="en-US" smtClean="0"/>
+            </a:fld>
+            <a:endParaRPr lang="en-US" dirty="0"/>
+          </a:p>
+        </p:txBody>
+      </p:sp>
+      <p:pic>
+        <p:nvPicPr>
+          <p:cNvPr id="6" name="Grafik 5"/>
+          <p:cNvPicPr>
+            <a:picLocks noChangeAspect="1"/>
+          </p:cNvPicPr>
+          <p:nvPr userDrawn="1"/>
+        </p:nvPicPr>
+        <p:blipFill>
+          <a:blip r:embed="rId2">
+            <a:extLst>
+              <a:ext uri="{96DAC541-7B7A-43D3-8B79-37D633B846F1}">
+                <asvg:svgBlip xmlns:asvg="http://schemas.microsoft.com/office/drawing/2016/SVG/main" r:embed="rId3"/>
+              </a:ext>
+            </a:extLst>
+          </a:blip>
+          <a:stretch>
+            <a:fillRect/>
+          </a:stretch>
+        </p:blipFill>
+        <p:spPr bwMode="gray">
+          <a:xfrm>
+            <a:off x="479424" y="6165000"/>
+            <a:ext cx="1234800" cy="372727"/>
+          </a:xfrm>
+          <a:prstGeom prst="rect">
+            <a:avLst/>
+          </a:prstGeom>
+        </p:spPr>
+      </p:pic>
+    </p:spTree>
+  </p:cSld>
+  <p:clrMapOvr>
+    <a:masterClrMapping/>
+  </p:clrMapOvr>
+</p:sldLayout>
+</file>
+
 <file path=ppt/slideMasters/slideMaster1.xml><?xml version="1.0" encoding="utf-8"?>
 <p:sldMaster xmlns:a="http://schemas.openxmlformats.org/drawingml/2006/main" xmlns:r="http://schemas.openxmlformats.org/officeDocument/2006/relationships" xmlns:p="http://schemas.openxmlformats.org/presentationml/2006/main">
   <p:cSld>
+    <p:bg>
+      <p:bgRef idx="1001">
+        <a:schemeClr val="bg1"/>
+      </p:bgRef>
+    </p:bg>
     <p:spTree>
       <p:nvGrpSpPr>
         <p:cNvPr id="1" name=""/>
@@ -1041,6 +1658,7 @@
   <p:clrMap bg1="lt1" tx1="dk1" bg2="lt2" tx2="dk2" accent1="accent1" accent2="accent2" accent3="accent3" accent4="accent4" accent5="accent5" accent6="accent6" hlink="hlink" folHlink="folHlink"/>
   <p:sldLayoutIdLst>
     <p:sldLayoutId id="2147483649" r:id="rId1"/>
+    <p:sldLayoutId id="2147483650" r:id="rId2"/>
   </p:sldLayoutIdLst>
   <p:hf sldNum="0" hdr="0" ftr="0" dt="0"/>
   <p:txStyles>
@@ -1065,7 +1683,7 @@
         <a:spcBef>
           <a:spcPct val="20000"/>
         </a:spcBef>
-        <a:buFont typeface="Arial" pitchFamily="34" charset="0"/>
+        <a:buFont typeface="Arial" panose="020B0604020202020204" pitchFamily="34" charset="0"/>
         <a:buChar char="•"/>
         <a:defRPr sz="3200" kern="1200">
           <a:solidFill>
@@ -1080,7 +1698,7 @@
         <a:spcBef>
           <a:spcPct val="20000"/>
         </a:spcBef>
-        <a:buFont typeface="Arial" pitchFamily="34" charset="0"/>
+        <a:buFont typeface="Arial" panose="020B0604020202020204" pitchFamily="34" charset="0"/>
         <a:buChar char="–"/>
         <a:defRPr sz="2800" kern="1200">
           <a:solidFill>
@@ -1095,7 +1713,7 @@
         <a:spcBef>
           <a:spcPct val="20000"/>
         </a:spcBef>
-        <a:buFont typeface="Arial" pitchFamily="34" charset="0"/>
+        <a:buFont typeface="Arial" panose="020B0604020202020204" pitchFamily="34" charset="0"/>
         <a:buChar char="•"/>
         <a:defRPr sz="2400" kern="1200">
           <a:solidFill>
@@ -1110,7 +1728,7 @@
         <a:spcBef>
           <a:spcPct val="20000"/>
         </a:spcBef>
-        <a:buFont typeface="Arial" pitchFamily="34" charset="0"/>
+        <a:buFont typeface="Arial" panose="020B0604020202020204" pitchFamily="34" charset="0"/>
         <a:buChar char="–"/>
         <a:defRPr sz="2000" kern="1200">
           <a:solidFill>
@@ -1125,7 +1743,7 @@
         <a:spcBef>
           <a:spcPct val="20000"/>
         </a:spcBef>
-        <a:buFont typeface="Arial" pitchFamily="34" charset="0"/>
+        <a:buFont typeface="Arial" panose="020B0604020202020204" pitchFamily="34" charset="0"/>
         <a:buChar char="»"/>
         <a:defRPr sz="2000" kern="1200">
           <a:solidFill>
@@ -1140,7 +1758,7 @@
         <a:spcBef>
           <a:spcPct val="20000"/>
         </a:spcBef>
-        <a:buFont typeface="Arial" pitchFamily="34" charset="0"/>
+        <a:buFont typeface="Arial" panose="020B0604020202020204" pitchFamily="34" charset="0"/>
         <a:buChar char="•"/>
         <a:defRPr sz="2000" kern="1200">
           <a:solidFill>
@@ -1155,7 +1773,7 @@
         <a:spcBef>
           <a:spcPct val="20000"/>
         </a:spcBef>
-        <a:buFont typeface="Arial" pitchFamily="34" charset="0"/>
+        <a:buFont typeface="Arial" panose="020B0604020202020204" pitchFamily="34" charset="0"/>
         <a:buChar char="•"/>
         <a:defRPr sz="2000" kern="1200">
           <a:solidFill>
@@ -1170,7 +1788,7 @@
         <a:spcBef>
           <a:spcPct val="20000"/>
         </a:spcBef>
-        <a:buFont typeface="Arial" pitchFamily="34" charset="0"/>
+        <a:buFont typeface="Arial" panose="020B0604020202020204" pitchFamily="34" charset="0"/>
         <a:buChar char="•"/>
         <a:defRPr sz="2000" kern="1200">
           <a:solidFill>
@@ -1185,7 +1803,7 @@
         <a:spcBef>
           <a:spcPct val="20000"/>
         </a:spcBef>
-        <a:buFont typeface="Arial" pitchFamily="34" charset="0"/>
+        <a:buFont typeface="Arial" panose="020B0604020202020204" pitchFamily="34" charset="0"/>
         <a:buChar char="•"/>
         <a:defRPr sz="2000" kern="1200">
           <a:solidFill>
@@ -1298,12 +1916,13 @@
 
 <file path=ppt/slides/slide1.xml><?xml version="1.0" encoding="utf-8"?>
 <p:sld xmlns:a="http://schemas.openxmlformats.org/drawingml/2006/main" xmlns:r="http://schemas.openxmlformats.org/officeDocument/2006/relationships" xmlns:p="http://schemas.openxmlformats.org/presentationml/2006/main">
-  <p:cSld name="Slide 1">
+  <p:cSld>
     <p:bg>
       <p:bgPr>
         <a:solidFill>
           <a:srgbClr val="1E293B"/>
         </a:solidFill>
+        <a:effectLst/>
       </p:bgPr>
     </p:bg>
     <p:spTree>
@@ -1408,13 +2027,12 @@
             <a:avLst/>
           </a:prstGeom>
           <a:noFill/>
-          <a:ln/>
         </p:spPr>
         <p:txBody>
           <a:bodyPr wrap="square" lIns="0" tIns="0" rIns="0" bIns="0" rtlCol="0" anchor="ctr"/>
           <a:lstStyle/>
           <a:p>
-            <a:pPr indent="0" marL="0">
+            <a:pPr marL="0" indent="0">
               <a:buNone/>
             </a:pPr>
             <a:r>
@@ -1422,9 +2040,9 @@
                 <a:solidFill>
                   <a:srgbClr val="FFFFFF"/>
                 </a:solidFill>
-                <a:latin typeface="Calibri" pitchFamily="34" charset="0"/>
-                <a:ea typeface="Calibri" pitchFamily="34" charset="-122"/>
-                <a:cs typeface="Calibri" pitchFamily="34" charset="-120"/>
+                <a:latin typeface="Calibri" panose="020F0502020204030204" pitchFamily="34" charset="0"/>
+                <a:ea typeface="Calibri" panose="020F0502020204030204" pitchFamily="34" charset="-122"/>
+                <a:cs typeface="Calibri" panose="020F0502020204030204" pitchFamily="34" charset="-120"/>
               </a:rPr>
               <a:t>Retrieved-Dropout Multiple Imputation</a:t>
             </a:r>
@@ -1447,13 +2065,12 @@
             <a:avLst/>
           </a:prstGeom>
           <a:noFill/>
-          <a:ln/>
         </p:spPr>
         <p:txBody>
           <a:bodyPr wrap="square" lIns="0" tIns="0" rIns="0" bIns="0" rtlCol="0" anchor="ctr"/>
           <a:lstStyle/>
           <a:p>
-            <a:pPr indent="0" marL="0">
+            <a:pPr marL="0" indent="0">
               <a:buNone/>
             </a:pPr>
             <a:r>
@@ -1461,9 +2078,9 @@
                 <a:solidFill>
                   <a:srgbClr val="CADCFC"/>
                 </a:solidFill>
-                <a:latin typeface="Cambria" pitchFamily="34" charset="0"/>
-                <a:ea typeface="Cambria" pitchFamily="34" charset="-122"/>
-                <a:cs typeface="Cambria" pitchFamily="34" charset="-120"/>
+                <a:latin typeface="Cambria" panose="02040503050406030204" pitchFamily="34" charset="0"/>
+                <a:ea typeface="Cambria" panose="02040503050406030204" pitchFamily="34" charset="-122"/>
+                <a:cs typeface="Cambria" panose="02040503050406030204" pitchFamily="34" charset="-120"/>
               </a:rPr>
               <a:t>for Time-to-Event Endpoints in CVOTs</a:t>
             </a:r>
@@ -1509,13 +2126,12 @@
             <a:avLst/>
           </a:prstGeom>
           <a:noFill/>
-          <a:ln/>
         </p:spPr>
         <p:txBody>
           <a:bodyPr wrap="square" lIns="0" tIns="0" rIns="0" bIns="0" rtlCol="0" anchor="ctr"/>
           <a:lstStyle/>
           <a:p>
-            <a:pPr indent="0" marL="0">
+            <a:pPr marL="0" indent="0">
               <a:buNone/>
             </a:pPr>
             <a:r>
@@ -1545,13 +2161,12 @@
             <a:avLst/>
           </a:prstGeom>
           <a:noFill/>
-          <a:ln/>
         </p:spPr>
         <p:txBody>
           <a:bodyPr wrap="square" lIns="0" tIns="0" rIns="0" bIns="0" rtlCol="0" anchor="ctr"/>
           <a:lstStyle/>
           <a:p>
-            <a:pPr indent="0" marL="0">
+            <a:pPr marL="0" indent="0">
               <a:buNone/>
             </a:pPr>
             <a:r>
@@ -1581,13 +2196,12 @@
             <a:avLst/>
           </a:prstGeom>
           <a:noFill/>
-          <a:ln/>
         </p:spPr>
         <p:txBody>
           <a:bodyPr wrap="square" lIns="0" tIns="0" rIns="0" bIns="0" rtlCol="0" anchor="ctr"/>
           <a:lstStyle/>
           <a:p>
-            <a:pPr indent="0" marL="0">
+            <a:pPr marL="0" indent="0">
               <a:buNone/>
             </a:pPr>
             <a:r>
@@ -1617,13 +2231,12 @@
             <a:avLst/>
           </a:prstGeom>
           <a:noFill/>
-          <a:ln/>
         </p:spPr>
         <p:txBody>
           <a:bodyPr wrap="square" lIns="0" tIns="0" rIns="0" bIns="0" rtlCol="0" anchor="ctr"/>
           <a:lstStyle/>
           <a:p>
-            <a:pPr indent="0" marL="0">
+            <a:pPr marL="0" indent="0">
               <a:buNone/>
             </a:pPr>
             <a:r>
@@ -1648,12 +2261,3338 @@
 
 <file path=ppt/slides/slide2.xml><?xml version="1.0" encoding="utf-8"?>
 <p:sld xmlns:a="http://schemas.openxmlformats.org/drawingml/2006/main" xmlns:r="http://schemas.openxmlformats.org/officeDocument/2006/relationships" xmlns:p="http://schemas.openxmlformats.org/presentationml/2006/main">
-  <p:cSld name="Slide 2">
+  <p:cSld>
+    <p:spTree>
+      <p:nvGrpSpPr>
+        <p:cNvPr id="1" name=""/>
+        <p:cNvGrpSpPr/>
+        <p:nvPr/>
+      </p:nvGrpSpPr>
+      <p:grpSpPr>
+        <a:xfrm>
+          <a:off x="0" y="0"/>
+          <a:ext cx="0" cy="0"/>
+          <a:chOff x="0" y="0"/>
+          <a:chExt cx="0" cy="0"/>
+        </a:xfrm>
+      </p:grpSpPr>
+      <p:pic>
+        <p:nvPicPr>
+          <p:cNvPr id="21" name="Bildplatzhalter 5"/>
+          <p:cNvPicPr>
+            <a:picLocks noChangeAspect="1"/>
+          </p:cNvPicPr>
+          <p:nvPr>
+            <p:custDataLst>
+              <p:tags r:id="rId1"/>
+            </p:custDataLst>
+          </p:nvPr>
+        </p:nvPicPr>
+        <p:blipFill>
+          <a:blip r:embed="rId2"/>
+          <a:srcRect l="496" t="1582" r="-496" b="27007"/>
+          <a:stretch>
+            <a:fillRect/>
+          </a:stretch>
+        </p:blipFill>
+        <p:spPr bwMode="gray">
+          <a:xfrm>
+            <a:off x="366409" y="1223807"/>
+            <a:ext cx="2277803" cy="2277227"/>
+          </a:xfrm>
+          <a:prstGeom prst="ellipse">
+            <a:avLst/>
+          </a:prstGeom>
+        </p:spPr>
+      </p:pic>
+      <p:graphicFrame>
+        <p:nvGraphicFramePr>
+          <p:cNvPr id="5" name="Obiekt 4" hidden="1"/>
+          <p:cNvGraphicFramePr>
+            <a:graphicFrameLocks noChangeAspect="1"/>
+          </p:cNvGraphicFramePr>
+          <p:nvPr>
+            <p:custDataLst>
+              <p:tags r:id="rId3"/>
+            </p:custDataLst>
+          </p:nvPr>
+        </p:nvGraphicFramePr>
+        <p:xfrm>
+          <a:off x="1588" y="1588"/>
+          <a:ext cx="1588" cy="1588"/>
+        </p:xfrm>
+        <a:graphic>
+          <a:graphicData uri="http://schemas.openxmlformats.org/presentationml/2006/ole">
+            <mc:AlternateContent xmlns:mc="http://schemas.openxmlformats.org/markup-compatibility/2006">
+              <mc:Choice xmlns:v="urn:schemas-microsoft-com:vml" Requires="v">
+                <p:oleObj spid="_x0000_s2" name="think-cell Folie" r:id="rId4" imgW="5715" imgH="5715" progId="TCLayout.ActiveDocument.1">
+                  <p:embed/>
+                </p:oleObj>
+              </mc:Choice>
+              <mc:Fallback>
+                <p:oleObj name="think-cell Folie" r:id="rId4" imgW="5715" imgH="5715" progId="TCLayout.ActiveDocument.1">
+                  <p:embed/>
+                  <p:pic>
+                    <p:nvPicPr>
+                      <p:cNvPr id="0" name="Obiekt 4" hidden="1"/>
+                      <p:cNvPicPr/>
+                      <p:nvPr/>
+                    </p:nvPicPr>
+                    <p:blipFill>
+                      <a:blip r:embed="rId5"/>
+                      <a:stretch>
+                        <a:fillRect/>
+                      </a:stretch>
+                    </p:blipFill>
+                    <p:spPr>
+                      <a:xfrm>
+                        <a:off x="1588" y="1588"/>
+                        <a:ext cx="1588" cy="1588"/>
+                      </a:xfrm>
+                      <a:prstGeom prst="rect">
+                        <a:avLst/>
+                      </a:prstGeom>
+                    </p:spPr>
+                  </p:pic>
+                </p:oleObj>
+              </mc:Fallback>
+            </mc:AlternateContent>
+          </a:graphicData>
+        </a:graphic>
+      </p:graphicFrame>
+      <p:sp>
+        <p:nvSpPr>
+          <p:cNvPr id="50" name="Rectangle 49" hidden="1"/>
+          <p:cNvSpPr/>
+          <p:nvPr>
+            <p:custDataLst>
+              <p:tags r:id="rId6"/>
+            </p:custDataLst>
+          </p:nvPr>
+        </p:nvSpPr>
+        <p:spPr>
+          <a:xfrm>
+            <a:off x="0" y="0"/>
+            <a:ext cx="158750" cy="158750"/>
+          </a:xfrm>
+          <a:prstGeom prst="rect">
+            <a:avLst/>
+          </a:prstGeom>
+          <a:noFill/>
+          <a:ln w="6350">
+            <a:solidFill>
+              <a:schemeClr val="tx1"/>
+            </a:solidFill>
+          </a:ln>
+          <a:effectLst/>
+        </p:spPr>
+        <p:style>
+          <a:lnRef idx="2">
+            <a:schemeClr val="accent1">
+              <a:shade val="50000"/>
+            </a:schemeClr>
+          </a:lnRef>
+          <a:fillRef idx="1">
+            <a:schemeClr val="accent1"/>
+          </a:fillRef>
+          <a:effectRef idx="0">
+            <a:schemeClr val="accent1"/>
+          </a:effectRef>
+          <a:fontRef idx="minor">
+            <a:schemeClr val="lt1"/>
+          </a:fontRef>
+        </p:style>
+        <p:txBody>
+          <a:bodyPr wrap="none" lIns="0" tIns="0" rIns="0" bIns="0" numCol="1" spcCol="0" rtlCol="0" anchor="ctr" anchorCtr="0">
+            <a:noAutofit/>
+          </a:bodyPr>
+          <a:lstStyle/>
+          <a:p>
+            <a:pPr algn="ctr"/>
+            <a:endParaRPr lang="en-US" sz="3000" dirty="0">
+              <a:latin typeface="Open Sans Extrabold" panose="020B0906030804020204" pitchFamily="34" charset="0"/>
+              <a:ea typeface="Open Sans Extrabold" panose="020B0906030804020204" pitchFamily="34" charset="0"/>
+              <a:cs typeface="Open Sans Extrabold" panose="020B0906030804020204" pitchFamily="34" charset="0"/>
+              <a:sym typeface="Open Sans Extrabold" panose="020B0906030804020204" pitchFamily="34" charset="0"/>
+            </a:endParaRPr>
+          </a:p>
+        </p:txBody>
+      </p:sp>
+      <p:sp>
+        <p:nvSpPr>
+          <p:cNvPr id="19" name="Titel 18"/>
+          <p:cNvSpPr>
+            <a:spLocks noGrp="1"/>
+          </p:cNvSpPr>
+          <p:nvPr>
+            <p:ph type="title"/>
+          </p:nvPr>
+        </p:nvSpPr>
+        <p:spPr bwMode="gray">
+          <a:xfrm>
+            <a:off x="367652" y="558728"/>
+            <a:ext cx="1612490" cy="576000"/>
+          </a:xfrm>
+        </p:spPr>
+        <p:txBody>
+          <a:bodyPr/>
+          <a:lstStyle/>
+          <a:p>
+            <a:r>
+              <a:rPr lang="en-US" dirty="0"/>
+              <a:t>About Me</a:t>
+            </a:r>
+            <a:endParaRPr lang="en-US" dirty="0"/>
+          </a:p>
+        </p:txBody>
+      </p:sp>
+      <p:sp>
+        <p:nvSpPr>
+          <p:cNvPr id="6" name="Foliennummernplatzhalter 5"/>
+          <p:cNvSpPr>
+            <a:spLocks noGrp="1"/>
+          </p:cNvSpPr>
+          <p:nvPr>
+            <p:ph type="sldNum" sz="quarter" idx="15"/>
+          </p:nvPr>
+        </p:nvSpPr>
+        <p:spPr bwMode="invGray"/>
+        <p:txBody>
+          <a:bodyPr/>
+          <a:lstStyle/>
+          <a:p>
+            <a:fld id="{8FF9B0DE-3FEB-4AA0-B465-B80EF7C1333D}" type="slidenum">
+              <a:rPr lang="en-US" smtClean="0"/>
+            </a:fld>
+            <a:endParaRPr lang="en-US" dirty="0"/>
+          </a:p>
+        </p:txBody>
+      </p:sp>
+      <p:cxnSp>
+        <p:nvCxnSpPr>
+          <p:cNvPr id="15" name="Gerader Verbinder 26"/>
+          <p:cNvCxnSpPr/>
+          <p:nvPr/>
+        </p:nvCxnSpPr>
+        <p:spPr bwMode="gray">
+          <a:xfrm flipV="1">
+            <a:off x="408003" y="2564999"/>
+            <a:ext cx="0" cy="864000"/>
+          </a:xfrm>
+          <a:prstGeom prst="line">
+            <a:avLst/>
+          </a:prstGeom>
+          <a:ln w="9525">
+            <a:solidFill>
+              <a:schemeClr val="bg2"/>
+            </a:solidFill>
+          </a:ln>
+        </p:spPr>
+        <p:style>
+          <a:lnRef idx="1">
+            <a:schemeClr val="accent1"/>
+          </a:lnRef>
+          <a:fillRef idx="0">
+            <a:schemeClr val="accent1"/>
+          </a:fillRef>
+          <a:effectRef idx="0">
+            <a:schemeClr val="accent1"/>
+          </a:effectRef>
+          <a:fontRef idx="minor">
+            <a:schemeClr val="tx1"/>
+          </a:fontRef>
+        </p:style>
+      </p:cxnSp>
+      <p:sp>
+        <p:nvSpPr>
+          <p:cNvPr id="1109" name="Textplatzhalter 2"/>
+          <p:cNvSpPr txBox="1"/>
+          <p:nvPr/>
+        </p:nvSpPr>
+        <p:spPr bwMode="invGray">
+          <a:xfrm>
+            <a:off x="4954387" y="3449274"/>
+            <a:ext cx="2665613" cy="816502"/>
+          </a:xfrm>
+          <a:prstGeom prst="rect">
+            <a:avLst/>
+          </a:prstGeom>
+        </p:spPr>
+        <p:txBody>
+          <a:bodyPr vert="horz" lIns="0" tIns="0" rIns="0" bIns="0" rtlCol="0">
+            <a:noAutofit/>
+          </a:bodyPr>
+          <a:lstStyle>
+            <a:lvl1pPr marL="215900" indent="-215900" algn="l" defTabSz="914400" rtl="0" eaLnBrk="1" latinLnBrk="0" hangingPunct="1">
+              <a:lnSpc>
+                <a:spcPct val="140000"/>
+              </a:lnSpc>
+              <a:spcBef>
+                <a:spcPts val="0"/>
+              </a:spcBef>
+              <a:spcAft>
+                <a:spcPts val="600"/>
+              </a:spcAft>
+              <a:buClr>
+                <a:schemeClr val="tx2"/>
+              </a:buClr>
+              <a:buFont typeface="Arial" panose="020B0604020202020204" pitchFamily="34" charset="0"/>
+              <a:buChar char="•"/>
+              <a:defRPr sz="1600" b="0" kern="1200">
+                <a:solidFill>
+                  <a:schemeClr val="bg1"/>
+                </a:solidFill>
+                <a:latin typeface="+mn-lt"/>
+                <a:ea typeface="+mn-ea"/>
+                <a:cs typeface="+mn-cs"/>
+              </a:defRPr>
+            </a:lvl1pPr>
+            <a:lvl2pPr marL="431800" indent="-215900" algn="l" defTabSz="914400" rtl="0" eaLnBrk="1" latinLnBrk="0" hangingPunct="1">
+              <a:lnSpc>
+                <a:spcPct val="140000"/>
+              </a:lnSpc>
+              <a:spcBef>
+                <a:spcPts val="0"/>
+              </a:spcBef>
+              <a:spcAft>
+                <a:spcPts val="600"/>
+              </a:spcAft>
+              <a:buClr>
+                <a:schemeClr val="tx2"/>
+              </a:buClr>
+              <a:buFont typeface="Arial" panose="020B0604020202020204" pitchFamily="34" charset="0"/>
+              <a:buChar char="•"/>
+              <a:defRPr sz="1600" kern="1200">
+                <a:solidFill>
+                  <a:schemeClr val="bg1"/>
+                </a:solidFill>
+                <a:latin typeface="+mn-lt"/>
+                <a:ea typeface="+mn-ea"/>
+                <a:cs typeface="+mn-cs"/>
+              </a:defRPr>
+            </a:lvl2pPr>
+            <a:lvl3pPr marL="575945" indent="-215900" algn="l" defTabSz="914400" rtl="0" eaLnBrk="1" latinLnBrk="0" hangingPunct="1">
+              <a:lnSpc>
+                <a:spcPct val="140000"/>
+              </a:lnSpc>
+              <a:spcBef>
+                <a:spcPts val="0"/>
+              </a:spcBef>
+              <a:spcAft>
+                <a:spcPts val="600"/>
+              </a:spcAft>
+              <a:buClr>
+                <a:schemeClr val="tx2"/>
+              </a:buClr>
+              <a:buFont typeface="Arial" panose="020B0604020202020204" pitchFamily="34" charset="0"/>
+              <a:buChar char="•"/>
+              <a:defRPr sz="1600" kern="1200">
+                <a:solidFill>
+                  <a:schemeClr val="bg1"/>
+                </a:solidFill>
+                <a:latin typeface="+mn-lt"/>
+                <a:ea typeface="+mn-ea"/>
+                <a:cs typeface="+mn-cs"/>
+              </a:defRPr>
+            </a:lvl3pPr>
+            <a:lvl4pPr marL="791845" indent="-215900" algn="l" defTabSz="914400" rtl="0" eaLnBrk="1" latinLnBrk="0" hangingPunct="1">
+              <a:lnSpc>
+                <a:spcPct val="140000"/>
+              </a:lnSpc>
+              <a:spcBef>
+                <a:spcPts val="0"/>
+              </a:spcBef>
+              <a:spcAft>
+                <a:spcPts val="600"/>
+              </a:spcAft>
+              <a:buClr>
+                <a:schemeClr val="tx2"/>
+              </a:buClr>
+              <a:buFont typeface="Arial" panose="020B0604020202020204" pitchFamily="34" charset="0"/>
+              <a:buChar char="•"/>
+              <a:defRPr sz="1600" kern="1200">
+                <a:solidFill>
+                  <a:schemeClr val="bg1"/>
+                </a:solidFill>
+                <a:latin typeface="+mn-lt"/>
+                <a:ea typeface="+mn-ea"/>
+                <a:cs typeface="+mn-cs"/>
+              </a:defRPr>
+            </a:lvl4pPr>
+            <a:lvl5pPr marL="144145" indent="-144145" algn="l" defTabSz="914400" rtl="0" eaLnBrk="1" latinLnBrk="0" hangingPunct="1">
+              <a:lnSpc>
+                <a:spcPct val="140000"/>
+              </a:lnSpc>
+              <a:spcBef>
+                <a:spcPts val="0"/>
+              </a:spcBef>
+              <a:spcAft>
+                <a:spcPts val="600"/>
+              </a:spcAft>
+              <a:buClr>
+                <a:schemeClr val="tx2"/>
+              </a:buClr>
+              <a:buFont typeface="Arial" panose="020B0604020202020204" pitchFamily="34" charset="0"/>
+              <a:buChar char="•"/>
+              <a:defRPr sz="1200" kern="1200">
+                <a:solidFill>
+                  <a:schemeClr val="bg1"/>
+                </a:solidFill>
+                <a:latin typeface="+mn-lt"/>
+                <a:ea typeface="+mn-ea"/>
+                <a:cs typeface="+mn-cs"/>
+              </a:defRPr>
+            </a:lvl5pPr>
+            <a:lvl6pPr marL="288290" indent="-142875" algn="l" defTabSz="914400" rtl="0" eaLnBrk="1" latinLnBrk="0" hangingPunct="1">
+              <a:lnSpc>
+                <a:spcPct val="140000"/>
+              </a:lnSpc>
+              <a:spcBef>
+                <a:spcPts val="0"/>
+              </a:spcBef>
+              <a:spcAft>
+                <a:spcPts val="600"/>
+              </a:spcAft>
+              <a:buClr>
+                <a:schemeClr val="tx2"/>
+              </a:buClr>
+              <a:buFont typeface="Arial" panose="020B0604020202020204" pitchFamily="34" charset="0"/>
+              <a:buChar char="•"/>
+              <a:defRPr sz="1200" kern="1200">
+                <a:solidFill>
+                  <a:schemeClr val="bg1"/>
+                </a:solidFill>
+                <a:latin typeface="+mn-lt"/>
+                <a:ea typeface="+mn-ea"/>
+                <a:cs typeface="+mn-cs"/>
+              </a:defRPr>
+            </a:lvl6pPr>
+            <a:lvl7pPr marL="431800" indent="-144145" algn="l" defTabSz="914400" rtl="0" eaLnBrk="1" latinLnBrk="0" hangingPunct="1">
+              <a:lnSpc>
+                <a:spcPct val="140000"/>
+              </a:lnSpc>
+              <a:spcBef>
+                <a:spcPts val="0"/>
+              </a:spcBef>
+              <a:spcAft>
+                <a:spcPts val="600"/>
+              </a:spcAft>
+              <a:buClr>
+                <a:schemeClr val="tx2"/>
+              </a:buClr>
+              <a:buFont typeface="Arial" panose="020B0604020202020204" pitchFamily="34" charset="0"/>
+              <a:buChar char="•"/>
+              <a:defRPr sz="1200" kern="1200">
+                <a:solidFill>
+                  <a:schemeClr val="bg1"/>
+                </a:solidFill>
+                <a:latin typeface="+mn-lt"/>
+                <a:ea typeface="+mn-ea"/>
+                <a:cs typeface="+mn-cs"/>
+              </a:defRPr>
+            </a:lvl7pPr>
+            <a:lvl8pPr marL="575945" indent="-144145" algn="l" defTabSz="914400" rtl="0" eaLnBrk="1" latinLnBrk="0" hangingPunct="1">
+              <a:lnSpc>
+                <a:spcPct val="140000"/>
+              </a:lnSpc>
+              <a:spcBef>
+                <a:spcPts val="0"/>
+              </a:spcBef>
+              <a:spcAft>
+                <a:spcPts val="600"/>
+              </a:spcAft>
+              <a:buClr>
+                <a:schemeClr val="tx2"/>
+              </a:buClr>
+              <a:buFont typeface="Arial" panose="020B0604020202020204" pitchFamily="34" charset="0"/>
+              <a:buChar char="•"/>
+              <a:defRPr sz="1200" kern="1200">
+                <a:solidFill>
+                  <a:schemeClr val="bg1"/>
+                </a:solidFill>
+                <a:latin typeface="+mn-lt"/>
+                <a:ea typeface="+mn-ea"/>
+                <a:cs typeface="+mn-cs"/>
+              </a:defRPr>
+            </a:lvl8pPr>
+            <a:lvl9pPr marL="575945" indent="-144145" algn="l" defTabSz="914400" rtl="0" eaLnBrk="1" latinLnBrk="0" hangingPunct="1">
+              <a:lnSpc>
+                <a:spcPct val="140000"/>
+              </a:lnSpc>
+              <a:spcBef>
+                <a:spcPts val="0"/>
+              </a:spcBef>
+              <a:spcAft>
+                <a:spcPts val="600"/>
+              </a:spcAft>
+              <a:buClr>
+                <a:schemeClr val="tx2"/>
+              </a:buClr>
+              <a:buFont typeface="Arial" panose="020B0604020202020204" pitchFamily="34" charset="0"/>
+              <a:buChar char="•"/>
+              <a:defRPr sz="1200" kern="1200">
+                <a:solidFill>
+                  <a:schemeClr val="bg1"/>
+                </a:solidFill>
+                <a:latin typeface="+mn-lt"/>
+                <a:ea typeface="+mn-ea"/>
+                <a:cs typeface="+mn-cs"/>
+              </a:defRPr>
+            </a:lvl9pPr>
+          </a:lstStyle>
+          <a:p>
+            <a:pPr marL="0" lvl="4" indent="0">
+              <a:buNone/>
+            </a:pPr>
+            <a:r>
+              <a:rPr lang="en-US" b="1" dirty="0"/>
+              <a:t>MS in </a:t>
+            </a:r>
+            <a:r>
+              <a:rPr lang="en-US" b="1" u="sng" dirty="0"/>
+              <a:t>Medical Statistics</a:t>
+            </a:r>
+            <a:endParaRPr lang="en-US" b="1" u="sng" dirty="0"/>
+          </a:p>
+          <a:p>
+            <a:pPr marL="0" lvl="4" indent="0">
+              <a:buNone/>
+            </a:pPr>
+            <a:r>
+              <a:rPr lang="en-US" b="1" dirty="0"/>
+              <a:t>University of Southampton</a:t>
+            </a:r>
+            <a:endParaRPr lang="en-US" b="1" dirty="0"/>
+          </a:p>
+          <a:p>
+            <a:pPr marL="0" lvl="4" indent="0">
+              <a:buNone/>
+            </a:pPr>
+            <a:r>
+              <a:rPr lang="en-US" b="1" dirty="0"/>
+              <a:t>      Southampton, UK</a:t>
+            </a:r>
+            <a:endParaRPr lang="en-US" b="1" dirty="0"/>
+          </a:p>
+        </p:txBody>
+      </p:sp>
+      <p:sp>
+        <p:nvSpPr>
+          <p:cNvPr id="1110" name="Textplatzhalter 8"/>
+          <p:cNvSpPr txBox="1"/>
+          <p:nvPr/>
+        </p:nvSpPr>
+        <p:spPr bwMode="gray">
+          <a:xfrm>
+            <a:off x="2941688" y="1639064"/>
+            <a:ext cx="754462" cy="341731"/>
+          </a:xfrm>
+          <a:prstGeom prst="rect">
+            <a:avLst/>
+          </a:prstGeom>
+          <a:noFill/>
+          <a:effectLst/>
+        </p:spPr>
+        <p:txBody>
+          <a:bodyPr wrap="none" lIns="144000" tIns="0" rIns="0" bIns="0" anchor="b" anchorCtr="0"/>
+          <a:lstStyle>
+            <a:lvl1pPr marL="0" indent="0" algn="l" defTabSz="914400" rtl="0" eaLnBrk="1" latinLnBrk="0" hangingPunct="1">
+              <a:lnSpc>
+                <a:spcPct val="140000"/>
+              </a:lnSpc>
+              <a:spcBef>
+                <a:spcPts val="0"/>
+              </a:spcBef>
+              <a:spcAft>
+                <a:spcPts val="600"/>
+              </a:spcAft>
+              <a:buFontTx/>
+              <a:buNone/>
+              <a:defRPr sz="4400" b="1" kern="1200">
+                <a:solidFill>
+                  <a:schemeClr val="tx2"/>
+                </a:solidFill>
+                <a:latin typeface="+mj-lt"/>
+                <a:ea typeface="+mn-ea"/>
+                <a:cs typeface="+mn-cs"/>
+              </a:defRPr>
+            </a:lvl1pPr>
+            <a:lvl2pPr marL="0" indent="0" algn="l" defTabSz="914400" rtl="0" eaLnBrk="1" latinLnBrk="0" hangingPunct="1">
+              <a:lnSpc>
+                <a:spcPct val="140000"/>
+              </a:lnSpc>
+              <a:spcBef>
+                <a:spcPts val="0"/>
+              </a:spcBef>
+              <a:spcAft>
+                <a:spcPts val="600"/>
+              </a:spcAft>
+              <a:buFontTx/>
+              <a:buNone/>
+              <a:defRPr sz="4400" b="1" kern="1200">
+                <a:solidFill>
+                  <a:schemeClr val="tx2"/>
+                </a:solidFill>
+                <a:latin typeface="+mj-lt"/>
+                <a:ea typeface="+mn-ea"/>
+                <a:cs typeface="+mn-cs"/>
+              </a:defRPr>
+            </a:lvl2pPr>
+            <a:lvl3pPr marL="0" indent="0" algn="l" defTabSz="914400" rtl="0" eaLnBrk="1" latinLnBrk="0" hangingPunct="1">
+              <a:lnSpc>
+                <a:spcPct val="140000"/>
+              </a:lnSpc>
+              <a:spcBef>
+                <a:spcPts val="0"/>
+              </a:spcBef>
+              <a:spcAft>
+                <a:spcPts val="600"/>
+              </a:spcAft>
+              <a:buFontTx/>
+              <a:buNone/>
+              <a:defRPr sz="4400" b="1" kern="1200">
+                <a:solidFill>
+                  <a:schemeClr val="tx2"/>
+                </a:solidFill>
+                <a:latin typeface="+mj-lt"/>
+                <a:ea typeface="+mn-ea"/>
+                <a:cs typeface="+mn-cs"/>
+              </a:defRPr>
+            </a:lvl3pPr>
+            <a:lvl4pPr marL="0" indent="0" algn="l" defTabSz="914400" rtl="0" eaLnBrk="1" latinLnBrk="0" hangingPunct="1">
+              <a:lnSpc>
+                <a:spcPct val="140000"/>
+              </a:lnSpc>
+              <a:spcBef>
+                <a:spcPts val="0"/>
+              </a:spcBef>
+              <a:spcAft>
+                <a:spcPts val="600"/>
+              </a:spcAft>
+              <a:buFontTx/>
+              <a:buNone/>
+              <a:defRPr sz="4400" b="1" kern="1200">
+                <a:solidFill>
+                  <a:schemeClr val="tx2"/>
+                </a:solidFill>
+                <a:latin typeface="+mj-lt"/>
+                <a:ea typeface="+mn-ea"/>
+                <a:cs typeface="+mn-cs"/>
+              </a:defRPr>
+            </a:lvl4pPr>
+            <a:lvl5pPr marL="0" indent="0" algn="l" defTabSz="914400" rtl="0" eaLnBrk="1" latinLnBrk="0" hangingPunct="1">
+              <a:lnSpc>
+                <a:spcPct val="140000"/>
+              </a:lnSpc>
+              <a:spcBef>
+                <a:spcPts val="0"/>
+              </a:spcBef>
+              <a:spcAft>
+                <a:spcPts val="600"/>
+              </a:spcAft>
+              <a:buFontTx/>
+              <a:buNone/>
+              <a:defRPr sz="4400" b="1" kern="1200">
+                <a:solidFill>
+                  <a:schemeClr val="tx2"/>
+                </a:solidFill>
+                <a:latin typeface="+mj-lt"/>
+                <a:ea typeface="+mn-ea"/>
+                <a:cs typeface="+mn-cs"/>
+              </a:defRPr>
+            </a:lvl5pPr>
+            <a:lvl6pPr marL="0" indent="0" algn="l" defTabSz="914400" rtl="0" eaLnBrk="1" latinLnBrk="0" hangingPunct="1">
+              <a:lnSpc>
+                <a:spcPct val="140000"/>
+              </a:lnSpc>
+              <a:spcBef>
+                <a:spcPts val="0"/>
+              </a:spcBef>
+              <a:spcAft>
+                <a:spcPts val="600"/>
+              </a:spcAft>
+              <a:buFontTx/>
+              <a:buNone/>
+              <a:defRPr sz="4400" b="1" kern="1200">
+                <a:solidFill>
+                  <a:schemeClr val="tx2"/>
+                </a:solidFill>
+                <a:latin typeface="+mj-lt"/>
+                <a:ea typeface="+mn-ea"/>
+                <a:cs typeface="+mn-cs"/>
+              </a:defRPr>
+            </a:lvl6pPr>
+            <a:lvl7pPr marL="0" indent="0" algn="l" defTabSz="914400" rtl="0" eaLnBrk="1" latinLnBrk="0" hangingPunct="1">
+              <a:lnSpc>
+                <a:spcPct val="140000"/>
+              </a:lnSpc>
+              <a:spcBef>
+                <a:spcPts val="0"/>
+              </a:spcBef>
+              <a:spcAft>
+                <a:spcPts val="600"/>
+              </a:spcAft>
+              <a:buFontTx/>
+              <a:buNone/>
+              <a:defRPr sz="4400" b="1" kern="1200">
+                <a:solidFill>
+                  <a:schemeClr val="tx2"/>
+                </a:solidFill>
+                <a:latin typeface="+mj-lt"/>
+                <a:ea typeface="+mn-ea"/>
+                <a:cs typeface="+mn-cs"/>
+              </a:defRPr>
+            </a:lvl7pPr>
+            <a:lvl8pPr marL="0" indent="0" algn="l" defTabSz="914400" rtl="0" eaLnBrk="1" latinLnBrk="0" hangingPunct="1">
+              <a:lnSpc>
+                <a:spcPct val="140000"/>
+              </a:lnSpc>
+              <a:spcBef>
+                <a:spcPts val="0"/>
+              </a:spcBef>
+              <a:spcAft>
+                <a:spcPts val="600"/>
+              </a:spcAft>
+              <a:buFontTx/>
+              <a:buNone/>
+              <a:defRPr sz="4400" b="1" kern="1200">
+                <a:solidFill>
+                  <a:schemeClr val="tx2"/>
+                </a:solidFill>
+                <a:latin typeface="+mj-lt"/>
+                <a:ea typeface="+mn-ea"/>
+                <a:cs typeface="+mn-cs"/>
+              </a:defRPr>
+            </a:lvl8pPr>
+            <a:lvl9pPr marL="0" indent="0" algn="l" defTabSz="914400" rtl="0" eaLnBrk="1" latinLnBrk="0" hangingPunct="1">
+              <a:lnSpc>
+                <a:spcPct val="140000"/>
+              </a:lnSpc>
+              <a:spcBef>
+                <a:spcPts val="0"/>
+              </a:spcBef>
+              <a:spcAft>
+                <a:spcPts val="600"/>
+              </a:spcAft>
+              <a:buFontTx/>
+              <a:buNone/>
+              <a:defRPr sz="4400" b="1" kern="1200">
+                <a:solidFill>
+                  <a:schemeClr val="tx2"/>
+                </a:solidFill>
+                <a:latin typeface="+mj-lt"/>
+                <a:ea typeface="+mn-ea"/>
+                <a:cs typeface="+mn-cs"/>
+              </a:defRPr>
+            </a:lvl9pPr>
+          </a:lstStyle>
+          <a:p>
+            <a:pPr>
+              <a:lnSpc>
+                <a:spcPct val="100000"/>
+              </a:lnSpc>
+              <a:spcAft>
+                <a:spcPts val="0"/>
+              </a:spcAft>
+            </a:pPr>
+            <a:r>
+              <a:rPr lang="en-US" sz="1400" dirty="0"/>
+              <a:t>2017-2021</a:t>
+            </a:r>
+            <a:endParaRPr lang="en-US" sz="1400" dirty="0"/>
+          </a:p>
+        </p:txBody>
+      </p:sp>
+      <p:cxnSp>
+        <p:nvCxnSpPr>
+          <p:cNvPr id="1111" name="Gerader Verbinder 50"/>
+          <p:cNvCxnSpPr/>
+          <p:nvPr/>
+        </p:nvCxnSpPr>
+        <p:spPr bwMode="gray">
+          <a:xfrm flipV="1">
+            <a:off x="5686504" y="2679226"/>
+            <a:ext cx="0" cy="864000"/>
+          </a:xfrm>
+          <a:prstGeom prst="line">
+            <a:avLst/>
+          </a:prstGeom>
+          <a:ln w="9525">
+            <a:solidFill>
+              <a:schemeClr val="bg2"/>
+            </a:solidFill>
+          </a:ln>
+        </p:spPr>
+        <p:style>
+          <a:lnRef idx="1">
+            <a:schemeClr val="accent1"/>
+          </a:lnRef>
+          <a:fillRef idx="0">
+            <a:schemeClr val="accent1"/>
+          </a:fillRef>
+          <a:effectRef idx="0">
+            <a:schemeClr val="accent1"/>
+          </a:effectRef>
+          <a:fontRef idx="minor">
+            <a:schemeClr val="tx1"/>
+          </a:fontRef>
+        </p:style>
+      </p:cxnSp>
+      <p:cxnSp>
+        <p:nvCxnSpPr>
+          <p:cNvPr id="1112" name="Gerader Verbinder 315394"/>
+          <p:cNvCxnSpPr/>
+          <p:nvPr/>
+        </p:nvCxnSpPr>
+        <p:spPr bwMode="gray">
+          <a:xfrm flipV="1">
+            <a:off x="9502853" y="2679226"/>
+            <a:ext cx="0" cy="864000"/>
+          </a:xfrm>
+          <a:prstGeom prst="line">
+            <a:avLst/>
+          </a:prstGeom>
+          <a:ln w="9525">
+            <a:solidFill>
+              <a:schemeClr val="bg2"/>
+            </a:solidFill>
+          </a:ln>
+        </p:spPr>
+        <p:style>
+          <a:lnRef idx="1">
+            <a:schemeClr val="accent1"/>
+          </a:lnRef>
+          <a:fillRef idx="0">
+            <a:schemeClr val="accent1"/>
+          </a:fillRef>
+          <a:effectRef idx="0">
+            <a:schemeClr val="accent1"/>
+          </a:effectRef>
+          <a:fontRef idx="minor">
+            <a:schemeClr val="tx1"/>
+          </a:fontRef>
+        </p:style>
+      </p:cxnSp>
+      <p:sp>
+        <p:nvSpPr>
+          <p:cNvPr id="1113" name="Diamond 1112"/>
+          <p:cNvSpPr/>
+          <p:nvPr/>
+        </p:nvSpPr>
+        <p:spPr bwMode="gray">
+          <a:xfrm>
+            <a:off x="2854821" y="1777050"/>
+            <a:ext cx="173736" cy="146304"/>
+          </a:xfrm>
+          <a:prstGeom prst="diamond">
+            <a:avLst/>
+          </a:prstGeom>
+          <a:solidFill>
+            <a:schemeClr val="bg1"/>
+          </a:solidFill>
+          <a:ln w="6350">
+            <a:solidFill>
+              <a:schemeClr val="tx1"/>
+            </a:solidFill>
+          </a:ln>
+        </p:spPr>
+        <p:style>
+          <a:lnRef idx="2">
+            <a:schemeClr val="accent1">
+              <a:shade val="50000"/>
+            </a:schemeClr>
+          </a:lnRef>
+          <a:fillRef idx="1">
+            <a:schemeClr val="accent1"/>
+          </a:fillRef>
+          <a:effectRef idx="0">
+            <a:schemeClr val="accent1"/>
+          </a:effectRef>
+          <a:fontRef idx="minor">
+            <a:schemeClr val="lt1"/>
+          </a:fontRef>
+        </p:style>
+        <p:txBody>
+          <a:bodyPr rtlCol="0" anchor="ctr"/>
+          <a:lstStyle/>
+          <a:p>
+            <a:pPr algn="ctr">
+              <a:lnSpc>
+                <a:spcPct val="140000"/>
+              </a:lnSpc>
+            </a:pPr>
+            <a:endParaRPr lang="en-US" sz="1600" dirty="0">
+              <a:solidFill>
+                <a:schemeClr val="tx1"/>
+              </a:solidFill>
+            </a:endParaRPr>
+          </a:p>
+        </p:txBody>
+      </p:sp>
+      <p:sp>
+        <p:nvSpPr>
+          <p:cNvPr id="1114" name="Textplatzhalter 8"/>
+          <p:cNvSpPr txBox="1"/>
+          <p:nvPr/>
+        </p:nvSpPr>
+        <p:spPr bwMode="gray">
+          <a:xfrm>
+            <a:off x="4803872" y="3101157"/>
+            <a:ext cx="754462" cy="341731"/>
+          </a:xfrm>
+          <a:prstGeom prst="rect">
+            <a:avLst/>
+          </a:prstGeom>
+          <a:noFill/>
+          <a:effectLst/>
+        </p:spPr>
+        <p:txBody>
+          <a:bodyPr wrap="none" lIns="144000" tIns="0" rIns="0" bIns="0" anchor="b" anchorCtr="0"/>
+          <a:lstStyle>
+            <a:lvl1pPr marL="0" indent="0" algn="l" defTabSz="914400" rtl="0" eaLnBrk="1" latinLnBrk="0" hangingPunct="1">
+              <a:lnSpc>
+                <a:spcPct val="140000"/>
+              </a:lnSpc>
+              <a:spcBef>
+                <a:spcPts val="0"/>
+              </a:spcBef>
+              <a:spcAft>
+                <a:spcPts val="600"/>
+              </a:spcAft>
+              <a:buFontTx/>
+              <a:buNone/>
+              <a:defRPr sz="4400" b="1" kern="1200">
+                <a:solidFill>
+                  <a:schemeClr val="tx2"/>
+                </a:solidFill>
+                <a:latin typeface="+mj-lt"/>
+                <a:ea typeface="+mn-ea"/>
+                <a:cs typeface="+mn-cs"/>
+              </a:defRPr>
+            </a:lvl1pPr>
+            <a:lvl2pPr marL="0" indent="0" algn="l" defTabSz="914400" rtl="0" eaLnBrk="1" latinLnBrk="0" hangingPunct="1">
+              <a:lnSpc>
+                <a:spcPct val="140000"/>
+              </a:lnSpc>
+              <a:spcBef>
+                <a:spcPts val="0"/>
+              </a:spcBef>
+              <a:spcAft>
+                <a:spcPts val="600"/>
+              </a:spcAft>
+              <a:buFontTx/>
+              <a:buNone/>
+              <a:defRPr sz="4400" b="1" kern="1200">
+                <a:solidFill>
+                  <a:schemeClr val="tx2"/>
+                </a:solidFill>
+                <a:latin typeface="+mj-lt"/>
+                <a:ea typeface="+mn-ea"/>
+                <a:cs typeface="+mn-cs"/>
+              </a:defRPr>
+            </a:lvl2pPr>
+            <a:lvl3pPr marL="0" indent="0" algn="l" defTabSz="914400" rtl="0" eaLnBrk="1" latinLnBrk="0" hangingPunct="1">
+              <a:lnSpc>
+                <a:spcPct val="140000"/>
+              </a:lnSpc>
+              <a:spcBef>
+                <a:spcPts val="0"/>
+              </a:spcBef>
+              <a:spcAft>
+                <a:spcPts val="600"/>
+              </a:spcAft>
+              <a:buFontTx/>
+              <a:buNone/>
+              <a:defRPr sz="4400" b="1" kern="1200">
+                <a:solidFill>
+                  <a:schemeClr val="tx2"/>
+                </a:solidFill>
+                <a:latin typeface="+mj-lt"/>
+                <a:ea typeface="+mn-ea"/>
+                <a:cs typeface="+mn-cs"/>
+              </a:defRPr>
+            </a:lvl3pPr>
+            <a:lvl4pPr marL="0" indent="0" algn="l" defTabSz="914400" rtl="0" eaLnBrk="1" latinLnBrk="0" hangingPunct="1">
+              <a:lnSpc>
+                <a:spcPct val="140000"/>
+              </a:lnSpc>
+              <a:spcBef>
+                <a:spcPts val="0"/>
+              </a:spcBef>
+              <a:spcAft>
+                <a:spcPts val="600"/>
+              </a:spcAft>
+              <a:buFontTx/>
+              <a:buNone/>
+              <a:defRPr sz="4400" b="1" kern="1200">
+                <a:solidFill>
+                  <a:schemeClr val="tx2"/>
+                </a:solidFill>
+                <a:latin typeface="+mj-lt"/>
+                <a:ea typeface="+mn-ea"/>
+                <a:cs typeface="+mn-cs"/>
+              </a:defRPr>
+            </a:lvl4pPr>
+            <a:lvl5pPr marL="0" indent="0" algn="l" defTabSz="914400" rtl="0" eaLnBrk="1" latinLnBrk="0" hangingPunct="1">
+              <a:lnSpc>
+                <a:spcPct val="140000"/>
+              </a:lnSpc>
+              <a:spcBef>
+                <a:spcPts val="0"/>
+              </a:spcBef>
+              <a:spcAft>
+                <a:spcPts val="600"/>
+              </a:spcAft>
+              <a:buFontTx/>
+              <a:buNone/>
+              <a:defRPr sz="4400" b="1" kern="1200">
+                <a:solidFill>
+                  <a:schemeClr val="tx2"/>
+                </a:solidFill>
+                <a:latin typeface="+mj-lt"/>
+                <a:ea typeface="+mn-ea"/>
+                <a:cs typeface="+mn-cs"/>
+              </a:defRPr>
+            </a:lvl5pPr>
+            <a:lvl6pPr marL="0" indent="0" algn="l" defTabSz="914400" rtl="0" eaLnBrk="1" latinLnBrk="0" hangingPunct="1">
+              <a:lnSpc>
+                <a:spcPct val="140000"/>
+              </a:lnSpc>
+              <a:spcBef>
+                <a:spcPts val="0"/>
+              </a:spcBef>
+              <a:spcAft>
+                <a:spcPts val="600"/>
+              </a:spcAft>
+              <a:buFontTx/>
+              <a:buNone/>
+              <a:defRPr sz="4400" b="1" kern="1200">
+                <a:solidFill>
+                  <a:schemeClr val="tx2"/>
+                </a:solidFill>
+                <a:latin typeface="+mj-lt"/>
+                <a:ea typeface="+mn-ea"/>
+                <a:cs typeface="+mn-cs"/>
+              </a:defRPr>
+            </a:lvl6pPr>
+            <a:lvl7pPr marL="0" indent="0" algn="l" defTabSz="914400" rtl="0" eaLnBrk="1" latinLnBrk="0" hangingPunct="1">
+              <a:lnSpc>
+                <a:spcPct val="140000"/>
+              </a:lnSpc>
+              <a:spcBef>
+                <a:spcPts val="0"/>
+              </a:spcBef>
+              <a:spcAft>
+                <a:spcPts val="600"/>
+              </a:spcAft>
+              <a:buFontTx/>
+              <a:buNone/>
+              <a:defRPr sz="4400" b="1" kern="1200">
+                <a:solidFill>
+                  <a:schemeClr val="tx2"/>
+                </a:solidFill>
+                <a:latin typeface="+mj-lt"/>
+                <a:ea typeface="+mn-ea"/>
+                <a:cs typeface="+mn-cs"/>
+              </a:defRPr>
+            </a:lvl7pPr>
+            <a:lvl8pPr marL="0" indent="0" algn="l" defTabSz="914400" rtl="0" eaLnBrk="1" latinLnBrk="0" hangingPunct="1">
+              <a:lnSpc>
+                <a:spcPct val="140000"/>
+              </a:lnSpc>
+              <a:spcBef>
+                <a:spcPts val="0"/>
+              </a:spcBef>
+              <a:spcAft>
+                <a:spcPts val="600"/>
+              </a:spcAft>
+              <a:buFontTx/>
+              <a:buNone/>
+              <a:defRPr sz="4400" b="1" kern="1200">
+                <a:solidFill>
+                  <a:schemeClr val="tx2"/>
+                </a:solidFill>
+                <a:latin typeface="+mj-lt"/>
+                <a:ea typeface="+mn-ea"/>
+                <a:cs typeface="+mn-cs"/>
+              </a:defRPr>
+            </a:lvl8pPr>
+            <a:lvl9pPr marL="0" indent="0" algn="l" defTabSz="914400" rtl="0" eaLnBrk="1" latinLnBrk="0" hangingPunct="1">
+              <a:lnSpc>
+                <a:spcPct val="140000"/>
+              </a:lnSpc>
+              <a:spcBef>
+                <a:spcPts val="0"/>
+              </a:spcBef>
+              <a:spcAft>
+                <a:spcPts val="600"/>
+              </a:spcAft>
+              <a:buFontTx/>
+              <a:buNone/>
+              <a:defRPr sz="4400" b="1" kern="1200">
+                <a:solidFill>
+                  <a:schemeClr val="tx2"/>
+                </a:solidFill>
+                <a:latin typeface="+mj-lt"/>
+                <a:ea typeface="+mn-ea"/>
+                <a:cs typeface="+mn-cs"/>
+              </a:defRPr>
+            </a:lvl9pPr>
+          </a:lstStyle>
+          <a:p>
+            <a:pPr>
+              <a:lnSpc>
+                <a:spcPct val="100000"/>
+              </a:lnSpc>
+              <a:spcAft>
+                <a:spcPts val="0"/>
+              </a:spcAft>
+            </a:pPr>
+            <a:r>
+              <a:rPr lang="en-US" sz="1400" dirty="0"/>
+              <a:t>2021-2022</a:t>
+            </a:r>
+            <a:endParaRPr lang="en-US" sz="1400" dirty="0"/>
+          </a:p>
+        </p:txBody>
+      </p:sp>
+      <p:sp>
+        <p:nvSpPr>
+          <p:cNvPr id="1115" name="Textplatzhalter 8"/>
+          <p:cNvSpPr txBox="1"/>
+          <p:nvPr/>
+        </p:nvSpPr>
+        <p:spPr bwMode="gray">
+          <a:xfrm>
+            <a:off x="6487668" y="1295400"/>
+            <a:ext cx="754462" cy="341731"/>
+          </a:xfrm>
+          <a:prstGeom prst="rect">
+            <a:avLst/>
+          </a:prstGeom>
+          <a:noFill/>
+          <a:effectLst/>
+        </p:spPr>
+        <p:txBody>
+          <a:bodyPr wrap="none" lIns="144000" tIns="0" rIns="0" bIns="0" anchor="b" anchorCtr="0"/>
+          <a:lstStyle>
+            <a:lvl1pPr marL="0" indent="0" algn="l" defTabSz="914400" rtl="0" eaLnBrk="1" latinLnBrk="0" hangingPunct="1">
+              <a:lnSpc>
+                <a:spcPct val="140000"/>
+              </a:lnSpc>
+              <a:spcBef>
+                <a:spcPts val="0"/>
+              </a:spcBef>
+              <a:spcAft>
+                <a:spcPts val="600"/>
+              </a:spcAft>
+              <a:buFontTx/>
+              <a:buNone/>
+              <a:defRPr sz="4400" b="1" kern="1200">
+                <a:solidFill>
+                  <a:schemeClr val="tx2"/>
+                </a:solidFill>
+                <a:latin typeface="+mj-lt"/>
+                <a:ea typeface="+mn-ea"/>
+                <a:cs typeface="+mn-cs"/>
+              </a:defRPr>
+            </a:lvl1pPr>
+            <a:lvl2pPr marL="0" indent="0" algn="l" defTabSz="914400" rtl="0" eaLnBrk="1" latinLnBrk="0" hangingPunct="1">
+              <a:lnSpc>
+                <a:spcPct val="140000"/>
+              </a:lnSpc>
+              <a:spcBef>
+                <a:spcPts val="0"/>
+              </a:spcBef>
+              <a:spcAft>
+                <a:spcPts val="600"/>
+              </a:spcAft>
+              <a:buFontTx/>
+              <a:buNone/>
+              <a:defRPr sz="4400" b="1" kern="1200">
+                <a:solidFill>
+                  <a:schemeClr val="tx2"/>
+                </a:solidFill>
+                <a:latin typeface="+mj-lt"/>
+                <a:ea typeface="+mn-ea"/>
+                <a:cs typeface="+mn-cs"/>
+              </a:defRPr>
+            </a:lvl2pPr>
+            <a:lvl3pPr marL="0" indent="0" algn="l" defTabSz="914400" rtl="0" eaLnBrk="1" latinLnBrk="0" hangingPunct="1">
+              <a:lnSpc>
+                <a:spcPct val="140000"/>
+              </a:lnSpc>
+              <a:spcBef>
+                <a:spcPts val="0"/>
+              </a:spcBef>
+              <a:spcAft>
+                <a:spcPts val="600"/>
+              </a:spcAft>
+              <a:buFontTx/>
+              <a:buNone/>
+              <a:defRPr sz="4400" b="1" kern="1200">
+                <a:solidFill>
+                  <a:schemeClr val="tx2"/>
+                </a:solidFill>
+                <a:latin typeface="+mj-lt"/>
+                <a:ea typeface="+mn-ea"/>
+                <a:cs typeface="+mn-cs"/>
+              </a:defRPr>
+            </a:lvl3pPr>
+            <a:lvl4pPr marL="0" indent="0" algn="l" defTabSz="914400" rtl="0" eaLnBrk="1" latinLnBrk="0" hangingPunct="1">
+              <a:lnSpc>
+                <a:spcPct val="140000"/>
+              </a:lnSpc>
+              <a:spcBef>
+                <a:spcPts val="0"/>
+              </a:spcBef>
+              <a:spcAft>
+                <a:spcPts val="600"/>
+              </a:spcAft>
+              <a:buFontTx/>
+              <a:buNone/>
+              <a:defRPr sz="4400" b="1" kern="1200">
+                <a:solidFill>
+                  <a:schemeClr val="tx2"/>
+                </a:solidFill>
+                <a:latin typeface="+mj-lt"/>
+                <a:ea typeface="+mn-ea"/>
+                <a:cs typeface="+mn-cs"/>
+              </a:defRPr>
+            </a:lvl4pPr>
+            <a:lvl5pPr marL="0" indent="0" algn="l" defTabSz="914400" rtl="0" eaLnBrk="1" latinLnBrk="0" hangingPunct="1">
+              <a:lnSpc>
+                <a:spcPct val="140000"/>
+              </a:lnSpc>
+              <a:spcBef>
+                <a:spcPts val="0"/>
+              </a:spcBef>
+              <a:spcAft>
+                <a:spcPts val="600"/>
+              </a:spcAft>
+              <a:buFontTx/>
+              <a:buNone/>
+              <a:defRPr sz="4400" b="1" kern="1200">
+                <a:solidFill>
+                  <a:schemeClr val="tx2"/>
+                </a:solidFill>
+                <a:latin typeface="+mj-lt"/>
+                <a:ea typeface="+mn-ea"/>
+                <a:cs typeface="+mn-cs"/>
+              </a:defRPr>
+            </a:lvl5pPr>
+            <a:lvl6pPr marL="0" indent="0" algn="l" defTabSz="914400" rtl="0" eaLnBrk="1" latinLnBrk="0" hangingPunct="1">
+              <a:lnSpc>
+                <a:spcPct val="140000"/>
+              </a:lnSpc>
+              <a:spcBef>
+                <a:spcPts val="0"/>
+              </a:spcBef>
+              <a:spcAft>
+                <a:spcPts val="600"/>
+              </a:spcAft>
+              <a:buFontTx/>
+              <a:buNone/>
+              <a:defRPr sz="4400" b="1" kern="1200">
+                <a:solidFill>
+                  <a:schemeClr val="tx2"/>
+                </a:solidFill>
+                <a:latin typeface="+mj-lt"/>
+                <a:ea typeface="+mn-ea"/>
+                <a:cs typeface="+mn-cs"/>
+              </a:defRPr>
+            </a:lvl6pPr>
+            <a:lvl7pPr marL="0" indent="0" algn="l" defTabSz="914400" rtl="0" eaLnBrk="1" latinLnBrk="0" hangingPunct="1">
+              <a:lnSpc>
+                <a:spcPct val="140000"/>
+              </a:lnSpc>
+              <a:spcBef>
+                <a:spcPts val="0"/>
+              </a:spcBef>
+              <a:spcAft>
+                <a:spcPts val="600"/>
+              </a:spcAft>
+              <a:buFontTx/>
+              <a:buNone/>
+              <a:defRPr sz="4400" b="1" kern="1200">
+                <a:solidFill>
+                  <a:schemeClr val="tx2"/>
+                </a:solidFill>
+                <a:latin typeface="+mj-lt"/>
+                <a:ea typeface="+mn-ea"/>
+                <a:cs typeface="+mn-cs"/>
+              </a:defRPr>
+            </a:lvl7pPr>
+            <a:lvl8pPr marL="0" indent="0" algn="l" defTabSz="914400" rtl="0" eaLnBrk="1" latinLnBrk="0" hangingPunct="1">
+              <a:lnSpc>
+                <a:spcPct val="140000"/>
+              </a:lnSpc>
+              <a:spcBef>
+                <a:spcPts val="0"/>
+              </a:spcBef>
+              <a:spcAft>
+                <a:spcPts val="600"/>
+              </a:spcAft>
+              <a:buFontTx/>
+              <a:buNone/>
+              <a:defRPr sz="4400" b="1" kern="1200">
+                <a:solidFill>
+                  <a:schemeClr val="tx2"/>
+                </a:solidFill>
+                <a:latin typeface="+mj-lt"/>
+                <a:ea typeface="+mn-ea"/>
+                <a:cs typeface="+mn-cs"/>
+              </a:defRPr>
+            </a:lvl8pPr>
+            <a:lvl9pPr marL="0" indent="0" algn="l" defTabSz="914400" rtl="0" eaLnBrk="1" latinLnBrk="0" hangingPunct="1">
+              <a:lnSpc>
+                <a:spcPct val="140000"/>
+              </a:lnSpc>
+              <a:spcBef>
+                <a:spcPts val="0"/>
+              </a:spcBef>
+              <a:spcAft>
+                <a:spcPts val="600"/>
+              </a:spcAft>
+              <a:buFontTx/>
+              <a:buNone/>
+              <a:defRPr sz="4400" b="1" kern="1200">
+                <a:solidFill>
+                  <a:schemeClr val="tx2"/>
+                </a:solidFill>
+                <a:latin typeface="+mj-lt"/>
+                <a:ea typeface="+mn-ea"/>
+                <a:cs typeface="+mn-cs"/>
+              </a:defRPr>
+            </a:lvl9pPr>
+          </a:lstStyle>
+          <a:p>
+            <a:pPr>
+              <a:lnSpc>
+                <a:spcPct val="100000"/>
+              </a:lnSpc>
+              <a:spcAft>
+                <a:spcPts val="0"/>
+              </a:spcAft>
+            </a:pPr>
+            <a:r>
+              <a:rPr lang="en-US" sz="1400" dirty="0"/>
+              <a:t>Jan 2023</a:t>
+            </a:r>
+            <a:endParaRPr lang="en-US" sz="1400" dirty="0"/>
+          </a:p>
+        </p:txBody>
+      </p:sp>
+      <p:sp>
+        <p:nvSpPr>
+          <p:cNvPr id="1117" name="Diamond 1116"/>
+          <p:cNvSpPr/>
+          <p:nvPr/>
+        </p:nvSpPr>
+        <p:spPr bwMode="gray">
+          <a:xfrm>
+            <a:off x="4717004" y="3256404"/>
+            <a:ext cx="173736" cy="146304"/>
+          </a:xfrm>
+          <a:prstGeom prst="diamond">
+            <a:avLst/>
+          </a:prstGeom>
+          <a:solidFill>
+            <a:schemeClr val="bg1"/>
+          </a:solidFill>
+          <a:ln w="6350">
+            <a:solidFill>
+              <a:schemeClr val="tx1"/>
+            </a:solidFill>
+          </a:ln>
+        </p:spPr>
+        <p:style>
+          <a:lnRef idx="2">
+            <a:schemeClr val="accent1">
+              <a:shade val="50000"/>
+            </a:schemeClr>
+          </a:lnRef>
+          <a:fillRef idx="1">
+            <a:schemeClr val="accent1"/>
+          </a:fillRef>
+          <a:effectRef idx="0">
+            <a:schemeClr val="accent1"/>
+          </a:effectRef>
+          <a:fontRef idx="minor">
+            <a:schemeClr val="lt1"/>
+          </a:fontRef>
+        </p:style>
+        <p:txBody>
+          <a:bodyPr rtlCol="0" anchor="ctr"/>
+          <a:lstStyle/>
+          <a:p>
+            <a:pPr algn="ctr">
+              <a:lnSpc>
+                <a:spcPct val="140000"/>
+              </a:lnSpc>
+            </a:pPr>
+            <a:endParaRPr lang="en-US" sz="1600" dirty="0">
+              <a:solidFill>
+                <a:schemeClr val="tx1"/>
+              </a:solidFill>
+            </a:endParaRPr>
+          </a:p>
+        </p:txBody>
+      </p:sp>
+      <p:sp>
+        <p:nvSpPr>
+          <p:cNvPr id="1118" name="Textplatzhalter 2"/>
+          <p:cNvSpPr txBox="1"/>
+          <p:nvPr/>
+        </p:nvSpPr>
+        <p:spPr bwMode="invGray">
+          <a:xfrm>
+            <a:off x="3041129" y="2026457"/>
+            <a:ext cx="2565463" cy="816502"/>
+          </a:xfrm>
+          <a:prstGeom prst="rect">
+            <a:avLst/>
+          </a:prstGeom>
+        </p:spPr>
+        <p:txBody>
+          <a:bodyPr vert="horz" lIns="0" tIns="0" rIns="0" bIns="0" rtlCol="0">
+            <a:noAutofit/>
+          </a:bodyPr>
+          <a:lstStyle>
+            <a:lvl1pPr marL="215900" indent="-215900" algn="l" defTabSz="914400" rtl="0" eaLnBrk="1" latinLnBrk="0" hangingPunct="1">
+              <a:lnSpc>
+                <a:spcPct val="140000"/>
+              </a:lnSpc>
+              <a:spcBef>
+                <a:spcPts val="0"/>
+              </a:spcBef>
+              <a:spcAft>
+                <a:spcPts val="600"/>
+              </a:spcAft>
+              <a:buClr>
+                <a:schemeClr val="tx2"/>
+              </a:buClr>
+              <a:buFont typeface="Arial" panose="020B0604020202020204" pitchFamily="34" charset="0"/>
+              <a:buChar char="•"/>
+              <a:defRPr sz="1600" b="0" kern="1200">
+                <a:solidFill>
+                  <a:schemeClr val="bg1"/>
+                </a:solidFill>
+                <a:latin typeface="+mn-lt"/>
+                <a:ea typeface="+mn-ea"/>
+                <a:cs typeface="+mn-cs"/>
+              </a:defRPr>
+            </a:lvl1pPr>
+            <a:lvl2pPr marL="431800" indent="-215900" algn="l" defTabSz="914400" rtl="0" eaLnBrk="1" latinLnBrk="0" hangingPunct="1">
+              <a:lnSpc>
+                <a:spcPct val="140000"/>
+              </a:lnSpc>
+              <a:spcBef>
+                <a:spcPts val="0"/>
+              </a:spcBef>
+              <a:spcAft>
+                <a:spcPts val="600"/>
+              </a:spcAft>
+              <a:buClr>
+                <a:schemeClr val="tx2"/>
+              </a:buClr>
+              <a:buFont typeface="Arial" panose="020B0604020202020204" pitchFamily="34" charset="0"/>
+              <a:buChar char="•"/>
+              <a:defRPr sz="1600" kern="1200">
+                <a:solidFill>
+                  <a:schemeClr val="bg1"/>
+                </a:solidFill>
+                <a:latin typeface="+mn-lt"/>
+                <a:ea typeface="+mn-ea"/>
+                <a:cs typeface="+mn-cs"/>
+              </a:defRPr>
+            </a:lvl2pPr>
+            <a:lvl3pPr marL="575945" indent="-215900" algn="l" defTabSz="914400" rtl="0" eaLnBrk="1" latinLnBrk="0" hangingPunct="1">
+              <a:lnSpc>
+                <a:spcPct val="140000"/>
+              </a:lnSpc>
+              <a:spcBef>
+                <a:spcPts val="0"/>
+              </a:spcBef>
+              <a:spcAft>
+                <a:spcPts val="600"/>
+              </a:spcAft>
+              <a:buClr>
+                <a:schemeClr val="tx2"/>
+              </a:buClr>
+              <a:buFont typeface="Arial" panose="020B0604020202020204" pitchFamily="34" charset="0"/>
+              <a:buChar char="•"/>
+              <a:defRPr sz="1600" kern="1200">
+                <a:solidFill>
+                  <a:schemeClr val="bg1"/>
+                </a:solidFill>
+                <a:latin typeface="+mn-lt"/>
+                <a:ea typeface="+mn-ea"/>
+                <a:cs typeface="+mn-cs"/>
+              </a:defRPr>
+            </a:lvl3pPr>
+            <a:lvl4pPr marL="791845" indent="-215900" algn="l" defTabSz="914400" rtl="0" eaLnBrk="1" latinLnBrk="0" hangingPunct="1">
+              <a:lnSpc>
+                <a:spcPct val="140000"/>
+              </a:lnSpc>
+              <a:spcBef>
+                <a:spcPts val="0"/>
+              </a:spcBef>
+              <a:spcAft>
+                <a:spcPts val="600"/>
+              </a:spcAft>
+              <a:buClr>
+                <a:schemeClr val="tx2"/>
+              </a:buClr>
+              <a:buFont typeface="Arial" panose="020B0604020202020204" pitchFamily="34" charset="0"/>
+              <a:buChar char="•"/>
+              <a:defRPr sz="1600" kern="1200">
+                <a:solidFill>
+                  <a:schemeClr val="bg1"/>
+                </a:solidFill>
+                <a:latin typeface="+mn-lt"/>
+                <a:ea typeface="+mn-ea"/>
+                <a:cs typeface="+mn-cs"/>
+              </a:defRPr>
+            </a:lvl4pPr>
+            <a:lvl5pPr marL="144145" indent="-144145" algn="l" defTabSz="914400" rtl="0" eaLnBrk="1" latinLnBrk="0" hangingPunct="1">
+              <a:lnSpc>
+                <a:spcPct val="140000"/>
+              </a:lnSpc>
+              <a:spcBef>
+                <a:spcPts val="0"/>
+              </a:spcBef>
+              <a:spcAft>
+                <a:spcPts val="600"/>
+              </a:spcAft>
+              <a:buClr>
+                <a:schemeClr val="tx2"/>
+              </a:buClr>
+              <a:buFont typeface="Arial" panose="020B0604020202020204" pitchFamily="34" charset="0"/>
+              <a:buChar char="•"/>
+              <a:defRPr sz="1200" kern="1200">
+                <a:solidFill>
+                  <a:schemeClr val="bg1"/>
+                </a:solidFill>
+                <a:latin typeface="+mn-lt"/>
+                <a:ea typeface="+mn-ea"/>
+                <a:cs typeface="+mn-cs"/>
+              </a:defRPr>
+            </a:lvl5pPr>
+            <a:lvl6pPr marL="288290" indent="-142875" algn="l" defTabSz="914400" rtl="0" eaLnBrk="1" latinLnBrk="0" hangingPunct="1">
+              <a:lnSpc>
+                <a:spcPct val="140000"/>
+              </a:lnSpc>
+              <a:spcBef>
+                <a:spcPts val="0"/>
+              </a:spcBef>
+              <a:spcAft>
+                <a:spcPts val="600"/>
+              </a:spcAft>
+              <a:buClr>
+                <a:schemeClr val="tx2"/>
+              </a:buClr>
+              <a:buFont typeface="Arial" panose="020B0604020202020204" pitchFamily="34" charset="0"/>
+              <a:buChar char="•"/>
+              <a:defRPr sz="1200" kern="1200">
+                <a:solidFill>
+                  <a:schemeClr val="bg1"/>
+                </a:solidFill>
+                <a:latin typeface="+mn-lt"/>
+                <a:ea typeface="+mn-ea"/>
+                <a:cs typeface="+mn-cs"/>
+              </a:defRPr>
+            </a:lvl6pPr>
+            <a:lvl7pPr marL="431800" indent="-144145" algn="l" defTabSz="914400" rtl="0" eaLnBrk="1" latinLnBrk="0" hangingPunct="1">
+              <a:lnSpc>
+                <a:spcPct val="140000"/>
+              </a:lnSpc>
+              <a:spcBef>
+                <a:spcPts val="0"/>
+              </a:spcBef>
+              <a:spcAft>
+                <a:spcPts val="600"/>
+              </a:spcAft>
+              <a:buClr>
+                <a:schemeClr val="tx2"/>
+              </a:buClr>
+              <a:buFont typeface="Arial" panose="020B0604020202020204" pitchFamily="34" charset="0"/>
+              <a:buChar char="•"/>
+              <a:defRPr sz="1200" kern="1200">
+                <a:solidFill>
+                  <a:schemeClr val="bg1"/>
+                </a:solidFill>
+                <a:latin typeface="+mn-lt"/>
+                <a:ea typeface="+mn-ea"/>
+                <a:cs typeface="+mn-cs"/>
+              </a:defRPr>
+            </a:lvl7pPr>
+            <a:lvl8pPr marL="575945" indent="-144145" algn="l" defTabSz="914400" rtl="0" eaLnBrk="1" latinLnBrk="0" hangingPunct="1">
+              <a:lnSpc>
+                <a:spcPct val="140000"/>
+              </a:lnSpc>
+              <a:spcBef>
+                <a:spcPts val="0"/>
+              </a:spcBef>
+              <a:spcAft>
+                <a:spcPts val="600"/>
+              </a:spcAft>
+              <a:buClr>
+                <a:schemeClr val="tx2"/>
+              </a:buClr>
+              <a:buFont typeface="Arial" panose="020B0604020202020204" pitchFamily="34" charset="0"/>
+              <a:buChar char="•"/>
+              <a:defRPr sz="1200" kern="1200">
+                <a:solidFill>
+                  <a:schemeClr val="bg1"/>
+                </a:solidFill>
+                <a:latin typeface="+mn-lt"/>
+                <a:ea typeface="+mn-ea"/>
+                <a:cs typeface="+mn-cs"/>
+              </a:defRPr>
+            </a:lvl8pPr>
+            <a:lvl9pPr marL="575945" indent="-144145" algn="l" defTabSz="914400" rtl="0" eaLnBrk="1" latinLnBrk="0" hangingPunct="1">
+              <a:lnSpc>
+                <a:spcPct val="140000"/>
+              </a:lnSpc>
+              <a:spcBef>
+                <a:spcPts val="0"/>
+              </a:spcBef>
+              <a:spcAft>
+                <a:spcPts val="600"/>
+              </a:spcAft>
+              <a:buClr>
+                <a:schemeClr val="tx2"/>
+              </a:buClr>
+              <a:buFont typeface="Arial" panose="020B0604020202020204" pitchFamily="34" charset="0"/>
+              <a:buChar char="•"/>
+              <a:defRPr sz="1200" kern="1200">
+                <a:solidFill>
+                  <a:schemeClr val="bg1"/>
+                </a:solidFill>
+                <a:latin typeface="+mn-lt"/>
+                <a:ea typeface="+mn-ea"/>
+                <a:cs typeface="+mn-cs"/>
+              </a:defRPr>
+            </a:lvl9pPr>
+          </a:lstStyle>
+          <a:p>
+            <a:pPr marL="0" lvl="4" indent="0">
+              <a:buNone/>
+            </a:pPr>
+            <a:r>
+              <a:rPr lang="en-US" b="1" dirty="0"/>
+              <a:t>BS in </a:t>
+            </a:r>
+            <a:r>
+              <a:rPr lang="en-US" b="1" u="sng" dirty="0"/>
+              <a:t>Biostatistics</a:t>
+            </a:r>
+            <a:endParaRPr lang="en-US" b="1" u="sng" dirty="0"/>
+          </a:p>
+          <a:p>
+            <a:pPr marL="0" lvl="4" indent="0">
+              <a:buNone/>
+            </a:pPr>
+            <a:r>
+              <a:rPr lang="en-US" b="1" dirty="0"/>
+              <a:t>Nanjing Medical University</a:t>
+            </a:r>
+            <a:endParaRPr lang="en-US" b="1" dirty="0"/>
+          </a:p>
+          <a:p>
+            <a:pPr marL="0" lvl="4" indent="0">
+              <a:buNone/>
+            </a:pPr>
+            <a:r>
+              <a:rPr lang="en-US" b="1" dirty="0"/>
+              <a:t>      Nanjing, China</a:t>
+            </a:r>
+            <a:endParaRPr lang="en-US" b="1" dirty="0"/>
+          </a:p>
+        </p:txBody>
+      </p:sp>
+      <p:sp>
+        <p:nvSpPr>
+          <p:cNvPr id="1120" name="Diamond 1119"/>
+          <p:cNvSpPr/>
+          <p:nvPr/>
+        </p:nvSpPr>
+        <p:spPr bwMode="gray">
+          <a:xfrm>
+            <a:off x="6400799" y="1490827"/>
+            <a:ext cx="173736" cy="146304"/>
+          </a:xfrm>
+          <a:prstGeom prst="diamond">
+            <a:avLst/>
+          </a:prstGeom>
+          <a:solidFill>
+            <a:schemeClr val="bg1"/>
+          </a:solidFill>
+          <a:ln w="6350">
+            <a:solidFill>
+              <a:schemeClr val="tx1"/>
+            </a:solidFill>
+          </a:ln>
+        </p:spPr>
+        <p:style>
+          <a:lnRef idx="2">
+            <a:schemeClr val="accent1">
+              <a:shade val="50000"/>
+            </a:schemeClr>
+          </a:lnRef>
+          <a:fillRef idx="1">
+            <a:schemeClr val="accent1"/>
+          </a:fillRef>
+          <a:effectRef idx="0">
+            <a:schemeClr val="accent1"/>
+          </a:effectRef>
+          <a:fontRef idx="minor">
+            <a:schemeClr val="lt1"/>
+          </a:fontRef>
+        </p:style>
+        <p:txBody>
+          <a:bodyPr rtlCol="0" anchor="ctr"/>
+          <a:lstStyle/>
+          <a:p>
+            <a:pPr algn="ctr">
+              <a:lnSpc>
+                <a:spcPct val="140000"/>
+              </a:lnSpc>
+            </a:pPr>
+            <a:endParaRPr lang="en-US" sz="1600" dirty="0">
+              <a:solidFill>
+                <a:schemeClr val="tx1"/>
+              </a:solidFill>
+            </a:endParaRPr>
+          </a:p>
+        </p:txBody>
+      </p:sp>
+      <p:sp>
+        <p:nvSpPr>
+          <p:cNvPr id="1127" name="Textplatzhalter 2"/>
+          <p:cNvSpPr txBox="1"/>
+          <p:nvPr/>
+        </p:nvSpPr>
+        <p:spPr bwMode="invGray">
+          <a:xfrm>
+            <a:off x="6567581" y="1659690"/>
+            <a:ext cx="2556749" cy="816502"/>
+          </a:xfrm>
+          <a:prstGeom prst="rect">
+            <a:avLst/>
+          </a:prstGeom>
+        </p:spPr>
+        <p:txBody>
+          <a:bodyPr vert="horz" lIns="0" tIns="0" rIns="0" bIns="0" rtlCol="0">
+            <a:noAutofit/>
+          </a:bodyPr>
+          <a:lstStyle>
+            <a:lvl1pPr marL="215900" indent="-215900" algn="l" defTabSz="914400" rtl="0" eaLnBrk="1" latinLnBrk="0" hangingPunct="1">
+              <a:lnSpc>
+                <a:spcPct val="140000"/>
+              </a:lnSpc>
+              <a:spcBef>
+                <a:spcPts val="0"/>
+              </a:spcBef>
+              <a:spcAft>
+                <a:spcPts val="600"/>
+              </a:spcAft>
+              <a:buClr>
+                <a:schemeClr val="tx2"/>
+              </a:buClr>
+              <a:buFont typeface="Arial" panose="020B0604020202020204" pitchFamily="34" charset="0"/>
+              <a:buChar char="•"/>
+              <a:defRPr sz="1600" b="0" kern="1200">
+                <a:solidFill>
+                  <a:schemeClr val="bg1"/>
+                </a:solidFill>
+                <a:latin typeface="+mn-lt"/>
+                <a:ea typeface="+mn-ea"/>
+                <a:cs typeface="+mn-cs"/>
+              </a:defRPr>
+            </a:lvl1pPr>
+            <a:lvl2pPr marL="431800" indent="-215900" algn="l" defTabSz="914400" rtl="0" eaLnBrk="1" latinLnBrk="0" hangingPunct="1">
+              <a:lnSpc>
+                <a:spcPct val="140000"/>
+              </a:lnSpc>
+              <a:spcBef>
+                <a:spcPts val="0"/>
+              </a:spcBef>
+              <a:spcAft>
+                <a:spcPts val="600"/>
+              </a:spcAft>
+              <a:buClr>
+                <a:schemeClr val="tx2"/>
+              </a:buClr>
+              <a:buFont typeface="Arial" panose="020B0604020202020204" pitchFamily="34" charset="0"/>
+              <a:buChar char="•"/>
+              <a:defRPr sz="1600" kern="1200">
+                <a:solidFill>
+                  <a:schemeClr val="bg1"/>
+                </a:solidFill>
+                <a:latin typeface="+mn-lt"/>
+                <a:ea typeface="+mn-ea"/>
+                <a:cs typeface="+mn-cs"/>
+              </a:defRPr>
+            </a:lvl2pPr>
+            <a:lvl3pPr marL="575945" indent="-215900" algn="l" defTabSz="914400" rtl="0" eaLnBrk="1" latinLnBrk="0" hangingPunct="1">
+              <a:lnSpc>
+                <a:spcPct val="140000"/>
+              </a:lnSpc>
+              <a:spcBef>
+                <a:spcPts val="0"/>
+              </a:spcBef>
+              <a:spcAft>
+                <a:spcPts val="600"/>
+              </a:spcAft>
+              <a:buClr>
+                <a:schemeClr val="tx2"/>
+              </a:buClr>
+              <a:buFont typeface="Arial" panose="020B0604020202020204" pitchFamily="34" charset="0"/>
+              <a:buChar char="•"/>
+              <a:defRPr sz="1600" kern="1200">
+                <a:solidFill>
+                  <a:schemeClr val="bg1"/>
+                </a:solidFill>
+                <a:latin typeface="+mn-lt"/>
+                <a:ea typeface="+mn-ea"/>
+                <a:cs typeface="+mn-cs"/>
+              </a:defRPr>
+            </a:lvl3pPr>
+            <a:lvl4pPr marL="791845" indent="-215900" algn="l" defTabSz="914400" rtl="0" eaLnBrk="1" latinLnBrk="0" hangingPunct="1">
+              <a:lnSpc>
+                <a:spcPct val="140000"/>
+              </a:lnSpc>
+              <a:spcBef>
+                <a:spcPts val="0"/>
+              </a:spcBef>
+              <a:spcAft>
+                <a:spcPts val="600"/>
+              </a:spcAft>
+              <a:buClr>
+                <a:schemeClr val="tx2"/>
+              </a:buClr>
+              <a:buFont typeface="Arial" panose="020B0604020202020204" pitchFamily="34" charset="0"/>
+              <a:buChar char="•"/>
+              <a:defRPr sz="1600" kern="1200">
+                <a:solidFill>
+                  <a:schemeClr val="bg1"/>
+                </a:solidFill>
+                <a:latin typeface="+mn-lt"/>
+                <a:ea typeface="+mn-ea"/>
+                <a:cs typeface="+mn-cs"/>
+              </a:defRPr>
+            </a:lvl4pPr>
+            <a:lvl5pPr marL="144145" indent="-144145" algn="l" defTabSz="914400" rtl="0" eaLnBrk="1" latinLnBrk="0" hangingPunct="1">
+              <a:lnSpc>
+                <a:spcPct val="140000"/>
+              </a:lnSpc>
+              <a:spcBef>
+                <a:spcPts val="0"/>
+              </a:spcBef>
+              <a:spcAft>
+                <a:spcPts val="600"/>
+              </a:spcAft>
+              <a:buClr>
+                <a:schemeClr val="tx2"/>
+              </a:buClr>
+              <a:buFont typeface="Arial" panose="020B0604020202020204" pitchFamily="34" charset="0"/>
+              <a:buChar char="•"/>
+              <a:defRPr sz="1200" kern="1200">
+                <a:solidFill>
+                  <a:schemeClr val="bg1"/>
+                </a:solidFill>
+                <a:latin typeface="+mn-lt"/>
+                <a:ea typeface="+mn-ea"/>
+                <a:cs typeface="+mn-cs"/>
+              </a:defRPr>
+            </a:lvl5pPr>
+            <a:lvl6pPr marL="288290" indent="-142875" algn="l" defTabSz="914400" rtl="0" eaLnBrk="1" latinLnBrk="0" hangingPunct="1">
+              <a:lnSpc>
+                <a:spcPct val="140000"/>
+              </a:lnSpc>
+              <a:spcBef>
+                <a:spcPts val="0"/>
+              </a:spcBef>
+              <a:spcAft>
+                <a:spcPts val="600"/>
+              </a:spcAft>
+              <a:buClr>
+                <a:schemeClr val="tx2"/>
+              </a:buClr>
+              <a:buFont typeface="Arial" panose="020B0604020202020204" pitchFamily="34" charset="0"/>
+              <a:buChar char="•"/>
+              <a:defRPr sz="1200" kern="1200">
+                <a:solidFill>
+                  <a:schemeClr val="bg1"/>
+                </a:solidFill>
+                <a:latin typeface="+mn-lt"/>
+                <a:ea typeface="+mn-ea"/>
+                <a:cs typeface="+mn-cs"/>
+              </a:defRPr>
+            </a:lvl6pPr>
+            <a:lvl7pPr marL="431800" indent="-144145" algn="l" defTabSz="914400" rtl="0" eaLnBrk="1" latinLnBrk="0" hangingPunct="1">
+              <a:lnSpc>
+                <a:spcPct val="140000"/>
+              </a:lnSpc>
+              <a:spcBef>
+                <a:spcPts val="0"/>
+              </a:spcBef>
+              <a:spcAft>
+                <a:spcPts val="600"/>
+              </a:spcAft>
+              <a:buClr>
+                <a:schemeClr val="tx2"/>
+              </a:buClr>
+              <a:buFont typeface="Arial" panose="020B0604020202020204" pitchFamily="34" charset="0"/>
+              <a:buChar char="•"/>
+              <a:defRPr sz="1200" kern="1200">
+                <a:solidFill>
+                  <a:schemeClr val="bg1"/>
+                </a:solidFill>
+                <a:latin typeface="+mn-lt"/>
+                <a:ea typeface="+mn-ea"/>
+                <a:cs typeface="+mn-cs"/>
+              </a:defRPr>
+            </a:lvl7pPr>
+            <a:lvl8pPr marL="575945" indent="-144145" algn="l" defTabSz="914400" rtl="0" eaLnBrk="1" latinLnBrk="0" hangingPunct="1">
+              <a:lnSpc>
+                <a:spcPct val="140000"/>
+              </a:lnSpc>
+              <a:spcBef>
+                <a:spcPts val="0"/>
+              </a:spcBef>
+              <a:spcAft>
+                <a:spcPts val="600"/>
+              </a:spcAft>
+              <a:buClr>
+                <a:schemeClr val="tx2"/>
+              </a:buClr>
+              <a:buFont typeface="Arial" panose="020B0604020202020204" pitchFamily="34" charset="0"/>
+              <a:buChar char="•"/>
+              <a:defRPr sz="1200" kern="1200">
+                <a:solidFill>
+                  <a:schemeClr val="bg1"/>
+                </a:solidFill>
+                <a:latin typeface="+mn-lt"/>
+                <a:ea typeface="+mn-ea"/>
+                <a:cs typeface="+mn-cs"/>
+              </a:defRPr>
+            </a:lvl8pPr>
+            <a:lvl9pPr marL="575945" indent="-144145" algn="l" defTabSz="914400" rtl="0" eaLnBrk="1" latinLnBrk="0" hangingPunct="1">
+              <a:lnSpc>
+                <a:spcPct val="140000"/>
+              </a:lnSpc>
+              <a:spcBef>
+                <a:spcPts val="0"/>
+              </a:spcBef>
+              <a:spcAft>
+                <a:spcPts val="600"/>
+              </a:spcAft>
+              <a:buClr>
+                <a:schemeClr val="tx2"/>
+              </a:buClr>
+              <a:buFont typeface="Arial" panose="020B0604020202020204" pitchFamily="34" charset="0"/>
+              <a:buChar char="•"/>
+              <a:defRPr sz="1200" kern="1200">
+                <a:solidFill>
+                  <a:schemeClr val="bg1"/>
+                </a:solidFill>
+                <a:latin typeface="+mn-lt"/>
+                <a:ea typeface="+mn-ea"/>
+                <a:cs typeface="+mn-cs"/>
+              </a:defRPr>
+            </a:lvl9pPr>
+          </a:lstStyle>
+          <a:p>
+            <a:pPr marL="0" lvl="4" indent="0">
+              <a:buNone/>
+            </a:pPr>
+            <a:r>
+              <a:rPr lang="en-US" b="1" dirty="0"/>
+              <a:t>PhD program in </a:t>
+            </a:r>
+            <a:r>
+              <a:rPr lang="en-US" b="1" u="sng" dirty="0"/>
+              <a:t>Biostatistics</a:t>
+            </a:r>
+            <a:endParaRPr lang="en-US" b="1" u="sng" dirty="0"/>
+          </a:p>
+          <a:p>
+            <a:pPr marL="0" lvl="4" indent="0">
+              <a:buNone/>
+            </a:pPr>
+            <a:r>
+              <a:rPr lang="en-US" b="1" dirty="0"/>
+              <a:t>Graduate Research Assistant</a:t>
+            </a:r>
+            <a:endParaRPr lang="en-US" b="1" dirty="0"/>
+          </a:p>
+          <a:p>
+            <a:pPr marL="0" lvl="4" indent="0">
+              <a:buNone/>
+            </a:pPr>
+            <a:r>
+              <a:rPr lang="en-US" b="1" dirty="0"/>
+              <a:t>The University of Iowa</a:t>
+            </a:r>
+            <a:endParaRPr lang="en-US" b="1" dirty="0"/>
+          </a:p>
+          <a:p>
+            <a:pPr marL="0" lvl="4" indent="0">
+              <a:buNone/>
+            </a:pPr>
+            <a:r>
+              <a:rPr lang="en-US" b="1" dirty="0"/>
+              <a:t>      Iowa City, IA, USA</a:t>
+            </a:r>
+            <a:endParaRPr lang="en-US" b="1" dirty="0"/>
+          </a:p>
+        </p:txBody>
+      </p:sp>
+      <p:sp>
+        <p:nvSpPr>
+          <p:cNvPr id="1129" name="Diamond 1128"/>
+          <p:cNvSpPr/>
+          <p:nvPr/>
+        </p:nvSpPr>
+        <p:spPr bwMode="gray">
+          <a:xfrm>
+            <a:off x="8450538" y="3267965"/>
+            <a:ext cx="173736" cy="146304"/>
+          </a:xfrm>
+          <a:prstGeom prst="diamond">
+            <a:avLst/>
+          </a:prstGeom>
+          <a:solidFill>
+            <a:srgbClr val="FF0000"/>
+          </a:solidFill>
+          <a:ln w="6350">
+            <a:solidFill>
+              <a:schemeClr val="tx1"/>
+            </a:solidFill>
+          </a:ln>
+        </p:spPr>
+        <p:style>
+          <a:lnRef idx="2">
+            <a:schemeClr val="accent1">
+              <a:shade val="50000"/>
+            </a:schemeClr>
+          </a:lnRef>
+          <a:fillRef idx="1">
+            <a:schemeClr val="accent1"/>
+          </a:fillRef>
+          <a:effectRef idx="0">
+            <a:schemeClr val="accent1"/>
+          </a:effectRef>
+          <a:fontRef idx="minor">
+            <a:schemeClr val="lt1"/>
+          </a:fontRef>
+        </p:style>
+        <p:txBody>
+          <a:bodyPr rtlCol="0" anchor="ctr"/>
+          <a:lstStyle/>
+          <a:p>
+            <a:pPr algn="ctr">
+              <a:lnSpc>
+                <a:spcPct val="140000"/>
+              </a:lnSpc>
+            </a:pPr>
+            <a:endParaRPr lang="en-US" sz="1600" dirty="0">
+              <a:solidFill>
+                <a:schemeClr val="tx1"/>
+              </a:solidFill>
+            </a:endParaRPr>
+          </a:p>
+        </p:txBody>
+      </p:sp>
+      <p:sp>
+        <p:nvSpPr>
+          <p:cNvPr id="1130" name="Textplatzhalter 2"/>
+          <p:cNvSpPr txBox="1"/>
+          <p:nvPr/>
+        </p:nvSpPr>
+        <p:spPr bwMode="invGray">
+          <a:xfrm>
+            <a:off x="8715817" y="3501835"/>
+            <a:ext cx="2280759" cy="816502"/>
+          </a:xfrm>
+          <a:prstGeom prst="rect">
+            <a:avLst/>
+          </a:prstGeom>
+        </p:spPr>
+        <p:txBody>
+          <a:bodyPr vert="horz" lIns="0" tIns="0" rIns="0" bIns="0" rtlCol="0">
+            <a:noAutofit/>
+          </a:bodyPr>
+          <a:lstStyle>
+            <a:lvl1pPr marL="215900" indent="-215900" algn="l" defTabSz="914400" rtl="0" eaLnBrk="1" latinLnBrk="0" hangingPunct="1">
+              <a:lnSpc>
+                <a:spcPct val="140000"/>
+              </a:lnSpc>
+              <a:spcBef>
+                <a:spcPts val="0"/>
+              </a:spcBef>
+              <a:spcAft>
+                <a:spcPts val="600"/>
+              </a:spcAft>
+              <a:buClr>
+                <a:schemeClr val="tx2"/>
+              </a:buClr>
+              <a:buFont typeface="Arial" panose="020B0604020202020204" pitchFamily="34" charset="0"/>
+              <a:buChar char="•"/>
+              <a:defRPr sz="1600" b="0" kern="1200">
+                <a:solidFill>
+                  <a:schemeClr val="bg1"/>
+                </a:solidFill>
+                <a:latin typeface="+mn-lt"/>
+                <a:ea typeface="+mn-ea"/>
+                <a:cs typeface="+mn-cs"/>
+              </a:defRPr>
+            </a:lvl1pPr>
+            <a:lvl2pPr marL="431800" indent="-215900" algn="l" defTabSz="914400" rtl="0" eaLnBrk="1" latinLnBrk="0" hangingPunct="1">
+              <a:lnSpc>
+                <a:spcPct val="140000"/>
+              </a:lnSpc>
+              <a:spcBef>
+                <a:spcPts val="0"/>
+              </a:spcBef>
+              <a:spcAft>
+                <a:spcPts val="600"/>
+              </a:spcAft>
+              <a:buClr>
+                <a:schemeClr val="tx2"/>
+              </a:buClr>
+              <a:buFont typeface="Arial" panose="020B0604020202020204" pitchFamily="34" charset="0"/>
+              <a:buChar char="•"/>
+              <a:defRPr sz="1600" kern="1200">
+                <a:solidFill>
+                  <a:schemeClr val="bg1"/>
+                </a:solidFill>
+                <a:latin typeface="+mn-lt"/>
+                <a:ea typeface="+mn-ea"/>
+                <a:cs typeface="+mn-cs"/>
+              </a:defRPr>
+            </a:lvl2pPr>
+            <a:lvl3pPr marL="575945" indent="-215900" algn="l" defTabSz="914400" rtl="0" eaLnBrk="1" latinLnBrk="0" hangingPunct="1">
+              <a:lnSpc>
+                <a:spcPct val="140000"/>
+              </a:lnSpc>
+              <a:spcBef>
+                <a:spcPts val="0"/>
+              </a:spcBef>
+              <a:spcAft>
+                <a:spcPts val="600"/>
+              </a:spcAft>
+              <a:buClr>
+                <a:schemeClr val="tx2"/>
+              </a:buClr>
+              <a:buFont typeface="Arial" panose="020B0604020202020204" pitchFamily="34" charset="0"/>
+              <a:buChar char="•"/>
+              <a:defRPr sz="1600" kern="1200">
+                <a:solidFill>
+                  <a:schemeClr val="bg1"/>
+                </a:solidFill>
+                <a:latin typeface="+mn-lt"/>
+                <a:ea typeface="+mn-ea"/>
+                <a:cs typeface="+mn-cs"/>
+              </a:defRPr>
+            </a:lvl3pPr>
+            <a:lvl4pPr marL="791845" indent="-215900" algn="l" defTabSz="914400" rtl="0" eaLnBrk="1" latinLnBrk="0" hangingPunct="1">
+              <a:lnSpc>
+                <a:spcPct val="140000"/>
+              </a:lnSpc>
+              <a:spcBef>
+                <a:spcPts val="0"/>
+              </a:spcBef>
+              <a:spcAft>
+                <a:spcPts val="600"/>
+              </a:spcAft>
+              <a:buClr>
+                <a:schemeClr val="tx2"/>
+              </a:buClr>
+              <a:buFont typeface="Arial" panose="020B0604020202020204" pitchFamily="34" charset="0"/>
+              <a:buChar char="•"/>
+              <a:defRPr sz="1600" kern="1200">
+                <a:solidFill>
+                  <a:schemeClr val="bg1"/>
+                </a:solidFill>
+                <a:latin typeface="+mn-lt"/>
+                <a:ea typeface="+mn-ea"/>
+                <a:cs typeface="+mn-cs"/>
+              </a:defRPr>
+            </a:lvl4pPr>
+            <a:lvl5pPr marL="144145" indent="-144145" algn="l" defTabSz="914400" rtl="0" eaLnBrk="1" latinLnBrk="0" hangingPunct="1">
+              <a:lnSpc>
+                <a:spcPct val="140000"/>
+              </a:lnSpc>
+              <a:spcBef>
+                <a:spcPts val="0"/>
+              </a:spcBef>
+              <a:spcAft>
+                <a:spcPts val="600"/>
+              </a:spcAft>
+              <a:buClr>
+                <a:schemeClr val="tx2"/>
+              </a:buClr>
+              <a:buFont typeface="Arial" panose="020B0604020202020204" pitchFamily="34" charset="0"/>
+              <a:buChar char="•"/>
+              <a:defRPr sz="1200" kern="1200">
+                <a:solidFill>
+                  <a:schemeClr val="bg1"/>
+                </a:solidFill>
+                <a:latin typeface="+mn-lt"/>
+                <a:ea typeface="+mn-ea"/>
+                <a:cs typeface="+mn-cs"/>
+              </a:defRPr>
+            </a:lvl5pPr>
+            <a:lvl6pPr marL="288290" indent="-142875" algn="l" defTabSz="914400" rtl="0" eaLnBrk="1" latinLnBrk="0" hangingPunct="1">
+              <a:lnSpc>
+                <a:spcPct val="140000"/>
+              </a:lnSpc>
+              <a:spcBef>
+                <a:spcPts val="0"/>
+              </a:spcBef>
+              <a:spcAft>
+                <a:spcPts val="600"/>
+              </a:spcAft>
+              <a:buClr>
+                <a:schemeClr val="tx2"/>
+              </a:buClr>
+              <a:buFont typeface="Arial" panose="020B0604020202020204" pitchFamily="34" charset="0"/>
+              <a:buChar char="•"/>
+              <a:defRPr sz="1200" kern="1200">
+                <a:solidFill>
+                  <a:schemeClr val="bg1"/>
+                </a:solidFill>
+                <a:latin typeface="+mn-lt"/>
+                <a:ea typeface="+mn-ea"/>
+                <a:cs typeface="+mn-cs"/>
+              </a:defRPr>
+            </a:lvl6pPr>
+            <a:lvl7pPr marL="431800" indent="-144145" algn="l" defTabSz="914400" rtl="0" eaLnBrk="1" latinLnBrk="0" hangingPunct="1">
+              <a:lnSpc>
+                <a:spcPct val="140000"/>
+              </a:lnSpc>
+              <a:spcBef>
+                <a:spcPts val="0"/>
+              </a:spcBef>
+              <a:spcAft>
+                <a:spcPts val="600"/>
+              </a:spcAft>
+              <a:buClr>
+                <a:schemeClr val="tx2"/>
+              </a:buClr>
+              <a:buFont typeface="Arial" panose="020B0604020202020204" pitchFamily="34" charset="0"/>
+              <a:buChar char="•"/>
+              <a:defRPr sz="1200" kern="1200">
+                <a:solidFill>
+                  <a:schemeClr val="bg1"/>
+                </a:solidFill>
+                <a:latin typeface="+mn-lt"/>
+                <a:ea typeface="+mn-ea"/>
+                <a:cs typeface="+mn-cs"/>
+              </a:defRPr>
+            </a:lvl7pPr>
+            <a:lvl8pPr marL="575945" indent="-144145" algn="l" defTabSz="914400" rtl="0" eaLnBrk="1" latinLnBrk="0" hangingPunct="1">
+              <a:lnSpc>
+                <a:spcPct val="140000"/>
+              </a:lnSpc>
+              <a:spcBef>
+                <a:spcPts val="0"/>
+              </a:spcBef>
+              <a:spcAft>
+                <a:spcPts val="600"/>
+              </a:spcAft>
+              <a:buClr>
+                <a:schemeClr val="tx2"/>
+              </a:buClr>
+              <a:buFont typeface="Arial" panose="020B0604020202020204" pitchFamily="34" charset="0"/>
+              <a:buChar char="•"/>
+              <a:defRPr sz="1200" kern="1200">
+                <a:solidFill>
+                  <a:schemeClr val="bg1"/>
+                </a:solidFill>
+                <a:latin typeface="+mn-lt"/>
+                <a:ea typeface="+mn-ea"/>
+                <a:cs typeface="+mn-cs"/>
+              </a:defRPr>
+            </a:lvl8pPr>
+            <a:lvl9pPr marL="575945" indent="-144145" algn="l" defTabSz="914400" rtl="0" eaLnBrk="1" latinLnBrk="0" hangingPunct="1">
+              <a:lnSpc>
+                <a:spcPct val="140000"/>
+              </a:lnSpc>
+              <a:spcBef>
+                <a:spcPts val="0"/>
+              </a:spcBef>
+              <a:spcAft>
+                <a:spcPts val="600"/>
+              </a:spcAft>
+              <a:buClr>
+                <a:schemeClr val="tx2"/>
+              </a:buClr>
+              <a:buFont typeface="Arial" panose="020B0604020202020204" pitchFamily="34" charset="0"/>
+              <a:buChar char="•"/>
+              <a:defRPr sz="1200" kern="1200">
+                <a:solidFill>
+                  <a:schemeClr val="bg1"/>
+                </a:solidFill>
+                <a:latin typeface="+mn-lt"/>
+                <a:ea typeface="+mn-ea"/>
+                <a:cs typeface="+mn-cs"/>
+              </a:defRPr>
+            </a:lvl9pPr>
+          </a:lstStyle>
+          <a:p>
+            <a:pPr marL="0" lvl="4" indent="0">
+              <a:buNone/>
+            </a:pPr>
+            <a:r>
+              <a:rPr lang="en-US" b="1" dirty="0"/>
+              <a:t>Clinical Data Scientist Co-Op</a:t>
+            </a:r>
+            <a:endParaRPr lang="en-US" b="1" dirty="0"/>
+          </a:p>
+          <a:p>
+            <a:pPr marL="0" lvl="4" indent="0">
+              <a:buNone/>
+            </a:pPr>
+            <a:r>
+              <a:rPr lang="en-US" b="1" dirty="0"/>
+              <a:t>      Remote</a:t>
+            </a:r>
+            <a:endParaRPr lang="en-US" b="1" dirty="0"/>
+          </a:p>
+        </p:txBody>
+      </p:sp>
+      <p:cxnSp>
+        <p:nvCxnSpPr>
+          <p:cNvPr id="1131" name="Straight Connector 1130"/>
+          <p:cNvCxnSpPr/>
+          <p:nvPr/>
+        </p:nvCxnSpPr>
+        <p:spPr bwMode="gray">
+          <a:xfrm flipV="1">
+            <a:off x="2957934" y="2957154"/>
+            <a:ext cx="7691016" cy="62670"/>
+          </a:xfrm>
+          <a:prstGeom prst="line">
+            <a:avLst/>
+          </a:prstGeom>
+          <a:ln w="6350">
+            <a:solidFill>
+              <a:schemeClr val="bg1"/>
+            </a:solidFill>
+          </a:ln>
+        </p:spPr>
+        <p:style>
+          <a:lnRef idx="1">
+            <a:schemeClr val="accent1"/>
+          </a:lnRef>
+          <a:fillRef idx="0">
+            <a:schemeClr val="accent1"/>
+          </a:fillRef>
+          <a:effectRef idx="0">
+            <a:schemeClr val="accent1"/>
+          </a:effectRef>
+          <a:fontRef idx="minor">
+            <a:schemeClr val="tx1"/>
+          </a:fontRef>
+        </p:style>
+      </p:cxnSp>
+      <p:cxnSp>
+        <p:nvCxnSpPr>
+          <p:cNvPr id="1132" name="Straight Connector 1131"/>
+          <p:cNvCxnSpPr/>
+          <p:nvPr/>
+        </p:nvCxnSpPr>
+        <p:spPr bwMode="gray">
+          <a:xfrm flipV="1">
+            <a:off x="6487668" y="1619250"/>
+            <a:ext cx="0" cy="1375183"/>
+          </a:xfrm>
+          <a:prstGeom prst="line">
+            <a:avLst/>
+          </a:prstGeom>
+          <a:ln w="6350">
+            <a:solidFill>
+              <a:schemeClr val="bg1"/>
+            </a:solidFill>
+          </a:ln>
+        </p:spPr>
+        <p:style>
+          <a:lnRef idx="1">
+            <a:schemeClr val="accent1"/>
+          </a:lnRef>
+          <a:fillRef idx="0">
+            <a:schemeClr val="accent1"/>
+          </a:fillRef>
+          <a:effectRef idx="0">
+            <a:schemeClr val="accent1"/>
+          </a:effectRef>
+          <a:fontRef idx="minor">
+            <a:schemeClr val="tx1"/>
+          </a:fontRef>
+        </p:style>
+      </p:cxnSp>
+      <p:cxnSp>
+        <p:nvCxnSpPr>
+          <p:cNvPr id="1133" name="Straight Connector 1132"/>
+          <p:cNvCxnSpPr/>
+          <p:nvPr/>
+        </p:nvCxnSpPr>
+        <p:spPr bwMode="gray">
+          <a:xfrm flipH="1" flipV="1">
+            <a:off x="2941689" y="1890864"/>
+            <a:ext cx="6955" cy="1119115"/>
+          </a:xfrm>
+          <a:prstGeom prst="line">
+            <a:avLst/>
+          </a:prstGeom>
+          <a:ln w="6350">
+            <a:solidFill>
+              <a:schemeClr val="bg1"/>
+            </a:solidFill>
+          </a:ln>
+        </p:spPr>
+        <p:style>
+          <a:lnRef idx="1">
+            <a:schemeClr val="accent1"/>
+          </a:lnRef>
+          <a:fillRef idx="0">
+            <a:schemeClr val="accent1"/>
+          </a:fillRef>
+          <a:effectRef idx="0">
+            <a:schemeClr val="accent1"/>
+          </a:effectRef>
+          <a:fontRef idx="minor">
+            <a:schemeClr val="tx1"/>
+          </a:fontRef>
+        </p:style>
+      </p:cxnSp>
+      <p:cxnSp>
+        <p:nvCxnSpPr>
+          <p:cNvPr id="1134" name="Straight Connector 1133"/>
+          <p:cNvCxnSpPr/>
+          <p:nvPr/>
+        </p:nvCxnSpPr>
+        <p:spPr bwMode="gray">
+          <a:xfrm flipV="1">
+            <a:off x="8540953" y="2983874"/>
+            <a:ext cx="0" cy="292726"/>
+          </a:xfrm>
+          <a:prstGeom prst="line">
+            <a:avLst/>
+          </a:prstGeom>
+          <a:ln w="6350">
+            <a:solidFill>
+              <a:schemeClr val="bg1"/>
+            </a:solidFill>
+          </a:ln>
+        </p:spPr>
+        <p:style>
+          <a:lnRef idx="1">
+            <a:schemeClr val="accent1"/>
+          </a:lnRef>
+          <a:fillRef idx="0">
+            <a:schemeClr val="accent1"/>
+          </a:fillRef>
+          <a:effectRef idx="0">
+            <a:schemeClr val="accent1"/>
+          </a:effectRef>
+          <a:fontRef idx="minor">
+            <a:schemeClr val="tx1"/>
+          </a:fontRef>
+        </p:style>
+      </p:cxnSp>
+      <p:cxnSp>
+        <p:nvCxnSpPr>
+          <p:cNvPr id="1135" name="Straight Connector 1134"/>
+          <p:cNvCxnSpPr>
+            <a:stCxn id="1114" idx="1"/>
+          </p:cNvCxnSpPr>
+          <p:nvPr/>
+        </p:nvCxnSpPr>
+        <p:spPr bwMode="gray">
+          <a:xfrm flipV="1">
+            <a:off x="4803872" y="3009429"/>
+            <a:ext cx="0" cy="262594"/>
+          </a:xfrm>
+          <a:prstGeom prst="line">
+            <a:avLst/>
+          </a:prstGeom>
+          <a:ln w="6350">
+            <a:solidFill>
+              <a:schemeClr val="bg1"/>
+            </a:solidFill>
+          </a:ln>
+        </p:spPr>
+        <p:style>
+          <a:lnRef idx="1">
+            <a:schemeClr val="accent1"/>
+          </a:lnRef>
+          <a:fillRef idx="0">
+            <a:schemeClr val="accent1"/>
+          </a:fillRef>
+          <a:effectRef idx="0">
+            <a:schemeClr val="accent1"/>
+          </a:effectRef>
+          <a:fontRef idx="minor">
+            <a:schemeClr val="tx1"/>
+          </a:fontRef>
+        </p:style>
+      </p:cxnSp>
+      <p:sp>
+        <p:nvSpPr>
+          <p:cNvPr id="1138" name="Textplatzhalter 8"/>
+          <p:cNvSpPr txBox="1"/>
+          <p:nvPr/>
+        </p:nvSpPr>
+        <p:spPr bwMode="gray">
+          <a:xfrm>
+            <a:off x="10042097" y="1977186"/>
+            <a:ext cx="1235503" cy="525841"/>
+          </a:xfrm>
+          <a:prstGeom prst="rect">
+            <a:avLst/>
+          </a:prstGeom>
+          <a:noFill/>
+          <a:effectLst/>
+        </p:spPr>
+        <p:txBody>
+          <a:bodyPr wrap="none" lIns="144000" tIns="0" rIns="0" bIns="0" anchor="b" anchorCtr="0"/>
+          <a:lstStyle>
+            <a:lvl1pPr marL="0" indent="0" algn="l" defTabSz="914400" rtl="0" eaLnBrk="1" latinLnBrk="0" hangingPunct="1">
+              <a:lnSpc>
+                <a:spcPct val="140000"/>
+              </a:lnSpc>
+              <a:spcBef>
+                <a:spcPts val="0"/>
+              </a:spcBef>
+              <a:spcAft>
+                <a:spcPts val="600"/>
+              </a:spcAft>
+              <a:buFontTx/>
+              <a:buNone/>
+              <a:defRPr sz="4400" b="1" kern="1200">
+                <a:solidFill>
+                  <a:schemeClr val="tx2"/>
+                </a:solidFill>
+                <a:latin typeface="+mj-lt"/>
+                <a:ea typeface="+mn-ea"/>
+                <a:cs typeface="+mn-cs"/>
+              </a:defRPr>
+            </a:lvl1pPr>
+            <a:lvl2pPr marL="0" indent="0" algn="l" defTabSz="914400" rtl="0" eaLnBrk="1" latinLnBrk="0" hangingPunct="1">
+              <a:lnSpc>
+                <a:spcPct val="140000"/>
+              </a:lnSpc>
+              <a:spcBef>
+                <a:spcPts val="0"/>
+              </a:spcBef>
+              <a:spcAft>
+                <a:spcPts val="600"/>
+              </a:spcAft>
+              <a:buFontTx/>
+              <a:buNone/>
+              <a:defRPr sz="4400" b="1" kern="1200">
+                <a:solidFill>
+                  <a:schemeClr val="tx2"/>
+                </a:solidFill>
+                <a:latin typeface="+mj-lt"/>
+                <a:ea typeface="+mn-ea"/>
+                <a:cs typeface="+mn-cs"/>
+              </a:defRPr>
+            </a:lvl2pPr>
+            <a:lvl3pPr marL="0" indent="0" algn="l" defTabSz="914400" rtl="0" eaLnBrk="1" latinLnBrk="0" hangingPunct="1">
+              <a:lnSpc>
+                <a:spcPct val="140000"/>
+              </a:lnSpc>
+              <a:spcBef>
+                <a:spcPts val="0"/>
+              </a:spcBef>
+              <a:spcAft>
+                <a:spcPts val="600"/>
+              </a:spcAft>
+              <a:buFontTx/>
+              <a:buNone/>
+              <a:defRPr sz="4400" b="1" kern="1200">
+                <a:solidFill>
+                  <a:schemeClr val="tx2"/>
+                </a:solidFill>
+                <a:latin typeface="+mj-lt"/>
+                <a:ea typeface="+mn-ea"/>
+                <a:cs typeface="+mn-cs"/>
+              </a:defRPr>
+            </a:lvl3pPr>
+            <a:lvl4pPr marL="0" indent="0" algn="l" defTabSz="914400" rtl="0" eaLnBrk="1" latinLnBrk="0" hangingPunct="1">
+              <a:lnSpc>
+                <a:spcPct val="140000"/>
+              </a:lnSpc>
+              <a:spcBef>
+                <a:spcPts val="0"/>
+              </a:spcBef>
+              <a:spcAft>
+                <a:spcPts val="600"/>
+              </a:spcAft>
+              <a:buFontTx/>
+              <a:buNone/>
+              <a:defRPr sz="4400" b="1" kern="1200">
+                <a:solidFill>
+                  <a:schemeClr val="tx2"/>
+                </a:solidFill>
+                <a:latin typeface="+mj-lt"/>
+                <a:ea typeface="+mn-ea"/>
+                <a:cs typeface="+mn-cs"/>
+              </a:defRPr>
+            </a:lvl4pPr>
+            <a:lvl5pPr marL="0" indent="0" algn="l" defTabSz="914400" rtl="0" eaLnBrk="1" latinLnBrk="0" hangingPunct="1">
+              <a:lnSpc>
+                <a:spcPct val="140000"/>
+              </a:lnSpc>
+              <a:spcBef>
+                <a:spcPts val="0"/>
+              </a:spcBef>
+              <a:spcAft>
+                <a:spcPts val="600"/>
+              </a:spcAft>
+              <a:buFontTx/>
+              <a:buNone/>
+              <a:defRPr sz="4400" b="1" kern="1200">
+                <a:solidFill>
+                  <a:schemeClr val="tx2"/>
+                </a:solidFill>
+                <a:latin typeface="+mj-lt"/>
+                <a:ea typeface="+mn-ea"/>
+                <a:cs typeface="+mn-cs"/>
+              </a:defRPr>
+            </a:lvl5pPr>
+            <a:lvl6pPr marL="0" indent="0" algn="l" defTabSz="914400" rtl="0" eaLnBrk="1" latinLnBrk="0" hangingPunct="1">
+              <a:lnSpc>
+                <a:spcPct val="140000"/>
+              </a:lnSpc>
+              <a:spcBef>
+                <a:spcPts val="0"/>
+              </a:spcBef>
+              <a:spcAft>
+                <a:spcPts val="600"/>
+              </a:spcAft>
+              <a:buFontTx/>
+              <a:buNone/>
+              <a:defRPr sz="4400" b="1" kern="1200">
+                <a:solidFill>
+                  <a:schemeClr val="tx2"/>
+                </a:solidFill>
+                <a:latin typeface="+mj-lt"/>
+                <a:ea typeface="+mn-ea"/>
+                <a:cs typeface="+mn-cs"/>
+              </a:defRPr>
+            </a:lvl6pPr>
+            <a:lvl7pPr marL="0" indent="0" algn="l" defTabSz="914400" rtl="0" eaLnBrk="1" latinLnBrk="0" hangingPunct="1">
+              <a:lnSpc>
+                <a:spcPct val="140000"/>
+              </a:lnSpc>
+              <a:spcBef>
+                <a:spcPts val="0"/>
+              </a:spcBef>
+              <a:spcAft>
+                <a:spcPts val="600"/>
+              </a:spcAft>
+              <a:buFontTx/>
+              <a:buNone/>
+              <a:defRPr sz="4400" b="1" kern="1200">
+                <a:solidFill>
+                  <a:schemeClr val="tx2"/>
+                </a:solidFill>
+                <a:latin typeface="+mj-lt"/>
+                <a:ea typeface="+mn-ea"/>
+                <a:cs typeface="+mn-cs"/>
+              </a:defRPr>
+            </a:lvl7pPr>
+            <a:lvl8pPr marL="0" indent="0" algn="l" defTabSz="914400" rtl="0" eaLnBrk="1" latinLnBrk="0" hangingPunct="1">
+              <a:lnSpc>
+                <a:spcPct val="140000"/>
+              </a:lnSpc>
+              <a:spcBef>
+                <a:spcPts val="0"/>
+              </a:spcBef>
+              <a:spcAft>
+                <a:spcPts val="600"/>
+              </a:spcAft>
+              <a:buFontTx/>
+              <a:buNone/>
+              <a:defRPr sz="4400" b="1" kern="1200">
+                <a:solidFill>
+                  <a:schemeClr val="tx2"/>
+                </a:solidFill>
+                <a:latin typeface="+mj-lt"/>
+                <a:ea typeface="+mn-ea"/>
+                <a:cs typeface="+mn-cs"/>
+              </a:defRPr>
+            </a:lvl8pPr>
+            <a:lvl9pPr marL="0" indent="0" algn="l" defTabSz="914400" rtl="0" eaLnBrk="1" latinLnBrk="0" hangingPunct="1">
+              <a:lnSpc>
+                <a:spcPct val="140000"/>
+              </a:lnSpc>
+              <a:spcBef>
+                <a:spcPts val="0"/>
+              </a:spcBef>
+              <a:spcAft>
+                <a:spcPts val="600"/>
+              </a:spcAft>
+              <a:buFontTx/>
+              <a:buNone/>
+              <a:defRPr sz="4400" b="1" kern="1200">
+                <a:solidFill>
+                  <a:schemeClr val="tx2"/>
+                </a:solidFill>
+                <a:latin typeface="+mj-lt"/>
+                <a:ea typeface="+mn-ea"/>
+                <a:cs typeface="+mn-cs"/>
+              </a:defRPr>
+            </a:lvl9pPr>
+          </a:lstStyle>
+          <a:p>
+            <a:pPr>
+              <a:lnSpc>
+                <a:spcPct val="100000"/>
+              </a:lnSpc>
+              <a:spcAft>
+                <a:spcPts val="0"/>
+              </a:spcAft>
+            </a:pPr>
+            <a:r>
+              <a:rPr lang="en-US" sz="1400" dirty="0"/>
+              <a:t>Graduating</a:t>
+            </a:r>
+            <a:endParaRPr lang="en-US" sz="1400" dirty="0"/>
+          </a:p>
+          <a:p>
+            <a:pPr>
+              <a:lnSpc>
+                <a:spcPct val="100000"/>
+              </a:lnSpc>
+              <a:spcAft>
+                <a:spcPts val="0"/>
+              </a:spcAft>
+            </a:pPr>
+            <a:r>
+              <a:rPr lang="en-US" sz="1400" dirty="0"/>
+              <a:t>May 2027</a:t>
+            </a:r>
+            <a:endParaRPr lang="en-US" sz="1400" dirty="0"/>
+          </a:p>
+        </p:txBody>
+      </p:sp>
+      <p:cxnSp>
+        <p:nvCxnSpPr>
+          <p:cNvPr id="1139" name="Straight Connector 1138"/>
+          <p:cNvCxnSpPr/>
+          <p:nvPr/>
+        </p:nvCxnSpPr>
+        <p:spPr bwMode="gray">
+          <a:xfrm flipV="1">
+            <a:off x="10648950" y="2667000"/>
+            <a:ext cx="0" cy="292608"/>
+          </a:xfrm>
+          <a:prstGeom prst="line">
+            <a:avLst/>
+          </a:prstGeom>
+          <a:ln w="6350">
+            <a:solidFill>
+              <a:schemeClr val="bg1"/>
+            </a:solidFill>
+          </a:ln>
+        </p:spPr>
+        <p:style>
+          <a:lnRef idx="1">
+            <a:schemeClr val="accent1"/>
+          </a:lnRef>
+          <a:fillRef idx="0">
+            <a:schemeClr val="accent1"/>
+          </a:fillRef>
+          <a:effectRef idx="0">
+            <a:schemeClr val="accent1"/>
+          </a:effectRef>
+          <a:fontRef idx="minor">
+            <a:schemeClr val="tx1"/>
+          </a:fontRef>
+        </p:style>
+      </p:cxnSp>
+      <p:sp>
+        <p:nvSpPr>
+          <p:cNvPr id="1140" name="Diamond 1139"/>
+          <p:cNvSpPr/>
+          <p:nvPr/>
+        </p:nvSpPr>
+        <p:spPr bwMode="gray">
+          <a:xfrm>
+            <a:off x="10562082" y="2520696"/>
+            <a:ext cx="173736" cy="146304"/>
+          </a:xfrm>
+          <a:prstGeom prst="diamond">
+            <a:avLst/>
+          </a:prstGeom>
+          <a:solidFill>
+            <a:schemeClr val="bg1"/>
+          </a:solidFill>
+          <a:ln w="6350">
+            <a:solidFill>
+              <a:schemeClr val="tx1"/>
+            </a:solidFill>
+          </a:ln>
+        </p:spPr>
+        <p:style>
+          <a:lnRef idx="2">
+            <a:schemeClr val="accent1">
+              <a:shade val="50000"/>
+            </a:schemeClr>
+          </a:lnRef>
+          <a:fillRef idx="1">
+            <a:schemeClr val="accent1"/>
+          </a:fillRef>
+          <a:effectRef idx="0">
+            <a:schemeClr val="accent1"/>
+          </a:effectRef>
+          <a:fontRef idx="minor">
+            <a:schemeClr val="lt1"/>
+          </a:fontRef>
+        </p:style>
+        <p:txBody>
+          <a:bodyPr rtlCol="0" anchor="ctr"/>
+          <a:lstStyle/>
+          <a:p>
+            <a:pPr algn="ctr">
+              <a:lnSpc>
+                <a:spcPct val="140000"/>
+              </a:lnSpc>
+            </a:pPr>
+            <a:endParaRPr lang="en-US" sz="1600" dirty="0">
+              <a:solidFill>
+                <a:schemeClr val="tx1"/>
+              </a:solidFill>
+            </a:endParaRPr>
+          </a:p>
+        </p:txBody>
+      </p:sp>
+      <p:sp>
+        <p:nvSpPr>
+          <p:cNvPr id="13" name="Textplatzhalter 8"/>
+          <p:cNvSpPr txBox="1"/>
+          <p:nvPr/>
+        </p:nvSpPr>
+        <p:spPr bwMode="gray">
+          <a:xfrm>
+            <a:off x="8569779" y="3115160"/>
+            <a:ext cx="754462" cy="341731"/>
+          </a:xfrm>
+          <a:prstGeom prst="rect">
+            <a:avLst/>
+          </a:prstGeom>
+          <a:noFill/>
+          <a:effectLst/>
+        </p:spPr>
+        <p:txBody>
+          <a:bodyPr wrap="none" lIns="144000" tIns="0" rIns="0" bIns="0" anchor="b" anchorCtr="0"/>
+          <a:lstStyle>
+            <a:lvl1pPr marL="0" indent="0" algn="l" defTabSz="914400" rtl="0" eaLnBrk="1" latinLnBrk="0" hangingPunct="1">
+              <a:lnSpc>
+                <a:spcPct val="140000"/>
+              </a:lnSpc>
+              <a:spcBef>
+                <a:spcPts val="0"/>
+              </a:spcBef>
+              <a:spcAft>
+                <a:spcPts val="600"/>
+              </a:spcAft>
+              <a:buFontTx/>
+              <a:buNone/>
+              <a:defRPr sz="4400" b="1" kern="1200">
+                <a:solidFill>
+                  <a:schemeClr val="tx2"/>
+                </a:solidFill>
+                <a:latin typeface="+mj-lt"/>
+                <a:ea typeface="+mn-ea"/>
+                <a:cs typeface="+mn-cs"/>
+              </a:defRPr>
+            </a:lvl1pPr>
+            <a:lvl2pPr marL="0" indent="0" algn="l" defTabSz="914400" rtl="0" eaLnBrk="1" latinLnBrk="0" hangingPunct="1">
+              <a:lnSpc>
+                <a:spcPct val="140000"/>
+              </a:lnSpc>
+              <a:spcBef>
+                <a:spcPts val="0"/>
+              </a:spcBef>
+              <a:spcAft>
+                <a:spcPts val="600"/>
+              </a:spcAft>
+              <a:buFontTx/>
+              <a:buNone/>
+              <a:defRPr sz="4400" b="1" kern="1200">
+                <a:solidFill>
+                  <a:schemeClr val="tx2"/>
+                </a:solidFill>
+                <a:latin typeface="+mj-lt"/>
+                <a:ea typeface="+mn-ea"/>
+                <a:cs typeface="+mn-cs"/>
+              </a:defRPr>
+            </a:lvl2pPr>
+            <a:lvl3pPr marL="0" indent="0" algn="l" defTabSz="914400" rtl="0" eaLnBrk="1" latinLnBrk="0" hangingPunct="1">
+              <a:lnSpc>
+                <a:spcPct val="140000"/>
+              </a:lnSpc>
+              <a:spcBef>
+                <a:spcPts val="0"/>
+              </a:spcBef>
+              <a:spcAft>
+                <a:spcPts val="600"/>
+              </a:spcAft>
+              <a:buFontTx/>
+              <a:buNone/>
+              <a:defRPr sz="4400" b="1" kern="1200">
+                <a:solidFill>
+                  <a:schemeClr val="tx2"/>
+                </a:solidFill>
+                <a:latin typeface="+mj-lt"/>
+                <a:ea typeface="+mn-ea"/>
+                <a:cs typeface="+mn-cs"/>
+              </a:defRPr>
+            </a:lvl3pPr>
+            <a:lvl4pPr marL="0" indent="0" algn="l" defTabSz="914400" rtl="0" eaLnBrk="1" latinLnBrk="0" hangingPunct="1">
+              <a:lnSpc>
+                <a:spcPct val="140000"/>
+              </a:lnSpc>
+              <a:spcBef>
+                <a:spcPts val="0"/>
+              </a:spcBef>
+              <a:spcAft>
+                <a:spcPts val="600"/>
+              </a:spcAft>
+              <a:buFontTx/>
+              <a:buNone/>
+              <a:defRPr sz="4400" b="1" kern="1200">
+                <a:solidFill>
+                  <a:schemeClr val="tx2"/>
+                </a:solidFill>
+                <a:latin typeface="+mj-lt"/>
+                <a:ea typeface="+mn-ea"/>
+                <a:cs typeface="+mn-cs"/>
+              </a:defRPr>
+            </a:lvl4pPr>
+            <a:lvl5pPr marL="0" indent="0" algn="l" defTabSz="914400" rtl="0" eaLnBrk="1" latinLnBrk="0" hangingPunct="1">
+              <a:lnSpc>
+                <a:spcPct val="140000"/>
+              </a:lnSpc>
+              <a:spcBef>
+                <a:spcPts val="0"/>
+              </a:spcBef>
+              <a:spcAft>
+                <a:spcPts val="600"/>
+              </a:spcAft>
+              <a:buFontTx/>
+              <a:buNone/>
+              <a:defRPr sz="4400" b="1" kern="1200">
+                <a:solidFill>
+                  <a:schemeClr val="tx2"/>
+                </a:solidFill>
+                <a:latin typeface="+mj-lt"/>
+                <a:ea typeface="+mn-ea"/>
+                <a:cs typeface="+mn-cs"/>
+              </a:defRPr>
+            </a:lvl5pPr>
+            <a:lvl6pPr marL="0" indent="0" algn="l" defTabSz="914400" rtl="0" eaLnBrk="1" latinLnBrk="0" hangingPunct="1">
+              <a:lnSpc>
+                <a:spcPct val="140000"/>
+              </a:lnSpc>
+              <a:spcBef>
+                <a:spcPts val="0"/>
+              </a:spcBef>
+              <a:spcAft>
+                <a:spcPts val="600"/>
+              </a:spcAft>
+              <a:buFontTx/>
+              <a:buNone/>
+              <a:defRPr sz="4400" b="1" kern="1200">
+                <a:solidFill>
+                  <a:schemeClr val="tx2"/>
+                </a:solidFill>
+                <a:latin typeface="+mj-lt"/>
+                <a:ea typeface="+mn-ea"/>
+                <a:cs typeface="+mn-cs"/>
+              </a:defRPr>
+            </a:lvl6pPr>
+            <a:lvl7pPr marL="0" indent="0" algn="l" defTabSz="914400" rtl="0" eaLnBrk="1" latinLnBrk="0" hangingPunct="1">
+              <a:lnSpc>
+                <a:spcPct val="140000"/>
+              </a:lnSpc>
+              <a:spcBef>
+                <a:spcPts val="0"/>
+              </a:spcBef>
+              <a:spcAft>
+                <a:spcPts val="600"/>
+              </a:spcAft>
+              <a:buFontTx/>
+              <a:buNone/>
+              <a:defRPr sz="4400" b="1" kern="1200">
+                <a:solidFill>
+                  <a:schemeClr val="tx2"/>
+                </a:solidFill>
+                <a:latin typeface="+mj-lt"/>
+                <a:ea typeface="+mn-ea"/>
+                <a:cs typeface="+mn-cs"/>
+              </a:defRPr>
+            </a:lvl7pPr>
+            <a:lvl8pPr marL="0" indent="0" algn="l" defTabSz="914400" rtl="0" eaLnBrk="1" latinLnBrk="0" hangingPunct="1">
+              <a:lnSpc>
+                <a:spcPct val="140000"/>
+              </a:lnSpc>
+              <a:spcBef>
+                <a:spcPts val="0"/>
+              </a:spcBef>
+              <a:spcAft>
+                <a:spcPts val="600"/>
+              </a:spcAft>
+              <a:buFontTx/>
+              <a:buNone/>
+              <a:defRPr sz="4400" b="1" kern="1200">
+                <a:solidFill>
+                  <a:schemeClr val="tx2"/>
+                </a:solidFill>
+                <a:latin typeface="+mj-lt"/>
+                <a:ea typeface="+mn-ea"/>
+                <a:cs typeface="+mn-cs"/>
+              </a:defRPr>
+            </a:lvl8pPr>
+            <a:lvl9pPr marL="0" indent="0" algn="l" defTabSz="914400" rtl="0" eaLnBrk="1" latinLnBrk="0" hangingPunct="1">
+              <a:lnSpc>
+                <a:spcPct val="140000"/>
+              </a:lnSpc>
+              <a:spcBef>
+                <a:spcPts val="0"/>
+              </a:spcBef>
+              <a:spcAft>
+                <a:spcPts val="600"/>
+              </a:spcAft>
+              <a:buFontTx/>
+              <a:buNone/>
+              <a:defRPr sz="4400" b="1" kern="1200">
+                <a:solidFill>
+                  <a:schemeClr val="tx2"/>
+                </a:solidFill>
+                <a:latin typeface="+mj-lt"/>
+                <a:ea typeface="+mn-ea"/>
+                <a:cs typeface="+mn-cs"/>
+              </a:defRPr>
+            </a:lvl9pPr>
+          </a:lstStyle>
+          <a:p>
+            <a:pPr>
+              <a:lnSpc>
+                <a:spcPct val="100000"/>
+              </a:lnSpc>
+              <a:spcAft>
+                <a:spcPts val="0"/>
+              </a:spcAft>
+            </a:pPr>
+            <a:r>
+              <a:rPr lang="en-US" sz="1400" dirty="0"/>
+              <a:t>Jul 2025</a:t>
+            </a:r>
+            <a:endParaRPr lang="en-US" sz="1400" dirty="0"/>
+          </a:p>
+        </p:txBody>
+      </p:sp>
+      <p:pic>
+        <p:nvPicPr>
+          <p:cNvPr id="3" name="Graphic 2" descr="Marker with solid fill"/>
+          <p:cNvPicPr>
+            <a:picLocks noChangeAspect="1"/>
+          </p:cNvPicPr>
+          <p:nvPr/>
+        </p:nvPicPr>
+        <p:blipFill>
+          <a:blip r:embed="rId7">
+            <a:extLst>
+              <a:ext uri="{96DAC541-7B7A-43D3-8B79-37D633B846F1}">
+                <asvg:svgBlip xmlns:asvg="http://schemas.microsoft.com/office/drawing/2016/SVG/main" r:embed="rId8"/>
+              </a:ext>
+            </a:extLst>
+          </a:blip>
+          <a:stretch>
+            <a:fillRect/>
+          </a:stretch>
+        </p:blipFill>
+        <p:spPr>
+          <a:xfrm>
+            <a:off x="2974778" y="2677067"/>
+            <a:ext cx="262018" cy="262018"/>
+          </a:xfrm>
+          <a:prstGeom prst="rect">
+            <a:avLst/>
+          </a:prstGeom>
+        </p:spPr>
+      </p:pic>
+      <p:pic>
+        <p:nvPicPr>
+          <p:cNvPr id="4" name="Graphic 3" descr="Marker with solid fill"/>
+          <p:cNvPicPr>
+            <a:picLocks noChangeAspect="1"/>
+          </p:cNvPicPr>
+          <p:nvPr/>
+        </p:nvPicPr>
+        <p:blipFill>
+          <a:blip r:embed="rId7">
+            <a:extLst>
+              <a:ext uri="{96DAC541-7B7A-43D3-8B79-37D633B846F1}">
+                <asvg:svgBlip xmlns:asvg="http://schemas.microsoft.com/office/drawing/2016/SVG/main" r:embed="rId8"/>
+              </a:ext>
+            </a:extLst>
+          </a:blip>
+          <a:stretch>
+            <a:fillRect/>
+          </a:stretch>
+        </p:blipFill>
+        <p:spPr>
+          <a:xfrm>
+            <a:off x="6473541" y="2658468"/>
+            <a:ext cx="262018" cy="262018"/>
+          </a:xfrm>
+          <a:prstGeom prst="rect">
+            <a:avLst/>
+          </a:prstGeom>
+        </p:spPr>
+      </p:pic>
+      <p:pic>
+        <p:nvPicPr>
+          <p:cNvPr id="7" name="Graphic 6" descr="Marker with solid fill"/>
+          <p:cNvPicPr>
+            <a:picLocks noChangeAspect="1"/>
+          </p:cNvPicPr>
+          <p:nvPr/>
+        </p:nvPicPr>
+        <p:blipFill>
+          <a:blip r:embed="rId7">
+            <a:extLst>
+              <a:ext uri="{96DAC541-7B7A-43D3-8B79-37D633B846F1}">
+                <asvg:svgBlip xmlns:asvg="http://schemas.microsoft.com/office/drawing/2016/SVG/main" r:embed="rId8"/>
+              </a:ext>
+            </a:extLst>
+          </a:blip>
+          <a:stretch>
+            <a:fillRect/>
+          </a:stretch>
+        </p:blipFill>
+        <p:spPr>
+          <a:xfrm>
+            <a:off x="4890740" y="4096521"/>
+            <a:ext cx="262018" cy="262018"/>
+          </a:xfrm>
+          <a:prstGeom prst="rect">
+            <a:avLst/>
+          </a:prstGeom>
+        </p:spPr>
+      </p:pic>
+      <p:sp>
+        <p:nvSpPr>
+          <p:cNvPr id="10" name="TextBox 9"/>
+          <p:cNvSpPr txBox="1"/>
+          <p:nvPr/>
+        </p:nvSpPr>
+        <p:spPr bwMode="gray">
+          <a:xfrm>
+            <a:off x="605817" y="4377230"/>
+            <a:ext cx="6180666" cy="1256562"/>
+          </a:xfrm>
+          <a:prstGeom prst="rect">
+            <a:avLst/>
+          </a:prstGeom>
+          <a:noFill/>
+        </p:spPr>
+        <p:txBody>
+          <a:bodyPr wrap="square">
+            <a:spAutoFit/>
+          </a:bodyPr>
+          <a:lstStyle/>
+          <a:p>
+            <a:pPr rtl="0" fontAlgn="base">
+              <a:lnSpc>
+                <a:spcPct val="150000"/>
+              </a:lnSpc>
+              <a:buNone/>
+            </a:pPr>
+            <a:r>
+              <a:rPr lang="en-US" sz="1600" b="1" i="0" u="none" strike="noStrike" dirty="0">
+                <a:solidFill>
+                  <a:srgbClr val="00E47C"/>
+                </a:solidFill>
+                <a:effectLst/>
+                <a:latin typeface="Boehringer Forward Text" panose="02000500000000020000" pitchFamily="2" charset="0"/>
+              </a:rPr>
+              <a:t>Fangfang Jiang</a:t>
+            </a:r>
+            <a:endParaRPr lang="en-US" sz="1050" b="0" i="0" dirty="0">
+              <a:solidFill>
+                <a:srgbClr val="000000"/>
+              </a:solidFill>
+              <a:effectLst/>
+              <a:latin typeface="Segoe UI" panose="020B0502040204020203" pitchFamily="34" charset="0"/>
+            </a:endParaRPr>
+          </a:p>
+          <a:p>
+            <a:pPr fontAlgn="base">
+              <a:lnSpc>
+                <a:spcPct val="150000"/>
+              </a:lnSpc>
+            </a:pPr>
+            <a:r>
+              <a:rPr lang="en-US" sz="1400" dirty="0">
+                <a:solidFill>
+                  <a:srgbClr val="FFFFFF"/>
+                </a:solidFill>
+                <a:latin typeface="Boehringer Forward Text" panose="02000500000000020000" pitchFamily="2" charset="0"/>
+              </a:rPr>
+              <a:t>Clinical Data Science Co-Op​ at Biostatistics &amp; Data Sciences Team</a:t>
+            </a:r>
+            <a:r>
+              <a:rPr lang="en-US" sz="1400" b="0" i="0" dirty="0">
+                <a:solidFill>
+                  <a:srgbClr val="000000"/>
+                </a:solidFill>
+                <a:effectLst/>
+                <a:latin typeface="Boehringer Forward Text" panose="02000500000000020000" pitchFamily="2" charset="0"/>
+              </a:rPr>
+              <a:t> </a:t>
+            </a:r>
+            <a:endParaRPr lang="en-US" sz="1050" b="0" i="0" dirty="0">
+              <a:solidFill>
+                <a:srgbClr val="000000"/>
+              </a:solidFill>
+              <a:effectLst/>
+              <a:latin typeface="Segoe UI" panose="020B0502040204020203" pitchFamily="34" charset="0"/>
+            </a:endParaRPr>
+          </a:p>
+          <a:p>
+            <a:pPr rtl="0" fontAlgn="base">
+              <a:lnSpc>
+                <a:spcPct val="150000"/>
+              </a:lnSpc>
+            </a:pPr>
+            <a:r>
+              <a:rPr lang="en-US" sz="1100" b="0" i="0" u="none" strike="noStrike" dirty="0">
+                <a:solidFill>
+                  <a:srgbClr val="FFFFFF"/>
+                </a:solidFill>
+                <a:effectLst/>
+                <a:latin typeface="Boehringer Forward Text" panose="02000500000000020000" pitchFamily="2" charset="0"/>
+              </a:rPr>
+              <a:t>[ July 2025 – December 2025 ]</a:t>
+            </a:r>
+            <a:r>
+              <a:rPr lang="en-US" sz="1050" b="0" i="0" dirty="0">
+                <a:solidFill>
+                  <a:srgbClr val="000000"/>
+                </a:solidFill>
+                <a:effectLst/>
+                <a:latin typeface="Boehringer Forward Text" panose="02000500000000020000" pitchFamily="2" charset="0"/>
+              </a:rPr>
+              <a:t>​</a:t>
+            </a:r>
+            <a:br>
+              <a:rPr lang="en-US" sz="1050" b="0" i="0" dirty="0">
+                <a:solidFill>
+                  <a:srgbClr val="000000"/>
+                </a:solidFill>
+                <a:effectLst/>
+                <a:latin typeface="Boehringer Forward Text" panose="02000500000000020000" pitchFamily="2" charset="0"/>
+              </a:rPr>
+            </a:br>
+            <a:r>
+              <a:rPr lang="en-US" sz="1050" dirty="0">
+                <a:solidFill>
+                  <a:srgbClr val="FFFFFF"/>
+                </a:solidFill>
+                <a:latin typeface="Boehringer Forward Text" panose="02000500000000020000" pitchFamily="2" charset="0"/>
+              </a:rPr>
+              <a:t>fangfang.jiang</a:t>
+            </a:r>
+            <a:r>
+              <a:rPr lang="en-US" sz="1050" b="0" i="0" u="none" strike="noStrike" dirty="0">
+                <a:solidFill>
+                  <a:srgbClr val="FFFFFF"/>
+                </a:solidFill>
+                <a:effectLst/>
+                <a:latin typeface="Boehringer Forward Text" panose="02000500000000020000" pitchFamily="2" charset="0"/>
+              </a:rPr>
+              <a:t>@boehringer-ingelheim.com</a:t>
+            </a:r>
+            <a:r>
+              <a:rPr lang="en-US" sz="1050" b="0" i="0" dirty="0">
+                <a:solidFill>
+                  <a:srgbClr val="000000"/>
+                </a:solidFill>
+                <a:effectLst/>
+                <a:latin typeface="Boehringer Forward Text" panose="02000500000000020000" pitchFamily="2" charset="0"/>
+              </a:rPr>
+              <a:t>​</a:t>
+            </a:r>
+            <a:endParaRPr lang="en-US" sz="1050" b="0" i="0" dirty="0">
+              <a:solidFill>
+                <a:srgbClr val="000000"/>
+              </a:solidFill>
+              <a:effectLst/>
+              <a:latin typeface="Segoe UI" panose="020B0502040204020203" pitchFamily="34" charset="0"/>
+            </a:endParaRPr>
+          </a:p>
+        </p:txBody>
+      </p:sp>
+      <p:pic>
+        <p:nvPicPr>
+          <p:cNvPr id="12" name="Graphic 11" descr="Marker with solid fill"/>
+          <p:cNvPicPr>
+            <a:picLocks noChangeAspect="1"/>
+          </p:cNvPicPr>
+          <p:nvPr/>
+        </p:nvPicPr>
+        <p:blipFill>
+          <a:blip r:embed="rId7">
+            <a:extLst>
+              <a:ext uri="{96DAC541-7B7A-43D3-8B79-37D633B846F1}">
+                <asvg:svgBlip xmlns:asvg="http://schemas.microsoft.com/office/drawing/2016/SVG/main" r:embed="rId8"/>
+              </a:ext>
+            </a:extLst>
+          </a:blip>
+          <a:stretch>
+            <a:fillRect/>
+          </a:stretch>
+        </p:blipFill>
+        <p:spPr>
+          <a:xfrm>
+            <a:off x="8635301" y="3825552"/>
+            <a:ext cx="262018" cy="262018"/>
+          </a:xfrm>
+          <a:prstGeom prst="rect">
+            <a:avLst/>
+          </a:prstGeom>
+        </p:spPr>
+      </p:pic>
+    </p:spTree>
+  </p:cSld>
+  <p:clrMapOvr>
+    <a:masterClrMapping/>
+  </p:clrMapOvr>
+</p:sld>
+</file>
+
+<file path=ppt/slides/slide3.xml><?xml version="1.0" encoding="utf-8"?>
+<p:sld xmlns:a="http://schemas.openxmlformats.org/drawingml/2006/main" xmlns:r="http://schemas.openxmlformats.org/officeDocument/2006/relationships" xmlns:p="http://schemas.openxmlformats.org/presentationml/2006/main">
+  <p:cSld>
     <p:bg>
       <p:bgPr>
         <a:solidFill>
           <a:srgbClr val="FFFFFF"/>
         </a:solidFill>
+        <a:effectLst/>
       </p:bgPr>
     </p:bg>
     <p:spTree>
@@ -1685,13 +5624,12 @@
             <a:avLst/>
           </a:prstGeom>
           <a:noFill/>
-          <a:ln/>
         </p:spPr>
         <p:txBody>
           <a:bodyPr wrap="square" lIns="0" tIns="0" rIns="0" bIns="0" rtlCol="0" anchor="ctr"/>
           <a:lstStyle/>
           <a:p>
-            <a:pPr indent="0" marL="0">
+            <a:pPr marL="0" indent="0">
               <a:buNone/>
             </a:pPr>
             <a:r>
@@ -1699,9 +5637,9 @@
                 <a:solidFill>
                   <a:srgbClr val="1E293B"/>
                 </a:solidFill>
-                <a:latin typeface="Calibri" pitchFamily="34" charset="0"/>
-                <a:ea typeface="Calibri" pitchFamily="34" charset="-122"/>
-                <a:cs typeface="Calibri" pitchFamily="34" charset="-120"/>
+                <a:latin typeface="Calibri" panose="020F0502020204030204" pitchFamily="34" charset="0"/>
+                <a:ea typeface="Calibri" panose="020F0502020204030204" pitchFamily="34" charset="-122"/>
+                <a:cs typeface="Calibri" panose="020F0502020204030204" pitchFamily="34" charset="-120"/>
               </a:rPr>
               <a:t>The problem: naive censoring is not enough</a:t>
             </a:r>
@@ -1747,13 +5685,12 @@
             <a:avLst/>
           </a:prstGeom>
           <a:noFill/>
-          <a:ln/>
         </p:spPr>
         <p:txBody>
           <a:bodyPr wrap="square" rtlCol="0" anchor="ctr"/>
           <a:lstStyle/>
           <a:p>
-            <a:pPr algn="r" indent="0" marL="0">
+            <a:pPr marL="0" indent="0" algn="r">
               <a:buNone/>
             </a:pPr>
             <a:r>
@@ -1794,7 +5731,7 @@
             <a:prstDash val="solid"/>
           </a:ln>
           <a:effectLst>
-            <a:outerShdw sx="100000" sy="100000" kx="0" ky="0" algn="bl" rotWithShape="0" blurRad="101600" dist="25400" dir="2700000">
+            <a:outerShdw blurRad="101600" dist="25400" dir="2700000" algn="bl" rotWithShape="0">
               <a:srgbClr val="000000">
                 <a:alpha val="10000"/>
               </a:srgbClr>
@@ -1817,13 +5754,12 @@
             <a:avLst/>
           </a:prstGeom>
           <a:noFill/>
-          <a:ln/>
         </p:spPr>
         <p:txBody>
           <a:bodyPr wrap="square" lIns="0" tIns="0" rIns="0" bIns="0" rtlCol="0" anchor="ctr"/>
           <a:lstStyle/>
           <a:p>
-            <a:pPr indent="0" marL="0">
+            <a:pPr marL="0" indent="0">
               <a:buNone/>
             </a:pPr>
             <a:r>
@@ -1853,13 +5789,12 @@
             <a:avLst/>
           </a:prstGeom>
           <a:noFill/>
-          <a:ln/>
         </p:spPr>
         <p:txBody>
           <a:bodyPr wrap="square" lIns="0" tIns="0" rIns="0" bIns="0" rtlCol="0" anchor="ctr"/>
           <a:lstStyle/>
           <a:p>
-            <a:pPr indent="0" marL="0">
+            <a:pPr marL="0" indent="0">
               <a:spcAft>
                 <a:spcPts val="400"/>
               </a:spcAft>
@@ -1876,7 +5811,7 @@
             <a:endParaRPr lang="en-US" sz="1300" dirty="0"/>
           </a:p>
           <a:p>
-            <a:pPr indent="0" marL="0">
+            <a:pPr marL="0" indent="0">
               <a:spcAft>
                 <a:spcPts val="400"/>
               </a:spcAft>
@@ -1893,7 +5828,7 @@
             <a:endParaRPr lang="en-US" sz="1300" dirty="0"/>
           </a:p>
           <a:p>
-            <a:pPr indent="0" marL="0">
+            <a:pPr marL="0" indent="0">
               <a:spcAft>
                 <a:spcPts val="400"/>
               </a:spcAft>
@@ -1910,7 +5845,7 @@
             <a:endParaRPr lang="en-US" sz="1300" dirty="0"/>
           </a:p>
           <a:p>
-            <a:pPr indent="0" marL="0">
+            <a:pPr marL="0" indent="0">
               <a:spcAft>
                 <a:spcPts val="400"/>
               </a:spcAft>
@@ -1924,12 +5859,6 @@
               </a:rPr>
               <a:t>When this fails → hazard-ratio estimates are biased, </a:t>
             </a:r>
-            <a:pPr indent="0" marL="0">
-              <a:spcAft>
-                <a:spcPts val="400"/>
-              </a:spcAft>
-              <a:buNone/>
-            </a:pPr>
             <a:r>
               <a:rPr lang="en-US" sz="1300" b="1" dirty="0">
                 <a:solidFill>
@@ -1938,12 +5867,6 @@
               </a:rPr>
               <a:t>typically toward the null</a:t>
             </a:r>
-            <a:pPr indent="0" marL="0">
-              <a:spcAft>
-                <a:spcPts val="400"/>
-              </a:spcAft>
-              <a:buNone/>
-            </a:pPr>
             <a:r>
               <a:rPr lang="en-US" sz="1300" dirty="0">
                 <a:solidFill>
@@ -1971,13 +5894,12 @@
             <a:avLst/>
           </a:prstGeom>
           <a:noFill/>
-          <a:ln/>
         </p:spPr>
         <p:txBody>
           <a:bodyPr wrap="square" lIns="0" tIns="0" rIns="0" bIns="0" rtlCol="0" anchor="ctr"/>
           <a:lstStyle/>
           <a:p>
-            <a:pPr indent="0" marL="0">
+            <a:pPr marL="0" indent="0">
               <a:buNone/>
             </a:pPr>
             <a:r>
@@ -2034,13 +5956,12 @@
             <a:avLst/>
           </a:prstGeom>
           <a:noFill/>
-          <a:ln/>
         </p:spPr>
         <p:txBody>
           <a:bodyPr wrap="square" lIns="0" tIns="0" rIns="0" bIns="0" rtlCol="0" anchor="ctr"/>
           <a:lstStyle/>
           <a:p>
-            <a:pPr indent="0" marL="0">
+            <a:pPr marL="0" indent="0">
               <a:buNone/>
             </a:pPr>
             <a:r>
@@ -2070,13 +5991,12 @@
             <a:avLst/>
           </a:prstGeom>
           <a:noFill/>
-          <a:ln/>
         </p:spPr>
         <p:txBody>
           <a:bodyPr wrap="square" lIns="0" tIns="0" rIns="0" bIns="0" rtlCol="0" anchor="ctr"/>
           <a:lstStyle/>
           <a:p>
-            <a:pPr indent="0" marL="0">
+            <a:pPr marL="0" indent="0">
               <a:buNone/>
             </a:pPr>
             <a:r>
@@ -2087,9 +6007,6 @@
               </a:rPr>
               <a:t>Dropout independent of everything. </a:t>
             </a:r>
-            <a:pPr indent="0" marL="0">
-              <a:buNone/>
-            </a:pPr>
             <a:r>
               <a:rPr lang="en-US" sz="1200" i="1" dirty="0">
                 <a:solidFill>
@@ -2098,9 +6015,6 @@
               </a:rPr>
               <a:t>CVOT example: </a:t>
             </a:r>
-            <a:pPr indent="0" marL="0">
-              <a:buNone/>
-            </a:pPr>
             <a:r>
               <a:rPr lang="en-US" sz="1200" dirty="0">
                 <a:solidFill>
@@ -2155,13 +6069,12 @@
             <a:avLst/>
           </a:prstGeom>
           <a:noFill/>
-          <a:ln/>
         </p:spPr>
         <p:txBody>
           <a:bodyPr wrap="square" lIns="0" tIns="0" rIns="0" bIns="0" rtlCol="0" anchor="ctr"/>
           <a:lstStyle/>
           <a:p>
-            <a:pPr indent="0" marL="0">
+            <a:pPr marL="0" indent="0">
               <a:buNone/>
             </a:pPr>
             <a:r>
@@ -2191,13 +6104,12 @@
             <a:avLst/>
           </a:prstGeom>
           <a:noFill/>
-          <a:ln/>
         </p:spPr>
         <p:txBody>
           <a:bodyPr wrap="square" lIns="0" tIns="0" rIns="0" bIns="0" rtlCol="0" anchor="ctr"/>
           <a:lstStyle/>
           <a:p>
-            <a:pPr indent="0" marL="0">
+            <a:pPr marL="0" indent="0">
               <a:buNone/>
             </a:pPr>
             <a:r>
@@ -2208,9 +6120,6 @@
               </a:rPr>
               <a:t>Dropout depends only on observed covariates. </a:t>
             </a:r>
-            <a:pPr indent="0" marL="0">
-              <a:buNone/>
-            </a:pPr>
             <a:r>
               <a:rPr lang="en-US" sz="1200" i="1" dirty="0">
                 <a:solidFill>
@@ -2219,9 +6128,6 @@
               </a:rPr>
               <a:t>CVOT example: </a:t>
             </a:r>
-            <a:pPr indent="0" marL="0">
-              <a:buNone/>
-            </a:pPr>
             <a:r>
               <a:rPr lang="en-US" sz="1200" dirty="0">
                 <a:solidFill>
@@ -2260,7 +6166,7 @@
             <a:prstDash val="solid"/>
           </a:ln>
           <a:effectLst>
-            <a:outerShdw sx="100000" sy="100000" kx="0" ky="0" algn="bl" rotWithShape="0" blurRad="101600" dist="25400" dir="2700000">
+            <a:outerShdw blurRad="101600" dist="25400" dir="2700000" algn="bl" rotWithShape="0">
               <a:srgbClr val="000000">
                 <a:alpha val="10000"/>
               </a:srgbClr>
@@ -2283,13 +6189,12 @@
             <a:avLst/>
           </a:prstGeom>
           <a:noFill/>
-          <a:ln/>
         </p:spPr>
         <p:txBody>
           <a:bodyPr wrap="square" lIns="0" tIns="0" rIns="0" bIns="0" rtlCol="0" anchor="ctr"/>
           <a:lstStyle/>
           <a:p>
-            <a:pPr indent="0" marL="0">
+            <a:pPr marL="0" indent="0">
               <a:buNone/>
             </a:pPr>
             <a:r>
@@ -2319,13 +6224,12 @@
             <a:avLst/>
           </a:prstGeom>
           <a:noFill/>
-          <a:ln/>
         </p:spPr>
         <p:txBody>
           <a:bodyPr wrap="square" lIns="0" tIns="0" rIns="0" bIns="0" rtlCol="0" anchor="ctr"/>
           <a:lstStyle/>
           <a:p>
-            <a:pPr indent="0" marL="0">
+            <a:pPr marL="0" indent="0">
               <a:buNone/>
             </a:pPr>
             <a:r>
@@ -2355,13 +6259,12 @@
             <a:avLst/>
           </a:prstGeom>
           <a:noFill/>
-          <a:ln/>
         </p:spPr>
         <p:txBody>
           <a:bodyPr wrap="square" lIns="0" tIns="0" rIns="0" bIns="0" rtlCol="0" anchor="ctr"/>
           <a:lstStyle/>
           <a:p>
-            <a:pPr indent="0" marL="0">
+            <a:pPr marL="0" indent="0">
               <a:buNone/>
             </a:pPr>
             <a:r>
@@ -2372,9 +6275,6 @@
               </a:rPr>
               <a:t>Dropout depends on </a:t>
             </a:r>
-            <a:pPr indent="0" marL="0">
-              <a:buNone/>
-            </a:pPr>
             <a:r>
               <a:rPr lang="en-US" sz="1200" i="1" dirty="0">
                 <a:solidFill>
@@ -2383,9 +6283,6 @@
               </a:rPr>
               <a:t>unobserved </a:t>
             </a:r>
-            <a:pPr indent="0" marL="0">
-              <a:buNone/>
-            </a:pPr>
             <a:r>
               <a:rPr lang="en-US" sz="1200" dirty="0">
                 <a:solidFill>
@@ -2397,7 +6294,7 @@
             <a:endParaRPr lang="en-US" sz="1200" dirty="0"/>
           </a:p>
           <a:p>
-            <a:pPr indent="0" marL="0">
+            <a:pPr marL="0" indent="0">
               <a:buNone/>
             </a:pPr>
             <a:r>
@@ -2408,9 +6305,6 @@
               </a:rPr>
               <a:t>CVOT example: </a:t>
             </a:r>
-            <a:pPr indent="0" marL="0">
-              <a:buNone/>
-            </a:pPr>
             <a:r>
               <a:rPr lang="en-US" sz="1200" dirty="0">
                 <a:solidFill>
@@ -2419,9 +6313,6 @@
               </a:rPr>
               <a:t>SGLT2 trial — patient discontinues due to worsening renal function, </a:t>
             </a:r>
-            <a:pPr indent="0" marL="0">
-              <a:buNone/>
-            </a:pPr>
             <a:r>
               <a:rPr lang="en-US" sz="1200" dirty="0">
                 <a:solidFill>
@@ -2476,17 +6367,16 @@
             <a:avLst/>
           </a:prstGeom>
           <a:noFill/>
-          <a:ln/>
         </p:spPr>
         <p:txBody>
           <a:bodyPr wrap="square" lIns="0" tIns="0" rIns="0" bIns="0" rtlCol="0" anchor="ctr"/>
           <a:lstStyle/>
           <a:p>
-            <a:pPr indent="0" marL="0">
+            <a:pPr marL="0" indent="0">
               <a:buNone/>
             </a:pPr>
             <a:r>
-              <a:rPr lang="en-US" sz="1200" b="1" spc="200" kern="0" dirty="0">
+              <a:rPr lang="en-US" sz="1200" b="1" kern="0" spc="200" dirty="0">
                 <a:solidFill>
                   <a:srgbClr val="D97706"/>
                 </a:solidFill>
@@ -2512,13 +6402,12 @@
             <a:avLst/>
           </a:prstGeom>
           <a:noFill/>
-          <a:ln/>
         </p:spPr>
         <p:txBody>
           <a:bodyPr wrap="square" lIns="0" tIns="0" rIns="0" bIns="0" rtlCol="0" anchor="ctr"/>
           <a:lstStyle/>
           <a:p>
-            <a:pPr indent="0" marL="0">
+            <a:pPr marL="0" indent="0">
               <a:spcAft>
                 <a:spcPts val="200"/>
               </a:spcAft>
@@ -2532,21 +6421,43 @@
               </a:rPr>
               <a:t>In CVOTs, treatment discontinuation is almost always </a:t>
             </a:r>
-            <a:pPr indent="0" marL="0">
+            <a:r>
+              <a:rPr lang="en-US" sz="1400" b="1" dirty="0">
+                <a:solidFill>
+                  <a:srgbClr val="D97706"/>
+                </a:solidFill>
+              </a:rPr>
+              <a:t>MNAR</a:t>
+            </a:r>
+            <a:r>
+              <a:rPr lang="en-US" sz="1400" dirty="0">
+                <a:solidFill>
+                  <a:srgbClr val="FFFFFF"/>
+                </a:solidFill>
+              </a:rPr>
+              <a:t>. Naive censoring at discontinuation treats it as non-informative</a:t>
+            </a:r>
+            <a:endParaRPr lang="en-US" sz="1400" dirty="0"/>
+          </a:p>
+          <a:p>
+            <a:pPr marL="0" indent="0">
               <a:spcAft>
                 <a:spcPts val="200"/>
               </a:spcAft>
               <a:buNone/>
             </a:pPr>
             <a:r>
-              <a:rPr lang="en-US" sz="1400" b="1" dirty="0">
-                <a:solidFill>
-                  <a:srgbClr val="D97706"/>
+              <a:rPr lang="en-US" sz="1400" dirty="0">
+                <a:solidFill>
+                  <a:srgbClr val="FFFFFF"/>
                 </a:solidFill>
               </a:rPr>
-              <a:t>MNAR</a:t>
-            </a:r>
-            <a:pPr indent="0" marL="0">
+              <a:t>→ biased HR (typically toward the null) and over-confident CIs.</a:t>
+            </a:r>
+            <a:endParaRPr lang="en-US" sz="1400" dirty="0"/>
+          </a:p>
+          <a:p>
+            <a:pPr marL="0" indent="0">
               <a:spcAft>
                 <a:spcPts val="200"/>
               </a:spcAft>
@@ -2555,15 +6466,15 @@
             <a:r>
               <a:rPr lang="en-US" sz="1400" dirty="0">
                 <a:solidFill>
-                  <a:srgbClr val="FFFFFF"/>
+                  <a:srgbClr val="000000"/>
                 </a:solidFill>
               </a:rPr>
-              <a:t>. Naive censoring at discontinuation treats it as non-informative</a:t>
+              <a:t> </a:t>
             </a:r>
             <a:endParaRPr lang="en-US" sz="1400" dirty="0"/>
           </a:p>
           <a:p>
-            <a:pPr indent="0" marL="0">
+            <a:pPr marL="0" indent="0">
               <a:spcAft>
                 <a:spcPts val="200"/>
               </a:spcAft>
@@ -2572,51 +6483,11 @@
             <a:r>
               <a:rPr lang="en-US" sz="1400" dirty="0">
                 <a:solidFill>
-                  <a:srgbClr val="FFFFFF"/>
-                </a:solidFill>
-              </a:rPr>
-              <a:t>→ biased HR (typically toward the null) and over-confident CIs.</a:t>
-            </a:r>
-            <a:endParaRPr lang="en-US" sz="1400" dirty="0"/>
-          </a:p>
-          <a:p>
-            <a:pPr indent="0" marL="0">
-              <a:spcAft>
-                <a:spcPts val="200"/>
-              </a:spcAft>
-              <a:buNone/>
-            </a:pPr>
-            <a:r>
-              <a:rPr lang="en-US" sz="1400" dirty="0">
-                <a:solidFill>
-                  <a:srgbClr val="000000"/>
-                </a:solidFill>
-              </a:rPr>
-              <a:t> </a:t>
-            </a:r>
-            <a:endParaRPr lang="en-US" sz="1400" dirty="0"/>
-          </a:p>
-          <a:p>
-            <a:pPr indent="0" marL="0">
-              <a:spcAft>
-                <a:spcPts val="200"/>
-              </a:spcAft>
-              <a:buNone/>
-            </a:pPr>
-            <a:r>
-              <a:rPr lang="en-US" sz="1400" dirty="0">
-                <a:solidFill>
                   <a:srgbClr val="CADCFC"/>
                 </a:solidFill>
               </a:rPr>
               <a:t>We need a method that </a:t>
             </a:r>
-            <a:pPr indent="0" marL="0">
-              <a:spcAft>
-                <a:spcPts val="200"/>
-              </a:spcAft>
-              <a:buNone/>
-            </a:pPr>
             <a:r>
               <a:rPr lang="en-US" sz="1400" b="1" dirty="0">
                 <a:solidFill>
@@ -2625,12 +6496,6 @@
               </a:rPr>
               <a:t>borrows information </a:t>
             </a:r>
-            <a:pPr indent="0" marL="0">
-              <a:spcAft>
-                <a:spcPts val="200"/>
-              </a:spcAft>
-              <a:buNone/>
-            </a:pPr>
             <a:r>
               <a:rPr lang="en-US" sz="1400" dirty="0">
                 <a:solidFill>
@@ -2651,14 +6516,15 @@
 </p:sld>
 </file>
 
-<file path=ppt/slides/slide3.xml><?xml version="1.0" encoding="utf-8"?>
+<file path=ppt/slides/slide4.xml><?xml version="1.0" encoding="utf-8"?>
 <p:sld xmlns:a="http://schemas.openxmlformats.org/drawingml/2006/main" xmlns:r="http://schemas.openxmlformats.org/officeDocument/2006/relationships" xmlns:p="http://schemas.openxmlformats.org/presentationml/2006/main">
-  <p:cSld name="Slide 3">
+  <p:cSld>
     <p:bg>
       <p:bgPr>
         <a:solidFill>
           <a:srgbClr val="FFFFFF"/>
         </a:solidFill>
+        <a:effectLst/>
       </p:bgPr>
     </p:bg>
     <p:spTree>
@@ -2690,13 +6556,12 @@
             <a:avLst/>
           </a:prstGeom>
           <a:noFill/>
-          <a:ln/>
         </p:spPr>
         <p:txBody>
           <a:bodyPr wrap="square" lIns="0" tIns="0" rIns="0" bIns="0" rtlCol="0" anchor="ctr"/>
           <a:lstStyle/>
           <a:p>
-            <a:pPr indent="0" marL="0">
+            <a:pPr marL="0" indent="0">
               <a:buNone/>
             </a:pPr>
             <a:r>
@@ -2704,9 +6569,9 @@
                 <a:solidFill>
                   <a:srgbClr val="1E293B"/>
                 </a:solidFill>
-                <a:latin typeface="Calibri" pitchFamily="34" charset="0"/>
-                <a:ea typeface="Calibri" pitchFamily="34" charset="-122"/>
-                <a:cs typeface="Calibri" pitchFamily="34" charset="-120"/>
+                <a:latin typeface="Calibri" panose="020F0502020204030204" pitchFamily="34" charset="0"/>
+                <a:ea typeface="Calibri" panose="020F0502020204030204" pitchFamily="34" charset="-122"/>
+                <a:cs typeface="Calibri" panose="020F0502020204030204" pitchFamily="34" charset="-120"/>
               </a:rPr>
               <a:t>One subject's timeline: what can happen on treatment?</a:t>
             </a:r>
@@ -2752,13 +6617,12 @@
             <a:avLst/>
           </a:prstGeom>
           <a:noFill/>
-          <a:ln/>
         </p:spPr>
         <p:txBody>
           <a:bodyPr wrap="square" rtlCol="0" anchor="ctr"/>
           <a:lstStyle/>
           <a:p>
-            <a:pPr algn="r" indent="0" marL="0">
+            <a:pPr marL="0" indent="0" algn="r">
               <a:buNone/>
             </a:pPr>
             <a:r>
@@ -2788,13 +6652,12 @@
             <a:avLst/>
           </a:prstGeom>
           <a:noFill/>
-          <a:ln/>
         </p:spPr>
         <p:txBody>
           <a:bodyPr wrap="square" lIns="0" tIns="0" rIns="0" bIns="0" rtlCol="0" anchor="ctr"/>
           <a:lstStyle/>
           <a:p>
-            <a:pPr indent="0" marL="0">
+            <a:pPr marL="0" indent="0">
               <a:buNone/>
             </a:pPr>
             <a:r>
@@ -2824,13 +6687,12 @@
             <a:avLst/>
           </a:prstGeom>
           <a:noFill/>
-          <a:ln/>
         </p:spPr>
         <p:txBody>
           <a:bodyPr wrap="square" lIns="0" tIns="0" rIns="0" bIns="0" rtlCol="0" anchor="ctr"/>
           <a:lstStyle/>
           <a:p>
-            <a:pPr indent="0" marL="0">
+            <a:pPr marL="0" indent="0">
               <a:buNone/>
             </a:pPr>
             <a:r>
@@ -2860,13 +6722,12 @@
             <a:avLst/>
           </a:prstGeom>
           <a:noFill/>
-          <a:ln/>
         </p:spPr>
         <p:txBody>
           <a:bodyPr wrap="square" lIns="0" tIns="0" rIns="0" bIns="0" rtlCol="0" anchor="ctr"/>
           <a:lstStyle/>
           <a:p>
-            <a:pPr indent="0" marL="0">
+            <a:pPr marL="0" indent="0">
               <a:buNone/>
             </a:pPr>
             <a:r>
@@ -2921,13 +6782,12 @@
             <a:avLst/>
           </a:prstGeom>
           <a:noFill/>
-          <a:ln/>
         </p:spPr>
         <p:txBody>
           <a:bodyPr wrap="square" lIns="0" tIns="0" rIns="0" bIns="0" rtlCol="0" anchor="ctr"/>
           <a:lstStyle/>
           <a:p>
-            <a:pPr algn="ctr" indent="0" marL="0">
+            <a:pPr marL="0" indent="0" algn="ctr">
               <a:buNone/>
             </a:pPr>
             <a:r>
@@ -2980,13 +6840,12 @@
             <a:avLst/>
           </a:prstGeom>
           <a:noFill/>
-          <a:ln/>
         </p:spPr>
         <p:txBody>
           <a:bodyPr wrap="square" lIns="0" tIns="0" rIns="0" bIns="0" rtlCol="0" anchor="ctr"/>
           <a:lstStyle/>
           <a:p>
-            <a:pPr algn="ctr" indent="0" marL="0">
+            <a:pPr marL="0" indent="0" algn="ctr">
               <a:buNone/>
             </a:pPr>
             <a:r>
@@ -3055,8 +6914,8 @@
         </p:nvSpPr>
         <p:spPr>
           <a:xfrm>
-            <a:off x="5833872" y="2029968"/>
-            <a:ext cx="219456" cy="-219456"/>
+            <a:off x="5833872" y="1810512"/>
+            <a:ext cx="219456" cy="219456"/>
           </a:xfrm>
           <a:prstGeom prst="line">
             <a:avLst/>
@@ -3085,13 +6944,12 @@
             <a:avLst/>
           </a:prstGeom>
           <a:noFill/>
-          <a:ln/>
         </p:spPr>
         <p:txBody>
           <a:bodyPr wrap="square" lIns="0" tIns="0" rIns="0" bIns="0" rtlCol="0" anchor="ctr"/>
           <a:lstStyle/>
           <a:p>
-            <a:pPr indent="0" marL="0">
+            <a:pPr marL="0" indent="0">
               <a:buNone/>
             </a:pPr>
             <a:r>
@@ -3121,13 +6979,12 @@
             <a:avLst/>
           </a:prstGeom>
           <a:noFill/>
-          <a:ln/>
         </p:spPr>
         <p:txBody>
           <a:bodyPr wrap="square" lIns="0" tIns="0" rIns="0" bIns="0" rtlCol="0" anchor="ctr"/>
           <a:lstStyle/>
           <a:p>
-            <a:pPr indent="0" marL="0">
+            <a:pPr marL="0" indent="0">
               <a:buNone/>
             </a:pPr>
             <a:r>
@@ -3157,13 +7014,12 @@
             <a:avLst/>
           </a:prstGeom>
           <a:noFill/>
-          <a:ln/>
         </p:spPr>
         <p:txBody>
           <a:bodyPr wrap="square" lIns="0" tIns="0" rIns="0" bIns="0" rtlCol="0" anchor="ctr"/>
           <a:lstStyle/>
           <a:p>
-            <a:pPr indent="0" marL="0">
+            <a:pPr marL="0" indent="0">
               <a:buNone/>
             </a:pPr>
             <a:r>
@@ -3218,13 +7074,12 @@
             <a:avLst/>
           </a:prstGeom>
           <a:noFill/>
-          <a:ln/>
         </p:spPr>
         <p:txBody>
           <a:bodyPr wrap="square" lIns="0" tIns="0" rIns="0" bIns="0" rtlCol="0" anchor="ctr"/>
           <a:lstStyle/>
           <a:p>
-            <a:pPr algn="ctr" indent="0" marL="0">
+            <a:pPr marL="0" indent="0" algn="ctr">
               <a:buNone/>
             </a:pPr>
             <a:r>
@@ -3277,13 +7132,12 @@
             <a:avLst/>
           </a:prstGeom>
           <a:noFill/>
-          <a:ln/>
         </p:spPr>
         <p:txBody>
           <a:bodyPr wrap="square" lIns="0" tIns="0" rIns="0" bIns="0" rtlCol="0" anchor="ctr"/>
           <a:lstStyle/>
           <a:p>
-            <a:pPr algn="ctr" indent="0" marL="0">
+            <a:pPr marL="0" indent="0" algn="ctr">
               <a:buNone/>
             </a:pPr>
             <a:r>
@@ -3361,13 +7215,12 @@
             <a:avLst/>
           </a:prstGeom>
           <a:noFill/>
-          <a:ln/>
         </p:spPr>
         <p:txBody>
           <a:bodyPr wrap="square" lIns="0" tIns="0" rIns="0" bIns="0" rtlCol="0" anchor="ctr"/>
           <a:lstStyle/>
           <a:p>
-            <a:pPr indent="0" marL="0">
+            <a:pPr marL="0" indent="0">
               <a:buNone/>
             </a:pPr>
             <a:r>
@@ -3397,13 +7250,12 @@
             <a:avLst/>
           </a:prstGeom>
           <a:noFill/>
-          <a:ln/>
         </p:spPr>
         <p:txBody>
           <a:bodyPr wrap="square" lIns="0" tIns="0" rIns="0" bIns="0" rtlCol="0" anchor="ctr"/>
           <a:lstStyle/>
           <a:p>
-            <a:pPr indent="0" marL="0">
+            <a:pPr marL="0" indent="0">
               <a:buNone/>
             </a:pPr>
             <a:r>
@@ -3433,13 +7285,12 @@
             <a:avLst/>
           </a:prstGeom>
           <a:noFill/>
-          <a:ln/>
         </p:spPr>
         <p:txBody>
           <a:bodyPr wrap="square" lIns="0" tIns="0" rIns="0" bIns="0" rtlCol="0" anchor="ctr"/>
           <a:lstStyle/>
           <a:p>
-            <a:pPr indent="0" marL="0">
+            <a:pPr marL="0" indent="0">
               <a:buNone/>
             </a:pPr>
             <a:r>
@@ -3494,13 +7345,12 @@
             <a:avLst/>
           </a:prstGeom>
           <a:noFill/>
-          <a:ln/>
         </p:spPr>
         <p:txBody>
           <a:bodyPr wrap="square" lIns="0" tIns="0" rIns="0" bIns="0" rtlCol="0" anchor="ctr"/>
           <a:lstStyle/>
           <a:p>
-            <a:pPr algn="ctr" indent="0" marL="0">
+            <a:pPr marL="0" indent="0" algn="ctr">
               <a:buNone/>
             </a:pPr>
             <a:r>
@@ -3553,13 +7403,12 @@
             <a:avLst/>
           </a:prstGeom>
           <a:noFill/>
-          <a:ln/>
         </p:spPr>
         <p:txBody>
           <a:bodyPr wrap="square" lIns="0" tIns="0" rIns="0" bIns="0" rtlCol="0" anchor="ctr"/>
           <a:lstStyle/>
           <a:p>
-            <a:pPr algn="ctr" indent="0" marL="0">
+            <a:pPr marL="0" indent="0" algn="ctr">
               <a:buNone/>
             </a:pPr>
             <a:r>
@@ -3658,13 +7507,12 @@
             <a:avLst/>
           </a:prstGeom>
           <a:noFill/>
-          <a:ln/>
         </p:spPr>
         <p:txBody>
           <a:bodyPr wrap="square" lIns="0" tIns="0" rIns="0" bIns="0" rtlCol="0" anchor="ctr"/>
           <a:lstStyle/>
           <a:p>
-            <a:pPr indent="0" marL="0">
+            <a:pPr marL="0" indent="0">
               <a:buNone/>
             </a:pPr>
             <a:r>
@@ -3694,13 +7542,12 @@
             <a:avLst/>
           </a:prstGeom>
           <a:noFill/>
-          <a:ln/>
         </p:spPr>
         <p:txBody>
           <a:bodyPr wrap="square" lIns="0" tIns="0" rIns="0" bIns="0" rtlCol="0" anchor="ctr"/>
           <a:lstStyle/>
           <a:p>
-            <a:pPr indent="0" marL="0">
+            <a:pPr marL="0" indent="0">
               <a:buNone/>
             </a:pPr>
             <a:r>
@@ -3780,13 +7627,12 @@
             <a:avLst/>
           </a:prstGeom>
           <a:noFill/>
-          <a:ln/>
         </p:spPr>
         <p:txBody>
           <a:bodyPr wrap="square" lIns="0" tIns="0" rIns="0" bIns="0" rtlCol="0" anchor="ctr"/>
           <a:lstStyle/>
           <a:p>
-            <a:pPr indent="0" marL="0">
+            <a:pPr marL="0" indent="0">
               <a:buNone/>
             </a:pPr>
             <a:r>
@@ -3832,8 +7678,8 @@
         </p:nvSpPr>
         <p:spPr>
           <a:xfrm>
-            <a:off x="2770632" y="6190488"/>
-            <a:ext cx="219456" cy="-219456"/>
+            <a:off x="2770632" y="5971032"/>
+            <a:ext cx="219456" cy="219456"/>
           </a:xfrm>
           <a:prstGeom prst="line">
             <a:avLst/>
@@ -3862,13 +7708,12 @@
             <a:avLst/>
           </a:prstGeom>
           <a:noFill/>
-          <a:ln/>
         </p:spPr>
         <p:txBody>
           <a:bodyPr wrap="square" lIns="0" tIns="0" rIns="0" bIns="0" rtlCol="0" anchor="ctr"/>
           <a:lstStyle/>
           <a:p>
-            <a:pPr indent="0" marL="0">
+            <a:pPr marL="0" indent="0">
               <a:buNone/>
             </a:pPr>
             <a:r>
@@ -3923,13 +7768,12 @@
             <a:avLst/>
           </a:prstGeom>
           <a:noFill/>
-          <a:ln/>
         </p:spPr>
         <p:txBody>
           <a:bodyPr wrap="square" lIns="0" tIns="0" rIns="0" bIns="0" rtlCol="0" anchor="ctr"/>
           <a:lstStyle/>
           <a:p>
-            <a:pPr indent="0" marL="0">
+            <a:pPr marL="0" indent="0">
               <a:buNone/>
             </a:pPr>
             <a:r>
@@ -3982,13 +7826,12 @@
             <a:avLst/>
           </a:prstGeom>
           <a:noFill/>
-          <a:ln/>
         </p:spPr>
         <p:txBody>
           <a:bodyPr wrap="square" lIns="0" tIns="0" rIns="0" bIns="0" rtlCol="0" anchor="ctr"/>
           <a:lstStyle/>
           <a:p>
-            <a:pPr indent="0" marL="0">
+            <a:pPr marL="0" indent="0">
               <a:buNone/>
             </a:pPr>
             <a:r>
@@ -4041,13 +7884,12 @@
             <a:avLst/>
           </a:prstGeom>
           <a:noFill/>
-          <a:ln/>
         </p:spPr>
         <p:txBody>
           <a:bodyPr wrap="square" lIns="0" tIns="0" rIns="0" bIns="0" rtlCol="0" anchor="ctr"/>
           <a:lstStyle/>
           <a:p>
-            <a:pPr indent="0" marL="0">
+            <a:pPr marL="0" indent="0">
               <a:buNone/>
             </a:pPr>
             <a:r>
@@ -4079,7 +7921,6 @@
           <a:solidFill>
             <a:srgbClr val="1E293B"/>
           </a:solidFill>
-          <a:ln/>
         </p:spPr>
       </p:sp>
       <p:sp>
@@ -4097,13 +7938,12 @@
             <a:avLst/>
           </a:prstGeom>
           <a:noFill/>
-          <a:ln/>
         </p:spPr>
         <p:txBody>
           <a:bodyPr wrap="square" lIns="0" tIns="0" rIns="0" bIns="0" rtlCol="0" anchor="ctr"/>
           <a:lstStyle/>
           <a:p>
-            <a:pPr indent="0" marL="0">
+            <a:pPr marL="0" indent="0">
               <a:buNone/>
             </a:pPr>
             <a:r>
@@ -4126,14 +7966,15 @@
 </p:sld>
 </file>
 
-<file path=ppt/slides/slide4.xml><?xml version="1.0" encoding="utf-8"?>
+<file path=ppt/slides/slide5.xml><?xml version="1.0" encoding="utf-8"?>
 <p:sld xmlns:a="http://schemas.openxmlformats.org/drawingml/2006/main" xmlns:r="http://schemas.openxmlformats.org/officeDocument/2006/relationships" xmlns:p="http://schemas.openxmlformats.org/presentationml/2006/main">
-  <p:cSld name="Slide 4">
+  <p:cSld>
     <p:bg>
       <p:bgPr>
         <a:solidFill>
           <a:srgbClr val="FFFFFF"/>
         </a:solidFill>
+        <a:effectLst/>
       </p:bgPr>
     </p:bg>
     <p:spTree>
@@ -4165,13 +8006,12 @@
             <a:avLst/>
           </a:prstGeom>
           <a:noFill/>
-          <a:ln/>
         </p:spPr>
         <p:txBody>
           <a:bodyPr wrap="square" lIns="0" tIns="0" rIns="0" bIns="0" rtlCol="0" anchor="ctr"/>
           <a:lstStyle/>
           <a:p>
-            <a:pPr indent="0" marL="0">
+            <a:pPr marL="0" indent="0">
               <a:buNone/>
             </a:pPr>
             <a:r>
@@ -4179,9 +8019,9 @@
                 <a:solidFill>
                   <a:srgbClr val="1E293B"/>
                 </a:solidFill>
-                <a:latin typeface="Calibri" pitchFamily="34" charset="0"/>
-                <a:ea typeface="Calibri" pitchFamily="34" charset="-122"/>
-                <a:cs typeface="Calibri" pitchFamily="34" charset="-120"/>
+                <a:latin typeface="Calibri" panose="020F0502020204030204" pitchFamily="34" charset="0"/>
+                <a:ea typeface="Calibri" panose="020F0502020204030204" pitchFamily="34" charset="-122"/>
+                <a:cs typeface="Calibri" panose="020F0502020204030204" pitchFamily="34" charset="-120"/>
               </a:rPr>
               <a:t>After treatment discontinuation: two roads, then three fates</a:t>
             </a:r>
@@ -4227,13 +8067,12 @@
             <a:avLst/>
           </a:prstGeom>
           <a:noFill/>
-          <a:ln/>
         </p:spPr>
         <p:txBody>
           <a:bodyPr wrap="square" rtlCol="0" anchor="ctr"/>
           <a:lstStyle/>
           <a:p>
-            <a:pPr algn="r" indent="0" marL="0">
+            <a:pPr marL="0" indent="0" algn="r">
               <a:buNone/>
             </a:pPr>
             <a:r>
@@ -4263,13 +8102,12 @@
             <a:avLst/>
           </a:prstGeom>
           <a:noFill/>
-          <a:ln/>
         </p:spPr>
         <p:txBody>
           <a:bodyPr wrap="square" lIns="0" tIns="0" rIns="0" bIns="0" rtlCol="0" anchor="ctr"/>
           <a:lstStyle/>
           <a:p>
-            <a:pPr indent="0" marL="0">
+            <a:pPr marL="0" indent="0">
               <a:buNone/>
             </a:pPr>
             <a:r>
@@ -4299,13 +8137,12 @@
             <a:avLst/>
           </a:prstGeom>
           <a:noFill/>
-          <a:ln/>
         </p:spPr>
         <p:txBody>
           <a:bodyPr wrap="square" lIns="0" tIns="0" rIns="0" bIns="0" rtlCol="0" anchor="ctr"/>
           <a:lstStyle/>
           <a:p>
-            <a:pPr indent="0" marL="0">
+            <a:pPr marL="0" indent="0">
               <a:buNone/>
             </a:pPr>
             <a:r>
@@ -4335,13 +8172,12 @@
             <a:avLst/>
           </a:prstGeom>
           <a:noFill/>
-          <a:ln/>
         </p:spPr>
         <p:txBody>
           <a:bodyPr wrap="square" lIns="0" tIns="0" rIns="0" bIns="0" rtlCol="0" anchor="ctr"/>
           <a:lstStyle/>
           <a:p>
-            <a:pPr indent="0" marL="0">
+            <a:pPr marL="0" indent="0">
               <a:buNone/>
             </a:pPr>
             <a:r>
@@ -4396,13 +8232,12 @@
             <a:avLst/>
           </a:prstGeom>
           <a:noFill/>
-          <a:ln/>
         </p:spPr>
         <p:txBody>
           <a:bodyPr wrap="square" lIns="0" tIns="0" rIns="0" bIns="0" rtlCol="0" anchor="ctr"/>
           <a:lstStyle/>
           <a:p>
-            <a:pPr algn="ctr" indent="0" marL="0">
+            <a:pPr marL="0" indent="0" algn="ctr">
               <a:buNone/>
             </a:pPr>
             <a:r>
@@ -4455,13 +8290,12 @@
             <a:avLst/>
           </a:prstGeom>
           <a:noFill/>
-          <a:ln/>
         </p:spPr>
         <p:txBody>
           <a:bodyPr wrap="square" lIns="0" tIns="0" rIns="0" bIns="0" rtlCol="0" anchor="ctr"/>
           <a:lstStyle/>
           <a:p>
-            <a:pPr algn="ctr" indent="0" marL="0">
+            <a:pPr marL="0" indent="0" algn="ctr">
               <a:buNone/>
             </a:pPr>
             <a:r>
@@ -4560,13 +8394,12 @@
             <a:avLst/>
           </a:prstGeom>
           <a:noFill/>
-          <a:ln/>
         </p:spPr>
         <p:txBody>
           <a:bodyPr wrap="square" lIns="0" tIns="0" rIns="0" bIns="0" rtlCol="0" anchor="ctr"/>
           <a:lstStyle/>
           <a:p>
-            <a:pPr indent="0" marL="0">
+            <a:pPr marL="0" indent="0">
               <a:buNone/>
             </a:pPr>
             <a:r>
@@ -4596,13 +8429,12 @@
             <a:avLst/>
           </a:prstGeom>
           <a:noFill/>
-          <a:ln/>
         </p:spPr>
         <p:txBody>
           <a:bodyPr wrap="square" lIns="0" tIns="0" rIns="0" bIns="0" rtlCol="0" anchor="ctr"/>
           <a:lstStyle/>
           <a:p>
-            <a:pPr indent="0" marL="0">
+            <a:pPr marL="0" indent="0">
               <a:buNone/>
             </a:pPr>
             <a:r>
@@ -4632,13 +8464,12 @@
             <a:avLst/>
           </a:prstGeom>
           <a:noFill/>
-          <a:ln/>
         </p:spPr>
         <p:txBody>
           <a:bodyPr wrap="square" lIns="0" tIns="0" rIns="0" bIns="0" rtlCol="0" anchor="ctr"/>
           <a:lstStyle/>
           <a:p>
-            <a:pPr indent="0" marL="0">
+            <a:pPr marL="0" indent="0">
               <a:buNone/>
             </a:pPr>
             <a:r>
@@ -4693,13 +8524,12 @@
             <a:avLst/>
           </a:prstGeom>
           <a:noFill/>
-          <a:ln/>
         </p:spPr>
         <p:txBody>
           <a:bodyPr wrap="square" lIns="0" tIns="0" rIns="0" bIns="0" rtlCol="0" anchor="ctr"/>
           <a:lstStyle/>
           <a:p>
-            <a:pPr algn="ctr" indent="0" marL="0">
+            <a:pPr marL="0" indent="0" algn="ctr">
               <a:buNone/>
             </a:pPr>
             <a:r>
@@ -4752,13 +8582,12 @@
             <a:avLst/>
           </a:prstGeom>
           <a:noFill/>
-          <a:ln/>
         </p:spPr>
         <p:txBody>
           <a:bodyPr wrap="square" lIns="0" tIns="0" rIns="0" bIns="0" rtlCol="0" anchor="ctr"/>
           <a:lstStyle/>
           <a:p>
-            <a:pPr algn="ctr" indent="0" marL="0">
+            <a:pPr marL="0" indent="0" algn="ctr">
               <a:buNone/>
             </a:pPr>
             <a:r>
@@ -4873,8 +8702,8 @@
         </p:nvSpPr>
         <p:spPr>
           <a:xfrm>
-            <a:off x="7662672" y="3127248"/>
-            <a:ext cx="219456" cy="-219456"/>
+            <a:off x="7662672" y="2907792"/>
+            <a:ext cx="219456" cy="219456"/>
           </a:xfrm>
           <a:prstGeom prst="line">
             <a:avLst/>
@@ -4903,13 +8732,12 @@
             <a:avLst/>
           </a:prstGeom>
           <a:noFill/>
-          <a:ln/>
         </p:spPr>
         <p:txBody>
           <a:bodyPr wrap="square" lIns="0" tIns="0" rIns="0" bIns="0" rtlCol="0" anchor="ctr"/>
           <a:lstStyle/>
           <a:p>
-            <a:pPr indent="0" marL="0">
+            <a:pPr marL="0" indent="0">
               <a:buNone/>
             </a:pPr>
             <a:r>
@@ -4939,13 +8767,12 @@
             <a:avLst/>
           </a:prstGeom>
           <a:noFill/>
-          <a:ln/>
         </p:spPr>
         <p:txBody>
           <a:bodyPr wrap="square" lIns="0" tIns="0" rIns="0" bIns="0" rtlCol="0" anchor="ctr"/>
           <a:lstStyle/>
           <a:p>
-            <a:pPr indent="0" marL="0">
+            <a:pPr marL="0" indent="0">
               <a:buNone/>
             </a:pPr>
             <a:r>
@@ -4975,13 +8802,12 @@
             <a:avLst/>
           </a:prstGeom>
           <a:noFill/>
-          <a:ln/>
         </p:spPr>
         <p:txBody>
           <a:bodyPr wrap="square" lIns="0" tIns="0" rIns="0" bIns="0" rtlCol="0" anchor="ctr"/>
           <a:lstStyle/>
           <a:p>
-            <a:pPr indent="0" marL="0">
+            <a:pPr marL="0" indent="0">
               <a:buNone/>
             </a:pPr>
             <a:r>
@@ -5036,13 +8862,12 @@
             <a:avLst/>
           </a:prstGeom>
           <a:noFill/>
-          <a:ln/>
         </p:spPr>
         <p:txBody>
           <a:bodyPr wrap="square" lIns="0" tIns="0" rIns="0" bIns="0" rtlCol="0" anchor="ctr"/>
           <a:lstStyle/>
           <a:p>
-            <a:pPr algn="ctr" indent="0" marL="0">
+            <a:pPr marL="0" indent="0" algn="ctr">
               <a:buNone/>
             </a:pPr>
             <a:r>
@@ -5095,13 +8920,12 @@
             <a:avLst/>
           </a:prstGeom>
           <a:noFill/>
-          <a:ln/>
         </p:spPr>
         <p:txBody>
           <a:bodyPr wrap="square" lIns="0" tIns="0" rIns="0" bIns="0" rtlCol="0" anchor="ctr"/>
           <a:lstStyle/>
           <a:p>
-            <a:pPr algn="ctr" indent="0" marL="0">
+            <a:pPr marL="0" indent="0" algn="ctr">
               <a:buNone/>
             </a:pPr>
             <a:r>
@@ -5225,13 +9049,12 @@
             <a:avLst/>
           </a:prstGeom>
           <a:noFill/>
-          <a:ln/>
         </p:spPr>
         <p:txBody>
           <a:bodyPr wrap="square" lIns="0" tIns="0" rIns="0" bIns="0" rtlCol="0" anchor="ctr"/>
           <a:lstStyle/>
           <a:p>
-            <a:pPr indent="0" marL="0">
+            <a:pPr marL="0" indent="0">
               <a:buNone/>
             </a:pPr>
             <a:r>
@@ -5261,13 +9084,12 @@
             <a:avLst/>
           </a:prstGeom>
           <a:noFill/>
-          <a:ln/>
         </p:spPr>
         <p:txBody>
           <a:bodyPr wrap="square" lIns="0" tIns="0" rIns="0" bIns="0" rtlCol="0" anchor="ctr"/>
           <a:lstStyle/>
           <a:p>
-            <a:pPr indent="0" marL="0">
+            <a:pPr marL="0" indent="0">
               <a:buNone/>
             </a:pPr>
             <a:r>
@@ -5297,13 +9119,12 @@
             <a:avLst/>
           </a:prstGeom>
           <a:noFill/>
-          <a:ln/>
         </p:spPr>
         <p:txBody>
           <a:bodyPr wrap="square" lIns="0" tIns="0" rIns="0" bIns="0" rtlCol="0" anchor="ctr"/>
           <a:lstStyle/>
           <a:p>
-            <a:pPr indent="0" marL="0">
+            <a:pPr marL="0" indent="0">
               <a:buNone/>
             </a:pPr>
             <a:r>
@@ -5358,13 +9179,12 @@
             <a:avLst/>
           </a:prstGeom>
           <a:noFill/>
-          <a:ln/>
         </p:spPr>
         <p:txBody>
           <a:bodyPr wrap="square" lIns="0" tIns="0" rIns="0" bIns="0" rtlCol="0" anchor="ctr"/>
           <a:lstStyle/>
           <a:p>
-            <a:pPr algn="ctr" indent="0" marL="0">
+            <a:pPr marL="0" indent="0" algn="ctr">
               <a:buNone/>
             </a:pPr>
             <a:r>
@@ -5417,13 +9237,12 @@
             <a:avLst/>
           </a:prstGeom>
           <a:noFill/>
-          <a:ln/>
         </p:spPr>
         <p:txBody>
           <a:bodyPr wrap="square" lIns="0" tIns="0" rIns="0" bIns="0" rtlCol="0" anchor="ctr"/>
           <a:lstStyle/>
           <a:p>
-            <a:pPr algn="ctr" indent="0" marL="0">
+            <a:pPr marL="0" indent="0" algn="ctr">
               <a:buNone/>
             </a:pPr>
             <a:r>
@@ -5545,13 +9364,12 @@
             <a:avLst/>
           </a:prstGeom>
           <a:noFill/>
-          <a:ln/>
         </p:spPr>
         <p:txBody>
           <a:bodyPr wrap="square" lIns="0" tIns="0" rIns="0" bIns="0" rtlCol="0" anchor="ctr"/>
           <a:lstStyle/>
           <a:p>
-            <a:pPr indent="0" marL="0">
+            <a:pPr marL="0" indent="0">
               <a:buNone/>
             </a:pPr>
             <a:r>
@@ -5608,13 +9426,12 @@
             <a:avLst/>
           </a:prstGeom>
           <a:noFill/>
-          <a:ln/>
         </p:spPr>
         <p:txBody>
           <a:bodyPr wrap="square" lIns="0" tIns="0" rIns="0" bIns="0" rtlCol="0" anchor="ctr"/>
           <a:lstStyle/>
           <a:p>
-            <a:pPr indent="0" marL="0">
+            <a:pPr marL="0" indent="0">
               <a:buNone/>
             </a:pPr>
             <a:r>
@@ -5625,9 +9442,6 @@
               </a:rPr>
               <a:t>Key idea:  </a:t>
             </a:r>
-            <a:pPr indent="0" marL="0">
-              <a:buNone/>
-            </a:pPr>
             <a:r>
               <a:rPr lang="en-US" sz="1300" dirty="0">
                 <a:solidFill>
@@ -5648,14 +9462,15 @@
 </p:sld>
 </file>
 
-<file path=ppt/slides/slide5.xml><?xml version="1.0" encoding="utf-8"?>
+<file path=ppt/slides/slide6.xml><?xml version="1.0" encoding="utf-8"?>
 <p:sld xmlns:a="http://schemas.openxmlformats.org/drawingml/2006/main" xmlns:r="http://schemas.openxmlformats.org/officeDocument/2006/relationships" xmlns:p="http://schemas.openxmlformats.org/presentationml/2006/main">
-  <p:cSld name="Slide 5">
+  <p:cSld>
     <p:bg>
       <p:bgPr>
         <a:solidFill>
           <a:srgbClr val="FFFFFF"/>
         </a:solidFill>
+        <a:effectLst/>
       </p:bgPr>
     </p:bg>
     <p:spTree>
@@ -5687,13 +9502,12 @@
             <a:avLst/>
           </a:prstGeom>
           <a:noFill/>
-          <a:ln/>
         </p:spPr>
         <p:txBody>
           <a:bodyPr wrap="square" lIns="0" tIns="0" rIns="0" bIns="0" rtlCol="0" anchor="ctr"/>
           <a:lstStyle/>
           <a:p>
-            <a:pPr indent="0" marL="0">
+            <a:pPr marL="0" indent="0">
               <a:buNone/>
             </a:pPr>
             <a:r>
@@ -5701,9 +9515,9 @@
                 <a:solidFill>
                   <a:srgbClr val="1E293B"/>
                 </a:solidFill>
-                <a:latin typeface="Calibri" pitchFamily="34" charset="0"/>
-                <a:ea typeface="Calibri" pitchFamily="34" charset="-122"/>
-                <a:cs typeface="Calibri" pitchFamily="34" charset="-120"/>
+                <a:latin typeface="Calibri" panose="020F0502020204030204" pitchFamily="34" charset="0"/>
+                <a:ea typeface="Calibri" panose="020F0502020204030204" pitchFamily="34" charset="-122"/>
+                <a:cs typeface="Calibri" panose="020F0502020204030204" pitchFamily="34" charset="-120"/>
               </a:rPr>
               <a:t>Eight patterns (P1–P8) — option A: table</a:t>
             </a:r>
@@ -5749,13 +9563,12 @@
             <a:avLst/>
           </a:prstGeom>
           <a:noFill/>
-          <a:ln/>
         </p:spPr>
         <p:txBody>
           <a:bodyPr wrap="square" rtlCol="0" anchor="ctr"/>
           <a:lstStyle/>
           <a:p>
-            <a:pPr algn="r" indent="0" marL="0">
+            <a:pPr marL="0" indent="0" algn="r">
               <a:buNone/>
             </a:pPr>
             <a:r>
@@ -5785,13 +9598,12 @@
             <a:avLst/>
           </a:prstGeom>
           <a:noFill/>
-          <a:ln/>
         </p:spPr>
         <p:txBody>
           <a:bodyPr wrap="square" lIns="0" tIns="0" rIns="0" bIns="0" rtlCol="0" anchor="ctr"/>
           <a:lstStyle/>
           <a:p>
-            <a:pPr indent="0" marL="0">
+            <a:pPr marL="0" indent="0">
               <a:buNone/>
             </a:pPr>
             <a:r>
@@ -5812,17 +9624,11 @@
           <p:cNvGraphicFramePr>
             <a:graphicFrameLocks noGrp="1"/>
           </p:cNvGraphicFramePr>
-          <p:nvPr>
-            <p:extLst>
-              <p:ext uri="{D42A27DB-BD31-4B8C-83A1-F6EECF244321}">
-                <p14:modId xmlns:p14="http://schemas.microsoft.com/office/powerpoint/2010/main" val="1579011935"/>
-              </p:ext>
-            </p:extLst>
-          </p:nvPr>
+          <p:nvPr/>
         </p:nvGraphicFramePr>
         <p:xfrm>
           <a:off x="457200" y="1417320"/>
-          <a:ext cx="11247120" cy="914400"/>
+          <a:ext cx="11247120" cy="3703320"/>
         </p:xfrm>
         <a:graphic>
           <a:graphicData uri="http://schemas.openxmlformats.org/drawingml/2006/table">
@@ -5841,7 +9647,7 @@
                     <a:bodyPr/>
                     <a:lstStyle/>
                     <a:p>
-                      <a:pPr algn="l" indent="0" marL="0">
+                      <a:pPr marL="0" indent="0" algn="l">
                         <a:buNone/>
                       </a:pPr>
                       <a:r>
@@ -5849,20 +9655,20 @@
                           <a:solidFill>
                             <a:srgbClr val="FFFFFF"/>
                           </a:solidFill>
-                          <a:latin typeface="Calibri" pitchFamily="34" charset="0"/>
-                          <a:ea typeface="Calibri" pitchFamily="34" charset="-122"/>
-                          <a:cs typeface="Calibri" pitchFamily="34" charset="-120"/>
+                          <a:latin typeface="Calibri" panose="020F0502020204030204" pitchFamily="34" charset="0"/>
+                          <a:ea typeface="Calibri" panose="020F0502020204030204" pitchFamily="34" charset="-122"/>
+                          <a:cs typeface="Calibri" panose="020F0502020204030204" pitchFamily="34" charset="-120"/>
                         </a:rPr>
                         <a:t>Pattern</a:t>
                       </a:r>
                       <a:endParaRPr lang="en-US" sz="1200" dirty="0">
-                        <a:latin typeface="Calibri" charset="0"/>
-                        <a:ea typeface="Calibri" charset="0"/>
-                        <a:cs typeface="Calibri" charset="0"/>
+                        <a:latin typeface="Calibri" panose="020F0502020204030204" pitchFamily="34" charset="0"/>
+                        <a:ea typeface="Calibri" panose="020F0502020204030204" pitchFamily="34" charset="0"/>
+                        <a:cs typeface="Calibri" panose="020F0502020204030204" pitchFamily="34" charset="0"/>
                       </a:endParaRPr>
                     </a:p>
                   </a:txBody>
-                  <a:tcPr marL="91440" marR="91440" marT="45720" marB="45720" anchor="ctr">
+                  <a:tcPr anchor="ctr">
                     <a:lnL w="12700" cap="flat" cmpd="sng" algn="ctr">
                       <a:solidFill>
                         <a:srgbClr val="E2E8F0"/>
@@ -5909,7 +9715,7 @@
                     <a:bodyPr/>
                     <a:lstStyle/>
                     <a:p>
-                      <a:pPr algn="l" indent="0" marL="0">
+                      <a:pPr marL="0" indent="0" algn="l">
                         <a:buNone/>
                       </a:pPr>
                       <a:r>
@@ -5917,20 +9723,20 @@
                           <a:solidFill>
                             <a:srgbClr val="FFFFFF"/>
                           </a:solidFill>
-                          <a:latin typeface="Calibri" pitchFamily="34" charset="0"/>
-                          <a:ea typeface="Calibri" pitchFamily="34" charset="-122"/>
-                          <a:cs typeface="Calibri" pitchFamily="34" charset="-120"/>
+                          <a:latin typeface="Calibri" panose="020F0502020204030204" pitchFamily="34" charset="0"/>
+                          <a:ea typeface="Calibri" panose="020F0502020204030204" pitchFamily="34" charset="-122"/>
+                          <a:cs typeface="Calibri" panose="020F0502020204030204" pitchFamily="34" charset="-120"/>
                         </a:rPr>
                         <a:t>On-treatment segment</a:t>
                       </a:r>
                       <a:endParaRPr lang="en-US" sz="1200" dirty="0">
-                        <a:latin typeface="Calibri" charset="0"/>
-                        <a:ea typeface="Calibri" charset="0"/>
-                        <a:cs typeface="Calibri" charset="0"/>
+                        <a:latin typeface="Calibri" panose="020F0502020204030204" pitchFamily="34" charset="0"/>
+                        <a:ea typeface="Calibri" panose="020F0502020204030204" pitchFamily="34" charset="0"/>
+                        <a:cs typeface="Calibri" panose="020F0502020204030204" pitchFamily="34" charset="0"/>
                       </a:endParaRPr>
                     </a:p>
                   </a:txBody>
-                  <a:tcPr marL="91440" marR="91440" marT="45720" marB="45720" anchor="ctr">
+                  <a:tcPr anchor="ctr">
                     <a:lnL w="12700" cap="flat" cmpd="sng" algn="ctr">
                       <a:solidFill>
                         <a:srgbClr val="E2E8F0"/>
@@ -5977,7 +9783,7 @@
                     <a:bodyPr/>
                     <a:lstStyle/>
                     <a:p>
-                      <a:pPr algn="l" indent="0" marL="0">
+                      <a:pPr marL="0" indent="0" algn="l">
                         <a:buNone/>
                       </a:pPr>
                       <a:r>
@@ -5985,20 +9791,20 @@
                           <a:solidFill>
                             <a:srgbClr val="FFFFFF"/>
                           </a:solidFill>
-                          <a:latin typeface="Calibri" pitchFamily="34" charset="0"/>
-                          <a:ea typeface="Calibri" pitchFamily="34" charset="-122"/>
-                          <a:cs typeface="Calibri" pitchFamily="34" charset="-120"/>
+                          <a:latin typeface="Calibri" panose="020F0502020204030204" pitchFamily="34" charset="0"/>
+                          <a:ea typeface="Calibri" panose="020F0502020204030204" pitchFamily="34" charset="-122"/>
+                          <a:cs typeface="Calibri" panose="020F0502020204030204" pitchFamily="34" charset="-120"/>
                         </a:rPr>
                         <a:t>Off-treatment segment</a:t>
                       </a:r>
                       <a:endParaRPr lang="en-US" sz="1200" dirty="0">
-                        <a:latin typeface="Calibri" charset="0"/>
-                        <a:ea typeface="Calibri" charset="0"/>
-                        <a:cs typeface="Calibri" charset="0"/>
+                        <a:latin typeface="Calibri" panose="020F0502020204030204" pitchFamily="34" charset="0"/>
+                        <a:ea typeface="Calibri" panose="020F0502020204030204" pitchFamily="34" charset="0"/>
+                        <a:cs typeface="Calibri" panose="020F0502020204030204" pitchFamily="34" charset="0"/>
                       </a:endParaRPr>
                     </a:p>
                   </a:txBody>
-                  <a:tcPr marL="91440" marR="91440" marT="45720" marB="45720" anchor="ctr">
+                  <a:tcPr anchor="ctr">
                     <a:lnL w="12700" cap="flat" cmpd="sng" algn="ctr">
                       <a:solidFill>
                         <a:srgbClr val="E2E8F0"/>
@@ -6045,7 +9851,7 @@
                     <a:bodyPr/>
                     <a:lstStyle/>
                     <a:p>
-                      <a:pPr algn="l" indent="0" marL="0">
+                      <a:pPr marL="0" indent="0" algn="l">
                         <a:buNone/>
                       </a:pPr>
                       <a:r>
@@ -6053,20 +9859,20 @@
                           <a:solidFill>
                             <a:srgbClr val="FFFFFF"/>
                           </a:solidFill>
-                          <a:latin typeface="Calibri" pitchFamily="34" charset="0"/>
-                          <a:ea typeface="Calibri" pitchFamily="34" charset="-122"/>
-                          <a:cs typeface="Calibri" pitchFamily="34" charset="-120"/>
+                          <a:latin typeface="Calibri" panose="020F0502020204030204" pitchFamily="34" charset="0"/>
+                          <a:ea typeface="Calibri" panose="020F0502020204030204" pitchFamily="34" charset="-122"/>
+                          <a:cs typeface="Calibri" panose="020F0502020204030204" pitchFamily="34" charset="-120"/>
                         </a:rPr>
                         <a:t>Terminal event</a:t>
                       </a:r>
                       <a:endParaRPr lang="en-US" sz="1200" dirty="0">
-                        <a:latin typeface="Calibri" charset="0"/>
-                        <a:ea typeface="Calibri" charset="0"/>
-                        <a:cs typeface="Calibri" charset="0"/>
+                        <a:latin typeface="Calibri" panose="020F0502020204030204" pitchFamily="34" charset="0"/>
+                        <a:ea typeface="Calibri" panose="020F0502020204030204" pitchFamily="34" charset="0"/>
+                        <a:cs typeface="Calibri" panose="020F0502020204030204" pitchFamily="34" charset="0"/>
                       </a:endParaRPr>
                     </a:p>
                   </a:txBody>
-                  <a:tcPr marL="91440" marR="91440" marT="45720" marB="45720" anchor="ctr">
+                  <a:tcPr anchor="ctr">
                     <a:lnL w="12700" cap="flat" cmpd="sng" algn="ctr">
                       <a:solidFill>
                         <a:srgbClr val="E2E8F0"/>
@@ -6113,7 +9919,7 @@
                     <a:bodyPr/>
                     <a:lstStyle/>
                     <a:p>
-                      <a:pPr algn="l" indent="0" marL="0">
+                      <a:pPr marL="0" indent="0" algn="l">
                         <a:buNone/>
                       </a:pPr>
                       <a:r>
@@ -6121,20 +9927,20 @@
                           <a:solidFill>
                             <a:srgbClr val="FFFFFF"/>
                           </a:solidFill>
-                          <a:latin typeface="Calibri" pitchFamily="34" charset="0"/>
-                          <a:ea typeface="Calibri" pitchFamily="34" charset="-122"/>
-                          <a:cs typeface="Calibri" pitchFamily="34" charset="-120"/>
+                          <a:latin typeface="Calibri" panose="020F0502020204030204" pitchFamily="34" charset="0"/>
+                          <a:ea typeface="Calibri" panose="020F0502020204030204" pitchFamily="34" charset="-122"/>
+                          <a:cs typeface="Calibri" panose="020F0502020204030204" pitchFamily="34" charset="-120"/>
                         </a:rPr>
                         <a:t>Role in imputation</a:t>
                       </a:r>
                       <a:endParaRPr lang="en-US" sz="1200" dirty="0">
-                        <a:latin typeface="Calibri" charset="0"/>
-                        <a:ea typeface="Calibri" charset="0"/>
-                        <a:cs typeface="Calibri" charset="0"/>
+                        <a:latin typeface="Calibri" panose="020F0502020204030204" pitchFamily="34" charset="0"/>
+                        <a:ea typeface="Calibri" panose="020F0502020204030204" pitchFamily="34" charset="0"/>
+                        <a:cs typeface="Calibri" panose="020F0502020204030204" pitchFamily="34" charset="0"/>
                       </a:endParaRPr>
                     </a:p>
                   </a:txBody>
-                  <a:tcPr marL="91440" marR="91440" marT="45720" marB="45720" anchor="ctr">
+                  <a:tcPr anchor="ctr">
                     <a:lnL w="12700" cap="flat" cmpd="sng" algn="ctr">
                       <a:solidFill>
                         <a:srgbClr val="E2E8F0"/>
@@ -6183,7 +9989,7 @@
                     <a:bodyPr/>
                     <a:lstStyle/>
                     <a:p>
-                      <a:pPr indent="0" marL="0">
+                      <a:pPr marL="0" indent="0">
                         <a:buNone/>
                       </a:pPr>
                       <a:r>
@@ -6191,20 +9997,20 @@
                           <a:solidFill>
                             <a:srgbClr val="334155"/>
                           </a:solidFill>
-                          <a:latin typeface="Calibri" pitchFamily="34" charset="0"/>
-                          <a:ea typeface="Calibri" pitchFamily="34" charset="-122"/>
-                          <a:cs typeface="Calibri" pitchFamily="34" charset="-120"/>
+                          <a:latin typeface="Calibri" panose="020F0502020204030204" pitchFamily="34" charset="0"/>
+                          <a:ea typeface="Calibri" panose="020F0502020204030204" pitchFamily="34" charset="-122"/>
+                          <a:cs typeface="Calibri" panose="020F0502020204030204" pitchFamily="34" charset="-120"/>
                         </a:rPr>
                         <a:t>P1</a:t>
                       </a:r>
                       <a:endParaRPr lang="en-US" sz="1200" dirty="0">
-                        <a:latin typeface="Calibri" charset="0"/>
-                        <a:ea typeface="Calibri" charset="0"/>
-                        <a:cs typeface="Calibri" charset="0"/>
+                        <a:latin typeface="Calibri" panose="020F0502020204030204" pitchFamily="34" charset="0"/>
+                        <a:ea typeface="Calibri" panose="020F0502020204030204" pitchFamily="34" charset="0"/>
+                        <a:cs typeface="Calibri" panose="020F0502020204030204" pitchFamily="34" charset="0"/>
                       </a:endParaRPr>
                     </a:p>
                   </a:txBody>
-                  <a:tcPr marL="91440" marR="91440" marT="45720" marB="45720" anchor="ctr">
+                  <a:tcPr anchor="ctr">
                     <a:lnL w="12700" cap="flat" cmpd="sng" algn="ctr">
                       <a:solidFill>
                         <a:srgbClr val="E2E8F0"/>
@@ -6248,7 +10054,7 @@
                     <a:bodyPr/>
                     <a:lstStyle/>
                     <a:p>
-                      <a:pPr indent="0" marL="0">
+                      <a:pPr marL="0" indent="0">
                         <a:buNone/>
                       </a:pPr>
                       <a:r>
@@ -6256,20 +10062,20 @@
                           <a:solidFill>
                             <a:srgbClr val="334155"/>
                           </a:solidFill>
-                          <a:latin typeface="Calibri" pitchFamily="34" charset="0"/>
-                          <a:ea typeface="Calibri" pitchFamily="34" charset="-122"/>
-                          <a:cs typeface="Calibri" pitchFamily="34" charset="-120"/>
+                          <a:latin typeface="Calibri" panose="020F0502020204030204" pitchFamily="34" charset="0"/>
+                          <a:ea typeface="Calibri" panose="020F0502020204030204" pitchFamily="34" charset="-122"/>
+                          <a:cs typeface="Calibri" panose="020F0502020204030204" pitchFamily="34" charset="-120"/>
                         </a:rPr>
                         <a:t>yes</a:t>
                       </a:r>
                       <a:endParaRPr lang="en-US" sz="1200" dirty="0">
-                        <a:latin typeface="Calibri" charset="0"/>
-                        <a:ea typeface="Calibri" charset="0"/>
-                        <a:cs typeface="Calibri" charset="0"/>
+                        <a:latin typeface="Calibri" panose="020F0502020204030204" pitchFamily="34" charset="0"/>
+                        <a:ea typeface="Calibri" panose="020F0502020204030204" pitchFamily="34" charset="0"/>
+                        <a:cs typeface="Calibri" panose="020F0502020204030204" pitchFamily="34" charset="0"/>
                       </a:endParaRPr>
                     </a:p>
                   </a:txBody>
-                  <a:tcPr marL="91440" marR="91440" marT="45720" marB="45720" anchor="ctr">
+                  <a:tcPr anchor="ctr">
                     <a:lnL w="12700" cap="flat" cmpd="sng" algn="ctr">
                       <a:solidFill>
                         <a:srgbClr val="E2E8F0"/>
@@ -6313,7 +10119,7 @@
                     <a:bodyPr/>
                     <a:lstStyle/>
                     <a:p>
-                      <a:pPr indent="0" marL="0">
+                      <a:pPr marL="0" indent="0">
                         <a:buNone/>
                       </a:pPr>
                       <a:r>
@@ -6321,20 +10127,20 @@
                           <a:solidFill>
                             <a:srgbClr val="334155"/>
                           </a:solidFill>
-                          <a:latin typeface="Calibri" pitchFamily="34" charset="0"/>
-                          <a:ea typeface="Calibri" pitchFamily="34" charset="-122"/>
-                          <a:cs typeface="Calibri" pitchFamily="34" charset="-120"/>
+                          <a:latin typeface="Calibri" panose="020F0502020204030204" pitchFamily="34" charset="0"/>
+                          <a:ea typeface="Calibri" panose="020F0502020204030204" pitchFamily="34" charset="-122"/>
+                          <a:cs typeface="Calibri" panose="020F0502020204030204" pitchFamily="34" charset="-120"/>
                         </a:rPr>
                         <a:t>—</a:t>
                       </a:r>
                       <a:endParaRPr lang="en-US" sz="1200" dirty="0">
-                        <a:latin typeface="Calibri" charset="0"/>
-                        <a:ea typeface="Calibri" charset="0"/>
-                        <a:cs typeface="Calibri" charset="0"/>
+                        <a:latin typeface="Calibri" panose="020F0502020204030204" pitchFamily="34" charset="0"/>
+                        <a:ea typeface="Calibri" panose="020F0502020204030204" pitchFamily="34" charset="0"/>
+                        <a:cs typeface="Calibri" panose="020F0502020204030204" pitchFamily="34" charset="0"/>
                       </a:endParaRPr>
                     </a:p>
                   </a:txBody>
-                  <a:tcPr marL="91440" marR="91440" marT="45720" marB="45720" anchor="ctr">
+                  <a:tcPr anchor="ctr">
                     <a:lnL w="12700" cap="flat" cmpd="sng" algn="ctr">
                       <a:solidFill>
                         <a:srgbClr val="E2E8F0"/>
@@ -6378,7 +10184,7 @@
                     <a:bodyPr/>
                     <a:lstStyle/>
                     <a:p>
-                      <a:pPr indent="0" marL="0">
+                      <a:pPr marL="0" indent="0">
                         <a:buNone/>
                       </a:pPr>
                       <a:r>
@@ -6386,20 +10192,20 @@
                           <a:solidFill>
                             <a:srgbClr val="334155"/>
                           </a:solidFill>
-                          <a:latin typeface="Calibri" pitchFamily="34" charset="0"/>
-                          <a:ea typeface="Calibri" pitchFamily="34" charset="-122"/>
-                          <a:cs typeface="Calibri" pitchFamily="34" charset="-120"/>
+                          <a:latin typeface="Calibri" panose="020F0502020204030204" pitchFamily="34" charset="0"/>
+                          <a:ea typeface="Calibri" panose="020F0502020204030204" pitchFamily="34" charset="-122"/>
+                          <a:cs typeface="Calibri" panose="020F0502020204030204" pitchFamily="34" charset="-120"/>
                         </a:rPr>
                         <a:t>CV event on-tx</a:t>
                       </a:r>
                       <a:endParaRPr lang="en-US" sz="1200" dirty="0">
-                        <a:latin typeface="Calibri" charset="0"/>
-                        <a:ea typeface="Calibri" charset="0"/>
-                        <a:cs typeface="Calibri" charset="0"/>
+                        <a:latin typeface="Calibri" panose="020F0502020204030204" pitchFamily="34" charset="0"/>
+                        <a:ea typeface="Calibri" panose="020F0502020204030204" pitchFamily="34" charset="0"/>
+                        <a:cs typeface="Calibri" panose="020F0502020204030204" pitchFamily="34" charset="0"/>
                       </a:endParaRPr>
                     </a:p>
                   </a:txBody>
-                  <a:tcPr marL="91440" marR="91440" marT="45720" marB="45720" anchor="ctr">
+                  <a:tcPr anchor="ctr">
                     <a:lnL w="12700" cap="flat" cmpd="sng" algn="ctr">
                       <a:solidFill>
                         <a:srgbClr val="E2E8F0"/>
@@ -6443,7 +10249,7 @@
                     <a:bodyPr/>
                     <a:lstStyle/>
                     <a:p>
-                      <a:pPr indent="0" marL="0">
+                      <a:pPr marL="0" indent="0">
                         <a:buNone/>
                       </a:pPr>
                       <a:r>
@@ -6451,20 +10257,20 @@
                           <a:solidFill>
                             <a:srgbClr val="64748B"/>
                           </a:solidFill>
-                          <a:latin typeface="Calibri" pitchFamily="34" charset="0"/>
-                          <a:ea typeface="Calibri" pitchFamily="34" charset="-122"/>
-                          <a:cs typeface="Calibri" pitchFamily="34" charset="-120"/>
+                          <a:latin typeface="Calibri" panose="020F0502020204030204" pitchFamily="34" charset="0"/>
+                          <a:ea typeface="Calibri" panose="020F0502020204030204" pitchFamily="34" charset="-122"/>
+                          <a:cs typeface="Calibri" panose="020F0502020204030204" pitchFamily="34" charset="-120"/>
                         </a:rPr>
                         <a:t>—</a:t>
                       </a:r>
                       <a:endParaRPr lang="en-US" sz="1200" dirty="0">
-                        <a:latin typeface="Calibri" charset="0"/>
-                        <a:ea typeface="Calibri" charset="0"/>
-                        <a:cs typeface="Calibri" charset="0"/>
+                        <a:latin typeface="Calibri" panose="020F0502020204030204" pitchFamily="34" charset="0"/>
+                        <a:ea typeface="Calibri" panose="020F0502020204030204" pitchFamily="34" charset="0"/>
+                        <a:cs typeface="Calibri" panose="020F0502020204030204" pitchFamily="34" charset="0"/>
                       </a:endParaRPr>
                     </a:p>
                   </a:txBody>
-                  <a:tcPr marL="91440" marR="91440" marT="45720" marB="45720" anchor="ctr">
+                  <a:tcPr anchor="ctr">
                     <a:lnL w="12700" cap="flat" cmpd="sng" algn="ctr">
                       <a:solidFill>
                         <a:srgbClr val="E2E8F0"/>
@@ -6510,7 +10316,7 @@
                     <a:bodyPr/>
                     <a:lstStyle/>
                     <a:p>
-                      <a:pPr indent="0" marL="0">
+                      <a:pPr marL="0" indent="0">
                         <a:buNone/>
                       </a:pPr>
                       <a:r>
@@ -6518,20 +10324,20 @@
                           <a:solidFill>
                             <a:srgbClr val="334155"/>
                           </a:solidFill>
-                          <a:latin typeface="Calibri" pitchFamily="34" charset="0"/>
-                          <a:ea typeface="Calibri" pitchFamily="34" charset="-122"/>
-                          <a:cs typeface="Calibri" pitchFamily="34" charset="-120"/>
+                          <a:latin typeface="Calibri" panose="020F0502020204030204" pitchFamily="34" charset="0"/>
+                          <a:ea typeface="Calibri" panose="020F0502020204030204" pitchFamily="34" charset="-122"/>
+                          <a:cs typeface="Calibri" panose="020F0502020204030204" pitchFamily="34" charset="-120"/>
                         </a:rPr>
                         <a:t>P2</a:t>
                       </a:r>
                       <a:endParaRPr lang="en-US" sz="1200" dirty="0">
-                        <a:latin typeface="Calibri" charset="0"/>
-                        <a:ea typeface="Calibri" charset="0"/>
-                        <a:cs typeface="Calibri" charset="0"/>
+                        <a:latin typeface="Calibri" panose="020F0502020204030204" pitchFamily="34" charset="0"/>
+                        <a:ea typeface="Calibri" panose="020F0502020204030204" pitchFamily="34" charset="0"/>
+                        <a:cs typeface="Calibri" panose="020F0502020204030204" pitchFamily="34" charset="0"/>
                       </a:endParaRPr>
                     </a:p>
                   </a:txBody>
-                  <a:tcPr marL="91440" marR="91440" marT="45720" marB="45720" anchor="ctr">
+                  <a:tcPr anchor="ctr">
                     <a:lnL w="12700" cap="flat" cmpd="sng" algn="ctr">
                       <a:solidFill>
                         <a:srgbClr val="E2E8F0"/>
@@ -6575,7 +10381,7 @@
                     <a:bodyPr/>
                     <a:lstStyle/>
                     <a:p>
-                      <a:pPr indent="0" marL="0">
+                      <a:pPr marL="0" indent="0">
                         <a:buNone/>
                       </a:pPr>
                       <a:r>
@@ -6583,20 +10389,20 @@
                           <a:solidFill>
                             <a:srgbClr val="334155"/>
                           </a:solidFill>
-                          <a:latin typeface="Calibri" pitchFamily="34" charset="0"/>
-                          <a:ea typeface="Calibri" pitchFamily="34" charset="-122"/>
-                          <a:cs typeface="Calibri" pitchFamily="34" charset="-120"/>
+                          <a:latin typeface="Calibri" panose="020F0502020204030204" pitchFamily="34" charset="0"/>
+                          <a:ea typeface="Calibri" panose="020F0502020204030204" pitchFamily="34" charset="-122"/>
+                          <a:cs typeface="Calibri" panose="020F0502020204030204" pitchFamily="34" charset="-120"/>
                         </a:rPr>
                         <a:t>yes</a:t>
                       </a:r>
                       <a:endParaRPr lang="en-US" sz="1200" dirty="0">
-                        <a:latin typeface="Calibri" charset="0"/>
-                        <a:ea typeface="Calibri" charset="0"/>
-                        <a:cs typeface="Calibri" charset="0"/>
+                        <a:latin typeface="Calibri" panose="020F0502020204030204" pitchFamily="34" charset="0"/>
+                        <a:ea typeface="Calibri" panose="020F0502020204030204" pitchFamily="34" charset="0"/>
+                        <a:cs typeface="Calibri" panose="020F0502020204030204" pitchFamily="34" charset="0"/>
                       </a:endParaRPr>
                     </a:p>
                   </a:txBody>
-                  <a:tcPr marL="91440" marR="91440" marT="45720" marB="45720" anchor="ctr">
+                  <a:tcPr anchor="ctr">
                     <a:lnL w="12700" cap="flat" cmpd="sng" algn="ctr">
                       <a:solidFill>
                         <a:srgbClr val="E2E8F0"/>
@@ -6640,7 +10446,7 @@
                     <a:bodyPr/>
                     <a:lstStyle/>
                     <a:p>
-                      <a:pPr indent="0" marL="0">
+                      <a:pPr marL="0" indent="0">
                         <a:buNone/>
                       </a:pPr>
                       <a:r>
@@ -6648,20 +10454,20 @@
                           <a:solidFill>
                             <a:srgbClr val="334155"/>
                           </a:solidFill>
-                          <a:latin typeface="Calibri" pitchFamily="34" charset="0"/>
-                          <a:ea typeface="Calibri" pitchFamily="34" charset="-122"/>
-                          <a:cs typeface="Calibri" pitchFamily="34" charset="-120"/>
+                          <a:latin typeface="Calibri" panose="020F0502020204030204" pitchFamily="34" charset="0"/>
+                          <a:ea typeface="Calibri" panose="020F0502020204030204" pitchFamily="34" charset="-122"/>
+                          <a:cs typeface="Calibri" panose="020F0502020204030204" pitchFamily="34" charset="-120"/>
                         </a:rPr>
                         <a:t>observed</a:t>
                       </a:r>
                       <a:endParaRPr lang="en-US" sz="1200" dirty="0">
-                        <a:latin typeface="Calibri" charset="0"/>
-                        <a:ea typeface="Calibri" charset="0"/>
-                        <a:cs typeface="Calibri" charset="0"/>
+                        <a:latin typeface="Calibri" panose="020F0502020204030204" pitchFamily="34" charset="0"/>
+                        <a:ea typeface="Calibri" panose="020F0502020204030204" pitchFamily="34" charset="0"/>
+                        <a:cs typeface="Calibri" panose="020F0502020204030204" pitchFamily="34" charset="0"/>
                       </a:endParaRPr>
                     </a:p>
                   </a:txBody>
-                  <a:tcPr marL="91440" marR="91440" marT="45720" marB="45720" anchor="ctr">
+                  <a:tcPr anchor="ctr">
                     <a:lnL w="12700" cap="flat" cmpd="sng" algn="ctr">
                       <a:solidFill>
                         <a:srgbClr val="E2E8F0"/>
@@ -6705,7 +10511,7 @@
                     <a:bodyPr/>
                     <a:lstStyle/>
                     <a:p>
-                      <a:pPr indent="0" marL="0">
+                      <a:pPr marL="0" indent="0">
                         <a:buNone/>
                       </a:pPr>
                       <a:r>
@@ -6713,20 +10519,20 @@
                           <a:solidFill>
                             <a:srgbClr val="334155"/>
                           </a:solidFill>
-                          <a:latin typeface="Calibri" pitchFamily="34" charset="0"/>
-                          <a:ea typeface="Calibri" pitchFamily="34" charset="-122"/>
-                          <a:cs typeface="Calibri" pitchFamily="34" charset="-120"/>
+                          <a:latin typeface="Calibri" panose="020F0502020204030204" pitchFamily="34" charset="0"/>
+                          <a:ea typeface="Calibri" panose="020F0502020204030204" pitchFamily="34" charset="-122"/>
+                          <a:cs typeface="Calibri" panose="020F0502020204030204" pitchFamily="34" charset="-120"/>
                         </a:rPr>
                         <a:t>CV event off-tx</a:t>
                       </a:r>
                       <a:endParaRPr lang="en-US" sz="1200" dirty="0">
-                        <a:latin typeface="Calibri" charset="0"/>
-                        <a:ea typeface="Calibri" charset="0"/>
-                        <a:cs typeface="Calibri" charset="0"/>
+                        <a:latin typeface="Calibri" panose="020F0502020204030204" pitchFamily="34" charset="0"/>
+                        <a:ea typeface="Calibri" panose="020F0502020204030204" pitchFamily="34" charset="0"/>
+                        <a:cs typeface="Calibri" panose="020F0502020204030204" pitchFamily="34" charset="0"/>
                       </a:endParaRPr>
                     </a:p>
                   </a:txBody>
-                  <a:tcPr marL="91440" marR="91440" marT="45720" marB="45720" anchor="ctr">
+                  <a:tcPr anchor="ctr">
                     <a:lnL w="12700" cap="flat" cmpd="sng" algn="ctr">
                       <a:solidFill>
                         <a:srgbClr val="E2E8F0"/>
@@ -6770,7 +10576,7 @@
                     <a:bodyPr/>
                     <a:lstStyle/>
                     <a:p>
-                      <a:pPr indent="0" marL="0">
+                      <a:pPr marL="0" indent="0">
                         <a:buNone/>
                       </a:pPr>
                       <a:r>
@@ -6778,20 +10584,20 @@
                           <a:solidFill>
                             <a:srgbClr val="DC2626"/>
                           </a:solidFill>
-                          <a:latin typeface="Calibri" pitchFamily="34" charset="0"/>
-                          <a:ea typeface="Calibri" pitchFamily="34" charset="-122"/>
-                          <a:cs typeface="Calibri" pitchFamily="34" charset="-120"/>
+                          <a:latin typeface="Calibri" panose="020F0502020204030204" pitchFamily="34" charset="0"/>
+                          <a:ea typeface="Calibri" panose="020F0502020204030204" pitchFamily="34" charset="-122"/>
+                          <a:cs typeface="Calibri" panose="020F0502020204030204" pitchFamily="34" charset="-120"/>
                         </a:rPr>
                         <a:t>Donor</a:t>
                       </a:r>
                       <a:endParaRPr lang="en-US" sz="1200" dirty="0">
-                        <a:latin typeface="Calibri" charset="0"/>
-                        <a:ea typeface="Calibri" charset="0"/>
-                        <a:cs typeface="Calibri" charset="0"/>
+                        <a:latin typeface="Calibri" panose="020F0502020204030204" pitchFamily="34" charset="0"/>
+                        <a:ea typeface="Calibri" panose="020F0502020204030204" pitchFamily="34" charset="0"/>
+                        <a:cs typeface="Calibri" panose="020F0502020204030204" pitchFamily="34" charset="0"/>
                       </a:endParaRPr>
                     </a:p>
                   </a:txBody>
-                  <a:tcPr marL="91440" marR="91440" marT="45720" marB="45720" anchor="ctr">
+                  <a:tcPr anchor="ctr">
                     <a:lnL w="12700" cap="flat" cmpd="sng" algn="ctr">
                       <a:solidFill>
                         <a:srgbClr val="E2E8F0"/>
@@ -6837,7 +10643,7 @@
                     <a:bodyPr/>
                     <a:lstStyle/>
                     <a:p>
-                      <a:pPr indent="0" marL="0">
+                      <a:pPr marL="0" indent="0">
                         <a:buNone/>
                       </a:pPr>
                       <a:r>
@@ -6845,20 +10651,20 @@
                           <a:solidFill>
                             <a:srgbClr val="334155"/>
                           </a:solidFill>
-                          <a:latin typeface="Calibri" pitchFamily="34" charset="0"/>
-                          <a:ea typeface="Calibri" pitchFamily="34" charset="-122"/>
-                          <a:cs typeface="Calibri" pitchFamily="34" charset="-120"/>
+                          <a:latin typeface="Calibri" panose="020F0502020204030204" pitchFamily="34" charset="0"/>
+                          <a:ea typeface="Calibri" panose="020F0502020204030204" pitchFamily="34" charset="-122"/>
+                          <a:cs typeface="Calibri" panose="020F0502020204030204" pitchFamily="34" charset="-120"/>
                         </a:rPr>
                         <a:t>P3</a:t>
                       </a:r>
                       <a:endParaRPr lang="en-US" sz="1200" dirty="0">
-                        <a:latin typeface="Calibri" charset="0"/>
-                        <a:ea typeface="Calibri" charset="0"/>
-                        <a:cs typeface="Calibri" charset="0"/>
+                        <a:latin typeface="Calibri" panose="020F0502020204030204" pitchFamily="34" charset="0"/>
+                        <a:ea typeface="Calibri" panose="020F0502020204030204" pitchFamily="34" charset="0"/>
+                        <a:cs typeface="Calibri" panose="020F0502020204030204" pitchFamily="34" charset="0"/>
                       </a:endParaRPr>
                     </a:p>
                   </a:txBody>
-                  <a:tcPr marL="91440" marR="91440" marT="45720" marB="45720" anchor="ctr">
+                  <a:tcPr anchor="ctr">
                     <a:lnL w="12700" cap="flat" cmpd="sng" algn="ctr">
                       <a:solidFill>
                         <a:srgbClr val="E2E8F0"/>
@@ -6902,7 +10708,7 @@
                     <a:bodyPr/>
                     <a:lstStyle/>
                     <a:p>
-                      <a:pPr indent="0" marL="0">
+                      <a:pPr marL="0" indent="0">
                         <a:buNone/>
                       </a:pPr>
                       <a:r>
@@ -6910,20 +10716,20 @@
                           <a:solidFill>
                             <a:srgbClr val="334155"/>
                           </a:solidFill>
-                          <a:latin typeface="Calibri" pitchFamily="34" charset="0"/>
-                          <a:ea typeface="Calibri" pitchFamily="34" charset="-122"/>
-                          <a:cs typeface="Calibri" pitchFamily="34" charset="-120"/>
+                          <a:latin typeface="Calibri" panose="020F0502020204030204" pitchFamily="34" charset="0"/>
+                          <a:ea typeface="Calibri" panose="020F0502020204030204" pitchFamily="34" charset="-122"/>
+                          <a:cs typeface="Calibri" panose="020F0502020204030204" pitchFamily="34" charset="-120"/>
                         </a:rPr>
                         <a:t>yes</a:t>
                       </a:r>
                       <a:endParaRPr lang="en-US" sz="1200" dirty="0">
-                        <a:latin typeface="Calibri" charset="0"/>
-                        <a:ea typeface="Calibri" charset="0"/>
-                        <a:cs typeface="Calibri" charset="0"/>
+                        <a:latin typeface="Calibri" panose="020F0502020204030204" pitchFamily="34" charset="0"/>
+                        <a:ea typeface="Calibri" panose="020F0502020204030204" pitchFamily="34" charset="0"/>
+                        <a:cs typeface="Calibri" panose="020F0502020204030204" pitchFamily="34" charset="0"/>
                       </a:endParaRPr>
                     </a:p>
                   </a:txBody>
-                  <a:tcPr marL="91440" marR="91440" marT="45720" marB="45720" anchor="ctr">
+                  <a:tcPr anchor="ctr">
                     <a:lnL w="12700" cap="flat" cmpd="sng" algn="ctr">
                       <a:solidFill>
                         <a:srgbClr val="E2E8F0"/>
@@ -6967,7 +10773,7 @@
                     <a:bodyPr/>
                     <a:lstStyle/>
                     <a:p>
-                      <a:pPr indent="0" marL="0">
+                      <a:pPr marL="0" indent="0">
                         <a:buNone/>
                       </a:pPr>
                       <a:r>
@@ -6975,20 +10781,20 @@
                           <a:solidFill>
                             <a:srgbClr val="334155"/>
                           </a:solidFill>
-                          <a:latin typeface="Calibri" pitchFamily="34" charset="0"/>
-                          <a:ea typeface="Calibri" pitchFamily="34" charset="-122"/>
-                          <a:cs typeface="Calibri" pitchFamily="34" charset="-120"/>
+                          <a:latin typeface="Calibri" panose="020F0502020204030204" pitchFamily="34" charset="0"/>
+                          <a:ea typeface="Calibri" panose="020F0502020204030204" pitchFamily="34" charset="-122"/>
+                          <a:cs typeface="Calibri" panose="020F0502020204030204" pitchFamily="34" charset="-120"/>
                         </a:rPr>
                         <a:t>—</a:t>
                       </a:r>
                       <a:endParaRPr lang="en-US" sz="1200" dirty="0">
-                        <a:latin typeface="Calibri" charset="0"/>
-                        <a:ea typeface="Calibri" charset="0"/>
-                        <a:cs typeface="Calibri" charset="0"/>
+                        <a:latin typeface="Calibri" panose="020F0502020204030204" pitchFamily="34" charset="0"/>
+                        <a:ea typeface="Calibri" panose="020F0502020204030204" pitchFamily="34" charset="0"/>
+                        <a:cs typeface="Calibri" panose="020F0502020204030204" pitchFamily="34" charset="0"/>
                       </a:endParaRPr>
                     </a:p>
                   </a:txBody>
-                  <a:tcPr marL="91440" marR="91440" marT="45720" marB="45720" anchor="ctr">
+                  <a:tcPr anchor="ctr">
                     <a:lnL w="12700" cap="flat" cmpd="sng" algn="ctr">
                       <a:solidFill>
                         <a:srgbClr val="E2E8F0"/>
@@ -7032,7 +10838,7 @@
                     <a:bodyPr/>
                     <a:lstStyle/>
                     <a:p>
-                      <a:pPr indent="0" marL="0">
+                      <a:pPr marL="0" indent="0">
                         <a:buNone/>
                       </a:pPr>
                       <a:r>
@@ -7040,20 +10846,20 @@
                           <a:solidFill>
                             <a:srgbClr val="334155"/>
                           </a:solidFill>
-                          <a:latin typeface="Calibri" pitchFamily="34" charset="0"/>
-                          <a:ea typeface="Calibri" pitchFamily="34" charset="-122"/>
-                          <a:cs typeface="Calibri" pitchFamily="34" charset="-120"/>
+                          <a:latin typeface="Calibri" panose="020F0502020204030204" pitchFamily="34" charset="0"/>
+                          <a:ea typeface="Calibri" panose="020F0502020204030204" pitchFamily="34" charset="-122"/>
+                          <a:cs typeface="Calibri" panose="020F0502020204030204" pitchFamily="34" charset="-120"/>
                         </a:rPr>
                         <a:t>censored at EOS</a:t>
                       </a:r>
                       <a:endParaRPr lang="en-US" sz="1200" dirty="0">
-                        <a:latin typeface="Calibri" charset="0"/>
-                        <a:ea typeface="Calibri" charset="0"/>
-                        <a:cs typeface="Calibri" charset="0"/>
+                        <a:latin typeface="Calibri" panose="020F0502020204030204" pitchFamily="34" charset="0"/>
+                        <a:ea typeface="Calibri" panose="020F0502020204030204" pitchFamily="34" charset="0"/>
+                        <a:cs typeface="Calibri" panose="020F0502020204030204" pitchFamily="34" charset="0"/>
                       </a:endParaRPr>
                     </a:p>
                   </a:txBody>
-                  <a:tcPr marL="91440" marR="91440" marT="45720" marB="45720" anchor="ctr">
+                  <a:tcPr anchor="ctr">
                     <a:lnL w="12700" cap="flat" cmpd="sng" algn="ctr">
                       <a:solidFill>
                         <a:srgbClr val="E2E8F0"/>
@@ -7097,7 +10903,7 @@
                     <a:bodyPr/>
                     <a:lstStyle/>
                     <a:p>
-                      <a:pPr indent="0" marL="0">
+                      <a:pPr marL="0" indent="0">
                         <a:buNone/>
                       </a:pPr>
                       <a:r>
@@ -7105,20 +10911,20 @@
                           <a:solidFill>
                             <a:srgbClr val="64748B"/>
                           </a:solidFill>
-                          <a:latin typeface="Calibri" pitchFamily="34" charset="0"/>
-                          <a:ea typeface="Calibri" pitchFamily="34" charset="-122"/>
-                          <a:cs typeface="Calibri" pitchFamily="34" charset="-120"/>
+                          <a:latin typeface="Calibri" panose="020F0502020204030204" pitchFamily="34" charset="0"/>
+                          <a:ea typeface="Calibri" panose="020F0502020204030204" pitchFamily="34" charset="-122"/>
+                          <a:cs typeface="Calibri" panose="020F0502020204030204" pitchFamily="34" charset="-120"/>
                         </a:rPr>
                         <a:t>—</a:t>
                       </a:r>
                       <a:endParaRPr lang="en-US" sz="1200" dirty="0">
-                        <a:latin typeface="Calibri" charset="0"/>
-                        <a:ea typeface="Calibri" charset="0"/>
-                        <a:cs typeface="Calibri" charset="0"/>
+                        <a:latin typeface="Calibri" panose="020F0502020204030204" pitchFamily="34" charset="0"/>
+                        <a:ea typeface="Calibri" panose="020F0502020204030204" pitchFamily="34" charset="0"/>
+                        <a:cs typeface="Calibri" panose="020F0502020204030204" pitchFamily="34" charset="0"/>
                       </a:endParaRPr>
                     </a:p>
                   </a:txBody>
-                  <a:tcPr marL="91440" marR="91440" marT="45720" marB="45720" anchor="ctr">
+                  <a:tcPr anchor="ctr">
                     <a:lnL w="12700" cap="flat" cmpd="sng" algn="ctr">
                       <a:solidFill>
                         <a:srgbClr val="E2E8F0"/>
@@ -7164,7 +10970,7 @@
                     <a:bodyPr/>
                     <a:lstStyle/>
                     <a:p>
-                      <a:pPr indent="0" marL="0">
+                      <a:pPr marL="0" indent="0">
                         <a:buNone/>
                       </a:pPr>
                       <a:r>
@@ -7172,20 +10978,20 @@
                           <a:solidFill>
                             <a:srgbClr val="334155"/>
                           </a:solidFill>
-                          <a:latin typeface="Calibri" pitchFamily="34" charset="0"/>
-                          <a:ea typeface="Calibri" pitchFamily="34" charset="-122"/>
-                          <a:cs typeface="Calibri" pitchFamily="34" charset="-120"/>
+                          <a:latin typeface="Calibri" panose="020F0502020204030204" pitchFamily="34" charset="0"/>
+                          <a:ea typeface="Calibri" panose="020F0502020204030204" pitchFamily="34" charset="-122"/>
+                          <a:cs typeface="Calibri" panose="020F0502020204030204" pitchFamily="34" charset="-120"/>
                         </a:rPr>
                         <a:t>P4</a:t>
                       </a:r>
                       <a:endParaRPr lang="en-US" sz="1200" dirty="0">
-                        <a:latin typeface="Calibri" charset="0"/>
-                        <a:ea typeface="Calibri" charset="0"/>
-                        <a:cs typeface="Calibri" charset="0"/>
+                        <a:latin typeface="Calibri" panose="020F0502020204030204" pitchFamily="34" charset="0"/>
+                        <a:ea typeface="Calibri" panose="020F0502020204030204" pitchFamily="34" charset="0"/>
+                        <a:cs typeface="Calibri" panose="020F0502020204030204" pitchFamily="34" charset="0"/>
                       </a:endParaRPr>
                     </a:p>
                   </a:txBody>
-                  <a:tcPr marL="91440" marR="91440" marT="45720" marB="45720" anchor="ctr">
+                  <a:tcPr anchor="ctr">
                     <a:lnL w="12700" cap="flat" cmpd="sng" algn="ctr">
                       <a:solidFill>
                         <a:srgbClr val="E2E8F0"/>
@@ -7229,7 +11035,7 @@
                     <a:bodyPr/>
                     <a:lstStyle/>
                     <a:p>
-                      <a:pPr indent="0" marL="0">
+                      <a:pPr marL="0" indent="0">
                         <a:buNone/>
                       </a:pPr>
                       <a:r>
@@ -7237,20 +11043,20 @@
                           <a:solidFill>
                             <a:srgbClr val="334155"/>
                           </a:solidFill>
-                          <a:latin typeface="Calibri" pitchFamily="34" charset="0"/>
-                          <a:ea typeface="Calibri" pitchFamily="34" charset="-122"/>
-                          <a:cs typeface="Calibri" pitchFamily="34" charset="-120"/>
+                          <a:latin typeface="Calibri" panose="020F0502020204030204" pitchFamily="34" charset="0"/>
+                          <a:ea typeface="Calibri" panose="020F0502020204030204" pitchFamily="34" charset="-122"/>
+                          <a:cs typeface="Calibri" panose="020F0502020204030204" pitchFamily="34" charset="-120"/>
                         </a:rPr>
                         <a:t>yes</a:t>
                       </a:r>
                       <a:endParaRPr lang="en-US" sz="1200" dirty="0">
-                        <a:latin typeface="Calibri" charset="0"/>
-                        <a:ea typeface="Calibri" charset="0"/>
-                        <a:cs typeface="Calibri" charset="0"/>
+                        <a:latin typeface="Calibri" panose="020F0502020204030204" pitchFamily="34" charset="0"/>
+                        <a:ea typeface="Calibri" panose="020F0502020204030204" pitchFamily="34" charset="0"/>
+                        <a:cs typeface="Calibri" panose="020F0502020204030204" pitchFamily="34" charset="0"/>
                       </a:endParaRPr>
                     </a:p>
                   </a:txBody>
-                  <a:tcPr marL="91440" marR="91440" marT="45720" marB="45720" anchor="ctr">
+                  <a:tcPr anchor="ctr">
                     <a:lnL w="12700" cap="flat" cmpd="sng" algn="ctr">
                       <a:solidFill>
                         <a:srgbClr val="E2E8F0"/>
@@ -7294,7 +11100,7 @@
                     <a:bodyPr/>
                     <a:lstStyle/>
                     <a:p>
-                      <a:pPr indent="0" marL="0">
+                      <a:pPr marL="0" indent="0">
                         <a:buNone/>
                       </a:pPr>
                       <a:r>
@@ -7302,20 +11108,20 @@
                           <a:solidFill>
                             <a:srgbClr val="334155"/>
                           </a:solidFill>
-                          <a:latin typeface="Calibri" pitchFamily="34" charset="0"/>
-                          <a:ea typeface="Calibri" pitchFamily="34" charset="-122"/>
-                          <a:cs typeface="Calibri" pitchFamily="34" charset="-120"/>
+                          <a:latin typeface="Calibri" panose="020F0502020204030204" pitchFamily="34" charset="0"/>
+                          <a:ea typeface="Calibri" panose="020F0502020204030204" pitchFamily="34" charset="-122"/>
+                          <a:cs typeface="Calibri" panose="020F0502020204030204" pitchFamily="34" charset="-120"/>
                         </a:rPr>
                         <a:t>observed</a:t>
                       </a:r>
                       <a:endParaRPr lang="en-US" sz="1200" dirty="0">
-                        <a:latin typeface="Calibri" charset="0"/>
-                        <a:ea typeface="Calibri" charset="0"/>
-                        <a:cs typeface="Calibri" charset="0"/>
+                        <a:latin typeface="Calibri" panose="020F0502020204030204" pitchFamily="34" charset="0"/>
+                        <a:ea typeface="Calibri" panose="020F0502020204030204" pitchFamily="34" charset="0"/>
+                        <a:cs typeface="Calibri" panose="020F0502020204030204" pitchFamily="34" charset="0"/>
                       </a:endParaRPr>
                     </a:p>
                   </a:txBody>
-                  <a:tcPr marL="91440" marR="91440" marT="45720" marB="45720" anchor="ctr">
+                  <a:tcPr anchor="ctr">
                     <a:lnL w="12700" cap="flat" cmpd="sng" algn="ctr">
                       <a:solidFill>
                         <a:srgbClr val="E2E8F0"/>
@@ -7359,7 +11165,7 @@
                     <a:bodyPr/>
                     <a:lstStyle/>
                     <a:p>
-                      <a:pPr indent="0" marL="0">
+                      <a:pPr marL="0" indent="0">
                         <a:buNone/>
                       </a:pPr>
                       <a:r>
@@ -7367,20 +11173,20 @@
                           <a:solidFill>
                             <a:srgbClr val="334155"/>
                           </a:solidFill>
-                          <a:latin typeface="Calibri" pitchFamily="34" charset="0"/>
-                          <a:ea typeface="Calibri" pitchFamily="34" charset="-122"/>
-                          <a:cs typeface="Calibri" pitchFamily="34" charset="-120"/>
+                          <a:latin typeface="Calibri" panose="020F0502020204030204" pitchFamily="34" charset="0"/>
+                          <a:ea typeface="Calibri" panose="020F0502020204030204" pitchFamily="34" charset="-122"/>
+                          <a:cs typeface="Calibri" panose="020F0502020204030204" pitchFamily="34" charset="-120"/>
                         </a:rPr>
                         <a:t>censored at EOS</a:t>
                       </a:r>
                       <a:endParaRPr lang="en-US" sz="1200" dirty="0">
-                        <a:latin typeface="Calibri" charset="0"/>
-                        <a:ea typeface="Calibri" charset="0"/>
-                        <a:cs typeface="Calibri" charset="0"/>
+                        <a:latin typeface="Calibri" panose="020F0502020204030204" pitchFamily="34" charset="0"/>
+                        <a:ea typeface="Calibri" panose="020F0502020204030204" pitchFamily="34" charset="0"/>
+                        <a:cs typeface="Calibri" panose="020F0502020204030204" pitchFamily="34" charset="0"/>
                       </a:endParaRPr>
                     </a:p>
                   </a:txBody>
-                  <a:tcPr marL="91440" marR="91440" marT="45720" marB="45720" anchor="ctr">
+                  <a:tcPr anchor="ctr">
                     <a:lnL w="12700" cap="flat" cmpd="sng" algn="ctr">
                       <a:solidFill>
                         <a:srgbClr val="E2E8F0"/>
@@ -7424,7 +11230,7 @@
                     <a:bodyPr/>
                     <a:lstStyle/>
                     <a:p>
-                      <a:pPr indent="0" marL="0">
+                      <a:pPr marL="0" indent="0">
                         <a:buNone/>
                       </a:pPr>
                       <a:r>
@@ -7432,20 +11238,20 @@
                           <a:solidFill>
                             <a:srgbClr val="DC2626"/>
                           </a:solidFill>
-                          <a:latin typeface="Calibri" pitchFamily="34" charset="0"/>
-                          <a:ea typeface="Calibri" pitchFamily="34" charset="-122"/>
-                          <a:cs typeface="Calibri" pitchFamily="34" charset="-120"/>
+                          <a:latin typeface="Calibri" panose="020F0502020204030204" pitchFamily="34" charset="0"/>
+                          <a:ea typeface="Calibri" panose="020F0502020204030204" pitchFamily="34" charset="-122"/>
+                          <a:cs typeface="Calibri" panose="020F0502020204030204" pitchFamily="34" charset="-120"/>
                         </a:rPr>
                         <a:t>Donor</a:t>
                       </a:r>
                       <a:endParaRPr lang="en-US" sz="1200" dirty="0">
-                        <a:latin typeface="Calibri" charset="0"/>
-                        <a:ea typeface="Calibri" charset="0"/>
-                        <a:cs typeface="Calibri" charset="0"/>
+                        <a:latin typeface="Calibri" panose="020F0502020204030204" pitchFamily="34" charset="0"/>
+                        <a:ea typeface="Calibri" panose="020F0502020204030204" pitchFamily="34" charset="0"/>
+                        <a:cs typeface="Calibri" panose="020F0502020204030204" pitchFamily="34" charset="0"/>
                       </a:endParaRPr>
                     </a:p>
                   </a:txBody>
-                  <a:tcPr marL="91440" marR="91440" marT="45720" marB="45720" anchor="ctr">
+                  <a:tcPr anchor="ctr">
                     <a:lnL w="12700" cap="flat" cmpd="sng" algn="ctr">
                       <a:solidFill>
                         <a:srgbClr val="E2E8F0"/>
@@ -7491,7 +11297,7 @@
                     <a:bodyPr/>
                     <a:lstStyle/>
                     <a:p>
-                      <a:pPr indent="0" marL="0">
+                      <a:pPr marL="0" indent="0">
                         <a:buNone/>
                       </a:pPr>
                       <a:r>
@@ -7499,20 +11305,20 @@
                           <a:solidFill>
                             <a:srgbClr val="334155"/>
                           </a:solidFill>
-                          <a:latin typeface="Calibri" pitchFamily="34" charset="0"/>
-                          <a:ea typeface="Calibri" pitchFamily="34" charset="-122"/>
-                          <a:cs typeface="Calibri" pitchFamily="34" charset="-120"/>
+                          <a:latin typeface="Calibri" panose="020F0502020204030204" pitchFamily="34" charset="0"/>
+                          <a:ea typeface="Calibri" panose="020F0502020204030204" pitchFamily="34" charset="-122"/>
+                          <a:cs typeface="Calibri" panose="020F0502020204030204" pitchFamily="34" charset="-120"/>
                         </a:rPr>
                         <a:t>P5</a:t>
                       </a:r>
                       <a:endParaRPr lang="en-US" sz="1200" dirty="0">
-                        <a:latin typeface="Calibri" charset="0"/>
-                        <a:ea typeface="Calibri" charset="0"/>
-                        <a:cs typeface="Calibri" charset="0"/>
+                        <a:latin typeface="Calibri" panose="020F0502020204030204" pitchFamily="34" charset="0"/>
+                        <a:ea typeface="Calibri" panose="020F0502020204030204" pitchFamily="34" charset="0"/>
+                        <a:cs typeface="Calibri" panose="020F0502020204030204" pitchFamily="34" charset="0"/>
                       </a:endParaRPr>
                     </a:p>
                   </a:txBody>
-                  <a:tcPr marL="91440" marR="91440" marT="45720" marB="45720" anchor="ctr">
+                  <a:tcPr anchor="ctr">
                     <a:lnL w="12700" cap="flat" cmpd="sng" algn="ctr">
                       <a:solidFill>
                         <a:srgbClr val="E2E8F0"/>
@@ -7556,7 +11362,7 @@
                     <a:bodyPr/>
                     <a:lstStyle/>
                     <a:p>
-                      <a:pPr indent="0" marL="0">
+                      <a:pPr marL="0" indent="0">
                         <a:buNone/>
                       </a:pPr>
                       <a:r>
@@ -7564,20 +11370,20 @@
                           <a:solidFill>
                             <a:srgbClr val="334155"/>
                           </a:solidFill>
-                          <a:latin typeface="Calibri" pitchFamily="34" charset="0"/>
-                          <a:ea typeface="Calibri" pitchFamily="34" charset="-122"/>
-                          <a:cs typeface="Calibri" pitchFamily="34" charset="-120"/>
+                          <a:latin typeface="Calibri" panose="020F0502020204030204" pitchFamily="34" charset="0"/>
+                          <a:ea typeface="Calibri" panose="020F0502020204030204" pitchFamily="34" charset="-122"/>
+                          <a:cs typeface="Calibri" panose="020F0502020204030204" pitchFamily="34" charset="-120"/>
                         </a:rPr>
                         <a:t>offipday = 0</a:t>
                       </a:r>
                       <a:endParaRPr lang="en-US" sz="1200" dirty="0">
-                        <a:latin typeface="Calibri" charset="0"/>
-                        <a:ea typeface="Calibri" charset="0"/>
-                        <a:cs typeface="Calibri" charset="0"/>
+                        <a:latin typeface="Calibri" panose="020F0502020204030204" pitchFamily="34" charset="0"/>
+                        <a:ea typeface="Calibri" panose="020F0502020204030204" pitchFamily="34" charset="0"/>
+                        <a:cs typeface="Calibri" panose="020F0502020204030204" pitchFamily="34" charset="0"/>
                       </a:endParaRPr>
                     </a:p>
                   </a:txBody>
-                  <a:tcPr marL="91440" marR="91440" marT="45720" marB="45720" anchor="ctr">
+                  <a:tcPr anchor="ctr">
                     <a:lnL w="12700" cap="flat" cmpd="sng" algn="ctr">
                       <a:solidFill>
                         <a:srgbClr val="E2E8F0"/>
@@ -7621,7 +11427,7 @@
                     <a:bodyPr/>
                     <a:lstStyle/>
                     <a:p>
-                      <a:pPr indent="0" marL="0">
+                      <a:pPr marL="0" indent="0">
                         <a:buNone/>
                       </a:pPr>
                       <a:r>
@@ -7629,20 +11435,20 @@
                           <a:solidFill>
                             <a:srgbClr val="334155"/>
                           </a:solidFill>
-                          <a:latin typeface="Calibri" pitchFamily="34" charset="0"/>
-                          <a:ea typeface="Calibri" pitchFamily="34" charset="-122"/>
-                          <a:cs typeface="Calibri" pitchFamily="34" charset="-120"/>
+                          <a:latin typeface="Calibri" panose="020F0502020204030204" pitchFamily="34" charset="0"/>
+                          <a:ea typeface="Calibri" panose="020F0502020204030204" pitchFamily="34" charset="-122"/>
+                          <a:cs typeface="Calibri" panose="020F0502020204030204" pitchFamily="34" charset="-120"/>
                         </a:rPr>
                         <a:t>none</a:t>
                       </a:r>
                       <a:endParaRPr lang="en-US" sz="1200" dirty="0">
-                        <a:latin typeface="Calibri" charset="0"/>
-                        <a:ea typeface="Calibri" charset="0"/>
-                        <a:cs typeface="Calibri" charset="0"/>
+                        <a:latin typeface="Calibri" panose="020F0502020204030204" pitchFamily="34" charset="0"/>
+                        <a:ea typeface="Calibri" panose="020F0502020204030204" pitchFamily="34" charset="0"/>
+                        <a:cs typeface="Calibri" panose="020F0502020204030204" pitchFamily="34" charset="0"/>
                       </a:endParaRPr>
                     </a:p>
                   </a:txBody>
-                  <a:tcPr marL="91440" marR="91440" marT="45720" marB="45720" anchor="ctr">
+                  <a:tcPr anchor="ctr">
                     <a:lnL w="12700" cap="flat" cmpd="sng" algn="ctr">
                       <a:solidFill>
                         <a:srgbClr val="E2E8F0"/>
@@ -7686,7 +11492,7 @@
                     <a:bodyPr/>
                     <a:lstStyle/>
                     <a:p>
-                      <a:pPr indent="0" marL="0">
+                      <a:pPr marL="0" indent="0">
                         <a:buNone/>
                       </a:pPr>
                       <a:r>
@@ -7694,20 +11500,20 @@
                           <a:solidFill>
                             <a:srgbClr val="334155"/>
                           </a:solidFill>
-                          <a:latin typeface="Calibri" pitchFamily="34" charset="0"/>
-                          <a:ea typeface="Calibri" pitchFamily="34" charset="-122"/>
-                          <a:cs typeface="Calibri" pitchFamily="34" charset="-120"/>
+                          <a:latin typeface="Calibri" panose="020F0502020204030204" pitchFamily="34" charset="0"/>
+                          <a:ea typeface="Calibri" panose="020F0502020204030204" pitchFamily="34" charset="-122"/>
+                          <a:cs typeface="Calibri" panose="020F0502020204030204" pitchFamily="34" charset="-120"/>
                         </a:rPr>
                         <a:t>no follow-up</a:t>
                       </a:r>
                       <a:endParaRPr lang="en-US" sz="1200" dirty="0">
-                        <a:latin typeface="Calibri" charset="0"/>
-                        <a:ea typeface="Calibri" charset="0"/>
-                        <a:cs typeface="Calibri" charset="0"/>
+                        <a:latin typeface="Calibri" panose="020F0502020204030204" pitchFamily="34" charset="0"/>
+                        <a:ea typeface="Calibri" panose="020F0502020204030204" pitchFamily="34" charset="0"/>
+                        <a:cs typeface="Calibri" panose="020F0502020204030204" pitchFamily="34" charset="0"/>
                       </a:endParaRPr>
                     </a:p>
                   </a:txBody>
-                  <a:tcPr marL="91440" marR="91440" marT="45720" marB="45720" anchor="ctr">
+                  <a:tcPr anchor="ctr">
                     <a:lnL w="12700" cap="flat" cmpd="sng" algn="ctr">
                       <a:solidFill>
                         <a:srgbClr val="E2E8F0"/>
@@ -7751,7 +11557,7 @@
                     <a:bodyPr/>
                     <a:lstStyle/>
                     <a:p>
-                      <a:pPr indent="0" marL="0">
+                      <a:pPr marL="0" indent="0">
                         <a:buNone/>
                       </a:pPr>
                       <a:r>
@@ -7759,20 +11565,20 @@
                           <a:solidFill>
                             <a:srgbClr val="D97706"/>
                           </a:solidFill>
-                          <a:latin typeface="Calibri" pitchFamily="34" charset="0"/>
-                          <a:ea typeface="Calibri" pitchFamily="34" charset="-122"/>
-                          <a:cs typeface="Calibri" pitchFamily="34" charset="-120"/>
+                          <a:latin typeface="Calibri" panose="020F0502020204030204" pitchFamily="34" charset="0"/>
+                          <a:ea typeface="Calibri" panose="020F0502020204030204" pitchFamily="34" charset="-122"/>
+                          <a:cs typeface="Calibri" panose="020F0502020204030204" pitchFamily="34" charset="-120"/>
                         </a:rPr>
                         <a:t>Recipient</a:t>
                       </a:r>
                       <a:endParaRPr lang="en-US" sz="1200" dirty="0">
-                        <a:latin typeface="Calibri" charset="0"/>
-                        <a:ea typeface="Calibri" charset="0"/>
-                        <a:cs typeface="Calibri" charset="0"/>
+                        <a:latin typeface="Calibri" panose="020F0502020204030204" pitchFamily="34" charset="0"/>
+                        <a:ea typeface="Calibri" panose="020F0502020204030204" pitchFamily="34" charset="0"/>
+                        <a:cs typeface="Calibri" panose="020F0502020204030204" pitchFamily="34" charset="0"/>
                       </a:endParaRPr>
                     </a:p>
                   </a:txBody>
-                  <a:tcPr marL="91440" marR="91440" marT="45720" marB="45720" anchor="ctr">
+                  <a:tcPr anchor="ctr">
                     <a:lnL w="12700" cap="flat" cmpd="sng" algn="ctr">
                       <a:solidFill>
                         <a:srgbClr val="E2E8F0"/>
@@ -7818,7 +11624,7 @@
                     <a:bodyPr/>
                     <a:lstStyle/>
                     <a:p>
-                      <a:pPr indent="0" marL="0">
+                      <a:pPr marL="0" indent="0">
                         <a:buNone/>
                       </a:pPr>
                       <a:r>
@@ -7826,20 +11632,20 @@
                           <a:solidFill>
                             <a:srgbClr val="334155"/>
                           </a:solidFill>
-                          <a:latin typeface="Calibri" pitchFamily="34" charset="0"/>
-                          <a:ea typeface="Calibri" pitchFamily="34" charset="-122"/>
-                          <a:cs typeface="Calibri" pitchFamily="34" charset="-120"/>
+                          <a:latin typeface="Calibri" panose="020F0502020204030204" pitchFamily="34" charset="0"/>
+                          <a:ea typeface="Calibri" panose="020F0502020204030204" pitchFamily="34" charset="-122"/>
+                          <a:cs typeface="Calibri" panose="020F0502020204030204" pitchFamily="34" charset="-120"/>
                         </a:rPr>
                         <a:t>P6</a:t>
                       </a:r>
                       <a:endParaRPr lang="en-US" sz="1200" dirty="0">
-                        <a:latin typeface="Calibri" charset="0"/>
-                        <a:ea typeface="Calibri" charset="0"/>
-                        <a:cs typeface="Calibri" charset="0"/>
+                        <a:latin typeface="Calibri" panose="020F0502020204030204" pitchFamily="34" charset="0"/>
+                        <a:ea typeface="Calibri" panose="020F0502020204030204" pitchFamily="34" charset="0"/>
+                        <a:cs typeface="Calibri" panose="020F0502020204030204" pitchFamily="34" charset="0"/>
                       </a:endParaRPr>
                     </a:p>
                   </a:txBody>
-                  <a:tcPr marL="91440" marR="91440" marT="45720" marB="45720" anchor="ctr">
+                  <a:tcPr anchor="ctr">
                     <a:lnL w="12700" cap="flat" cmpd="sng" algn="ctr">
                       <a:solidFill>
                         <a:srgbClr val="E2E8F0"/>
@@ -7883,7 +11689,7 @@
                     <a:bodyPr/>
                     <a:lstStyle/>
                     <a:p>
-                      <a:pPr indent="0" marL="0">
+                      <a:pPr marL="0" indent="0">
                         <a:buNone/>
                       </a:pPr>
                       <a:r>
@@ -7891,20 +11697,20 @@
                           <a:solidFill>
                             <a:srgbClr val="334155"/>
                           </a:solidFill>
-                          <a:latin typeface="Calibri" pitchFamily="34" charset="0"/>
-                          <a:ea typeface="Calibri" pitchFamily="34" charset="-122"/>
-                          <a:cs typeface="Calibri" pitchFamily="34" charset="-120"/>
+                          <a:latin typeface="Calibri" panose="020F0502020204030204" pitchFamily="34" charset="0"/>
+                          <a:ea typeface="Calibri" panose="020F0502020204030204" pitchFamily="34" charset="-122"/>
+                          <a:cs typeface="Calibri" panose="020F0502020204030204" pitchFamily="34" charset="-120"/>
                         </a:rPr>
                         <a:t>yes</a:t>
                       </a:r>
                       <a:endParaRPr lang="en-US" sz="1200" dirty="0">
-                        <a:latin typeface="Calibri" charset="0"/>
-                        <a:ea typeface="Calibri" charset="0"/>
-                        <a:cs typeface="Calibri" charset="0"/>
+                        <a:latin typeface="Calibri" panose="020F0502020204030204" pitchFamily="34" charset="0"/>
+                        <a:ea typeface="Calibri" panose="020F0502020204030204" pitchFamily="34" charset="0"/>
+                        <a:cs typeface="Calibri" panose="020F0502020204030204" pitchFamily="34" charset="0"/>
                       </a:endParaRPr>
                     </a:p>
                   </a:txBody>
-                  <a:tcPr marL="91440" marR="91440" marT="45720" marB="45720" anchor="ctr">
+                  <a:tcPr anchor="ctr">
                     <a:lnL w="12700" cap="flat" cmpd="sng" algn="ctr">
                       <a:solidFill>
                         <a:srgbClr val="E2E8F0"/>
@@ -7948,7 +11754,7 @@
                     <a:bodyPr/>
                     <a:lstStyle/>
                     <a:p>
-                      <a:pPr indent="0" marL="0">
+                      <a:pPr marL="0" indent="0">
                         <a:buNone/>
                       </a:pPr>
                       <a:r>
@@ -7956,20 +11762,20 @@
                           <a:solidFill>
                             <a:srgbClr val="334155"/>
                           </a:solidFill>
-                          <a:latin typeface="Calibri" pitchFamily="34" charset="0"/>
-                          <a:ea typeface="Calibri" pitchFamily="34" charset="-122"/>
-                          <a:cs typeface="Calibri" pitchFamily="34" charset="-120"/>
+                          <a:latin typeface="Calibri" panose="020F0502020204030204" pitchFamily="34" charset="0"/>
+                          <a:ea typeface="Calibri" panose="020F0502020204030204" pitchFamily="34" charset="-122"/>
+                          <a:cs typeface="Calibri" panose="020F0502020204030204" pitchFamily="34" charset="-120"/>
                         </a:rPr>
                         <a:t>partial, then dropout</a:t>
                       </a:r>
                       <a:endParaRPr lang="en-US" sz="1200" dirty="0">
-                        <a:latin typeface="Calibri" charset="0"/>
-                        <a:ea typeface="Calibri" charset="0"/>
-                        <a:cs typeface="Calibri" charset="0"/>
+                        <a:latin typeface="Calibri" panose="020F0502020204030204" pitchFamily="34" charset="0"/>
+                        <a:ea typeface="Calibri" panose="020F0502020204030204" pitchFamily="34" charset="0"/>
+                        <a:cs typeface="Calibri" panose="020F0502020204030204" pitchFamily="34" charset="0"/>
                       </a:endParaRPr>
                     </a:p>
                   </a:txBody>
-                  <a:tcPr marL="91440" marR="91440" marT="45720" marB="45720" anchor="ctr">
+                  <a:tcPr anchor="ctr">
                     <a:lnL w="12700" cap="flat" cmpd="sng" algn="ctr">
                       <a:solidFill>
                         <a:srgbClr val="E2E8F0"/>
@@ -8013,7 +11819,7 @@
                     <a:bodyPr/>
                     <a:lstStyle/>
                     <a:p>
-                      <a:pPr indent="0" marL="0">
+                      <a:pPr marL="0" indent="0">
                         <a:buNone/>
                       </a:pPr>
                       <a:r>
@@ -8021,20 +11827,20 @@
                           <a:solidFill>
                             <a:srgbClr val="334155"/>
                           </a:solidFill>
-                          <a:latin typeface="Calibri" pitchFamily="34" charset="0"/>
-                          <a:ea typeface="Calibri" pitchFamily="34" charset="-122"/>
-                          <a:cs typeface="Calibri" pitchFamily="34" charset="-120"/>
+                          <a:latin typeface="Calibri" panose="020F0502020204030204" pitchFamily="34" charset="0"/>
+                          <a:ea typeface="Calibri" panose="020F0502020204030204" pitchFamily="34" charset="-122"/>
+                          <a:cs typeface="Calibri" panose="020F0502020204030204" pitchFamily="34" charset="-120"/>
                         </a:rPr>
                         <a:t>unknown after dropout</a:t>
                       </a:r>
                       <a:endParaRPr lang="en-US" sz="1200" dirty="0">
-                        <a:latin typeface="Calibri" charset="0"/>
-                        <a:ea typeface="Calibri" charset="0"/>
-                        <a:cs typeface="Calibri" charset="0"/>
+                        <a:latin typeface="Calibri" panose="020F0502020204030204" pitchFamily="34" charset="0"/>
+                        <a:ea typeface="Calibri" panose="020F0502020204030204" pitchFamily="34" charset="0"/>
+                        <a:cs typeface="Calibri" panose="020F0502020204030204" pitchFamily="34" charset="0"/>
                       </a:endParaRPr>
                     </a:p>
                   </a:txBody>
-                  <a:tcPr marL="91440" marR="91440" marT="45720" marB="45720" anchor="ctr">
+                  <a:tcPr anchor="ctr">
                     <a:lnL w="12700" cap="flat" cmpd="sng" algn="ctr">
                       <a:solidFill>
                         <a:srgbClr val="E2E8F0"/>
@@ -8078,7 +11884,7 @@
                     <a:bodyPr/>
                     <a:lstStyle/>
                     <a:p>
-                      <a:pPr indent="0" marL="0">
+                      <a:pPr marL="0" indent="0">
                         <a:buNone/>
                       </a:pPr>
                       <a:r>
@@ -8086,20 +11892,20 @@
                           <a:solidFill>
                             <a:srgbClr val="7C3AED"/>
                           </a:solidFill>
-                          <a:latin typeface="Calibri" pitchFamily="34" charset="0"/>
-                          <a:ea typeface="Calibri" pitchFamily="34" charset="-122"/>
-                          <a:cs typeface="Calibri" pitchFamily="34" charset="-120"/>
+                          <a:latin typeface="Calibri" panose="020F0502020204030204" pitchFamily="34" charset="0"/>
+                          <a:ea typeface="Calibri" panose="020F0502020204030204" pitchFamily="34" charset="-122"/>
+                          <a:cs typeface="Calibri" panose="020F0502020204030204" pitchFamily="34" charset="-120"/>
                         </a:rPr>
                         <a:t>Donor + Recipient</a:t>
                       </a:r>
                       <a:endParaRPr lang="en-US" sz="1200" dirty="0">
-                        <a:latin typeface="Calibri" charset="0"/>
-                        <a:ea typeface="Calibri" charset="0"/>
-                        <a:cs typeface="Calibri" charset="0"/>
+                        <a:latin typeface="Calibri" panose="020F0502020204030204" pitchFamily="34" charset="0"/>
+                        <a:ea typeface="Calibri" panose="020F0502020204030204" pitchFamily="34" charset="0"/>
+                        <a:cs typeface="Calibri" panose="020F0502020204030204" pitchFamily="34" charset="0"/>
                       </a:endParaRPr>
                     </a:p>
                   </a:txBody>
-                  <a:tcPr marL="91440" marR="91440" marT="45720" marB="45720" anchor="ctr">
+                  <a:tcPr anchor="ctr">
                     <a:lnL w="12700" cap="flat" cmpd="sng" algn="ctr">
                       <a:solidFill>
                         <a:srgbClr val="E2E8F0"/>
@@ -8145,7 +11951,7 @@
                     <a:bodyPr/>
                     <a:lstStyle/>
                     <a:p>
-                      <a:pPr indent="0" marL="0">
+                      <a:pPr marL="0" indent="0">
                         <a:buNone/>
                       </a:pPr>
                       <a:r>
@@ -8153,20 +11959,20 @@
                           <a:solidFill>
                             <a:srgbClr val="334155"/>
                           </a:solidFill>
-                          <a:latin typeface="Calibri" pitchFamily="34" charset="0"/>
-                          <a:ea typeface="Calibri" pitchFamily="34" charset="-122"/>
-                          <a:cs typeface="Calibri" pitchFamily="34" charset="-120"/>
+                          <a:latin typeface="Calibri" panose="020F0502020204030204" pitchFamily="34" charset="0"/>
+                          <a:ea typeface="Calibri" panose="020F0502020204030204" pitchFamily="34" charset="-122"/>
+                          <a:cs typeface="Calibri" panose="020F0502020204030204" pitchFamily="34" charset="-120"/>
                         </a:rPr>
                         <a:t>P7</a:t>
                       </a:r>
                       <a:endParaRPr lang="en-US" sz="1200" dirty="0">
-                        <a:latin typeface="Calibri" charset="0"/>
-                        <a:ea typeface="Calibri" charset="0"/>
-                        <a:cs typeface="Calibri" charset="0"/>
+                        <a:latin typeface="Calibri" panose="020F0502020204030204" pitchFamily="34" charset="0"/>
+                        <a:ea typeface="Calibri" panose="020F0502020204030204" pitchFamily="34" charset="0"/>
+                        <a:cs typeface="Calibri" panose="020F0502020204030204" pitchFamily="34" charset="0"/>
                       </a:endParaRPr>
                     </a:p>
                   </a:txBody>
-                  <a:tcPr marL="91440" marR="91440" marT="45720" marB="45720" anchor="ctr">
+                  <a:tcPr anchor="ctr">
                     <a:lnL w="12700" cap="flat" cmpd="sng" algn="ctr">
                       <a:solidFill>
                         <a:srgbClr val="E2E8F0"/>
@@ -8210,7 +12016,7 @@
                     <a:bodyPr/>
                     <a:lstStyle/>
                     <a:p>
-                      <a:pPr indent="0" marL="0">
+                      <a:pPr marL="0" indent="0">
                         <a:buNone/>
                       </a:pPr>
                       <a:r>
@@ -8218,20 +12024,20 @@
                           <a:solidFill>
                             <a:srgbClr val="334155"/>
                           </a:solidFill>
-                          <a:latin typeface="Calibri" pitchFamily="34" charset="0"/>
-                          <a:ea typeface="Calibri" pitchFamily="34" charset="-122"/>
-                          <a:cs typeface="Calibri" pitchFamily="34" charset="-120"/>
+                          <a:latin typeface="Calibri" panose="020F0502020204030204" pitchFamily="34" charset="0"/>
+                          <a:ea typeface="Calibri" panose="020F0502020204030204" pitchFamily="34" charset="-122"/>
+                          <a:cs typeface="Calibri" panose="020F0502020204030204" pitchFamily="34" charset="-120"/>
                         </a:rPr>
                         <a:t>yes</a:t>
                       </a:r>
                       <a:endParaRPr lang="en-US" sz="1200" dirty="0">
-                        <a:latin typeface="Calibri" charset="0"/>
-                        <a:ea typeface="Calibri" charset="0"/>
-                        <a:cs typeface="Calibri" charset="0"/>
+                        <a:latin typeface="Calibri" panose="020F0502020204030204" pitchFamily="34" charset="0"/>
+                        <a:ea typeface="Calibri" panose="020F0502020204030204" pitchFamily="34" charset="0"/>
+                        <a:cs typeface="Calibri" panose="020F0502020204030204" pitchFamily="34" charset="0"/>
                       </a:endParaRPr>
                     </a:p>
                   </a:txBody>
-                  <a:tcPr marL="91440" marR="91440" marT="45720" marB="45720" anchor="ctr">
+                  <a:tcPr anchor="ctr">
                     <a:lnL w="12700" cap="flat" cmpd="sng" algn="ctr">
                       <a:solidFill>
                         <a:srgbClr val="E2E8F0"/>
@@ -8275,7 +12081,7 @@
                     <a:bodyPr/>
                     <a:lstStyle/>
                     <a:p>
-                      <a:pPr indent="0" marL="0">
+                      <a:pPr marL="0" indent="0">
                         <a:buNone/>
                       </a:pPr>
                       <a:r>
@@ -8283,20 +12089,20 @@
                           <a:solidFill>
                             <a:srgbClr val="334155"/>
                           </a:solidFill>
-                          <a:latin typeface="Calibri" pitchFamily="34" charset="0"/>
-                          <a:ea typeface="Calibri" pitchFamily="34" charset="-122"/>
-                          <a:cs typeface="Calibri" pitchFamily="34" charset="-120"/>
+                          <a:latin typeface="Calibri" panose="020F0502020204030204" pitchFamily="34" charset="0"/>
+                          <a:ea typeface="Calibri" panose="020F0502020204030204" pitchFamily="34" charset="-122"/>
+                          <a:cs typeface="Calibri" panose="020F0502020204030204" pitchFamily="34" charset="-120"/>
                         </a:rPr>
                         <a:t>observed</a:t>
                       </a:r>
                       <a:endParaRPr lang="en-US" sz="1200" dirty="0">
-                        <a:latin typeface="Calibri" charset="0"/>
-                        <a:ea typeface="Calibri" charset="0"/>
-                        <a:cs typeface="Calibri" charset="0"/>
+                        <a:latin typeface="Calibri" panose="020F0502020204030204" pitchFamily="34" charset="0"/>
+                        <a:ea typeface="Calibri" panose="020F0502020204030204" pitchFamily="34" charset="0"/>
+                        <a:cs typeface="Calibri" panose="020F0502020204030204" pitchFamily="34" charset="0"/>
                       </a:endParaRPr>
                     </a:p>
                   </a:txBody>
-                  <a:tcPr marL="91440" marR="91440" marT="45720" marB="45720" anchor="ctr">
+                  <a:tcPr anchor="ctr">
                     <a:lnL w="12700" cap="flat" cmpd="sng" algn="ctr">
                       <a:solidFill>
                         <a:srgbClr val="E2E8F0"/>
@@ -8340,7 +12146,7 @@
                     <a:bodyPr/>
                     <a:lstStyle/>
                     <a:p>
-                      <a:pPr indent="0" marL="0">
+                      <a:pPr marL="0" indent="0">
                         <a:buNone/>
                       </a:pPr>
                       <a:r>
@@ -8348,20 +12154,20 @@
                           <a:solidFill>
                             <a:srgbClr val="334155"/>
                           </a:solidFill>
-                          <a:latin typeface="Calibri" pitchFamily="34" charset="0"/>
-                          <a:ea typeface="Calibri" pitchFamily="34" charset="-122"/>
-                          <a:cs typeface="Calibri" pitchFamily="34" charset="-120"/>
+                          <a:latin typeface="Calibri" panose="020F0502020204030204" pitchFamily="34" charset="0"/>
+                          <a:ea typeface="Calibri" panose="020F0502020204030204" pitchFamily="34" charset="-122"/>
+                          <a:cs typeface="Calibri" panose="020F0502020204030204" pitchFamily="34" charset="-120"/>
                         </a:rPr>
                         <a:t>non-CV death off-tx</a:t>
                       </a:r>
                       <a:endParaRPr lang="en-US" sz="1200" dirty="0">
-                        <a:latin typeface="Calibri" charset="0"/>
-                        <a:ea typeface="Calibri" charset="0"/>
-                        <a:cs typeface="Calibri" charset="0"/>
+                        <a:latin typeface="Calibri" panose="020F0502020204030204" pitchFamily="34" charset="0"/>
+                        <a:ea typeface="Calibri" panose="020F0502020204030204" pitchFamily="34" charset="0"/>
+                        <a:cs typeface="Calibri" panose="020F0502020204030204" pitchFamily="34" charset="0"/>
                       </a:endParaRPr>
                     </a:p>
                   </a:txBody>
-                  <a:tcPr marL="91440" marR="91440" marT="45720" marB="45720" anchor="ctr">
+                  <a:tcPr anchor="ctr">
                     <a:lnL w="12700" cap="flat" cmpd="sng" algn="ctr">
                       <a:solidFill>
                         <a:srgbClr val="E2E8F0"/>
@@ -8405,7 +12211,7 @@
                     <a:bodyPr/>
                     <a:lstStyle/>
                     <a:p>
-                      <a:pPr indent="0" marL="0">
+                      <a:pPr marL="0" indent="0">
                         <a:buNone/>
                       </a:pPr>
                       <a:r>
@@ -8413,20 +12219,20 @@
                           <a:solidFill>
                             <a:srgbClr val="DC2626"/>
                           </a:solidFill>
-                          <a:latin typeface="Calibri" pitchFamily="34" charset="0"/>
-                          <a:ea typeface="Calibri" pitchFamily="34" charset="-122"/>
-                          <a:cs typeface="Calibri" pitchFamily="34" charset="-120"/>
+                          <a:latin typeface="Calibri" panose="020F0502020204030204" pitchFamily="34" charset="0"/>
+                          <a:ea typeface="Calibri" panose="020F0502020204030204" pitchFamily="34" charset="-122"/>
+                          <a:cs typeface="Calibri" panose="020F0502020204030204" pitchFamily="34" charset="-120"/>
                         </a:rPr>
                         <a:t>Donor</a:t>
                       </a:r>
                       <a:endParaRPr lang="en-US" sz="1200" dirty="0">
-                        <a:latin typeface="Calibri" charset="0"/>
-                        <a:ea typeface="Calibri" charset="0"/>
-                        <a:cs typeface="Calibri" charset="0"/>
+                        <a:latin typeface="Calibri" panose="020F0502020204030204" pitchFamily="34" charset="0"/>
+                        <a:ea typeface="Calibri" panose="020F0502020204030204" pitchFamily="34" charset="0"/>
+                        <a:cs typeface="Calibri" panose="020F0502020204030204" pitchFamily="34" charset="0"/>
                       </a:endParaRPr>
                     </a:p>
                   </a:txBody>
-                  <a:tcPr marL="91440" marR="91440" marT="45720" marB="45720" anchor="ctr">
+                  <a:tcPr anchor="ctr">
                     <a:lnL w="12700" cap="flat" cmpd="sng" algn="ctr">
                       <a:solidFill>
                         <a:srgbClr val="E2E8F0"/>
@@ -8472,7 +12278,7 @@
                     <a:bodyPr/>
                     <a:lstStyle/>
                     <a:p>
-                      <a:pPr indent="0" marL="0">
+                      <a:pPr marL="0" indent="0">
                         <a:buNone/>
                       </a:pPr>
                       <a:r>
@@ -8480,20 +12286,20 @@
                           <a:solidFill>
                             <a:srgbClr val="334155"/>
                           </a:solidFill>
-                          <a:latin typeface="Calibri" pitchFamily="34" charset="0"/>
-                          <a:ea typeface="Calibri" pitchFamily="34" charset="-122"/>
-                          <a:cs typeface="Calibri" pitchFamily="34" charset="-120"/>
+                          <a:latin typeface="Calibri" panose="020F0502020204030204" pitchFamily="34" charset="0"/>
+                          <a:ea typeface="Calibri" panose="020F0502020204030204" pitchFamily="34" charset="-122"/>
+                          <a:cs typeface="Calibri" panose="020F0502020204030204" pitchFamily="34" charset="-120"/>
                         </a:rPr>
                         <a:t>P8</a:t>
                       </a:r>
                       <a:endParaRPr lang="en-US" sz="1200" dirty="0">
-                        <a:latin typeface="Calibri" charset="0"/>
-                        <a:ea typeface="Calibri" charset="0"/>
-                        <a:cs typeface="Calibri" charset="0"/>
+                        <a:latin typeface="Calibri" panose="020F0502020204030204" pitchFamily="34" charset="0"/>
+                        <a:ea typeface="Calibri" panose="020F0502020204030204" pitchFamily="34" charset="0"/>
+                        <a:cs typeface="Calibri" panose="020F0502020204030204" pitchFamily="34" charset="0"/>
                       </a:endParaRPr>
                     </a:p>
                   </a:txBody>
-                  <a:tcPr marL="91440" marR="91440" marT="45720" marB="45720" anchor="ctr">
+                  <a:tcPr anchor="ctr">
                     <a:lnL w="12700" cap="flat" cmpd="sng" algn="ctr">
                       <a:solidFill>
                         <a:srgbClr val="E2E8F0"/>
@@ -8537,7 +12343,7 @@
                     <a:bodyPr/>
                     <a:lstStyle/>
                     <a:p>
-                      <a:pPr indent="0" marL="0">
+                      <a:pPr marL="0" indent="0">
                         <a:buNone/>
                       </a:pPr>
                       <a:r>
@@ -8545,20 +12351,20 @@
                           <a:solidFill>
                             <a:srgbClr val="334155"/>
                           </a:solidFill>
-                          <a:latin typeface="Calibri" pitchFamily="34" charset="0"/>
-                          <a:ea typeface="Calibri" pitchFamily="34" charset="-122"/>
-                          <a:cs typeface="Calibri" pitchFamily="34" charset="-120"/>
+                          <a:latin typeface="Calibri" panose="020F0502020204030204" pitchFamily="34" charset="0"/>
+                          <a:ea typeface="Calibri" panose="020F0502020204030204" pitchFamily="34" charset="-122"/>
+                          <a:cs typeface="Calibri" panose="020F0502020204030204" pitchFamily="34" charset="-120"/>
                         </a:rPr>
                         <a:t>very short</a:t>
                       </a:r>
                       <a:endParaRPr lang="en-US" sz="1200" dirty="0">
-                        <a:latin typeface="Calibri" charset="0"/>
-                        <a:ea typeface="Calibri" charset="0"/>
-                        <a:cs typeface="Calibri" charset="0"/>
+                        <a:latin typeface="Calibri" panose="020F0502020204030204" pitchFamily="34" charset="0"/>
+                        <a:ea typeface="Calibri" panose="020F0502020204030204" pitchFamily="34" charset="0"/>
+                        <a:cs typeface="Calibri" panose="020F0502020204030204" pitchFamily="34" charset="0"/>
                       </a:endParaRPr>
                     </a:p>
                   </a:txBody>
-                  <a:tcPr marL="91440" marR="91440" marT="45720" marB="45720" anchor="ctr">
+                  <a:tcPr anchor="ctr">
                     <a:lnL w="12700" cap="flat" cmpd="sng" algn="ctr">
                       <a:solidFill>
                         <a:srgbClr val="E2E8F0"/>
@@ -8602,7 +12408,7 @@
                     <a:bodyPr/>
                     <a:lstStyle/>
                     <a:p>
-                      <a:pPr indent="0" marL="0">
+                      <a:pPr marL="0" indent="0">
                         <a:buNone/>
                       </a:pPr>
                       <a:r>
@@ -8610,20 +12416,20 @@
                           <a:solidFill>
                             <a:srgbClr val="334155"/>
                           </a:solidFill>
-                          <a:latin typeface="Calibri" pitchFamily="34" charset="0"/>
-                          <a:ea typeface="Calibri" pitchFamily="34" charset="-122"/>
-                          <a:cs typeface="Calibri" pitchFamily="34" charset="-120"/>
+                          <a:latin typeface="Calibri" panose="020F0502020204030204" pitchFamily="34" charset="0"/>
+                          <a:ea typeface="Calibri" panose="020F0502020204030204" pitchFamily="34" charset="-122"/>
+                          <a:cs typeface="Calibri" panose="020F0502020204030204" pitchFamily="34" charset="-120"/>
                         </a:rPr>
                         <a:t>negligible</a:t>
                       </a:r>
                       <a:endParaRPr lang="en-US" sz="1200" dirty="0">
-                        <a:latin typeface="Calibri" charset="0"/>
-                        <a:ea typeface="Calibri" charset="0"/>
-                        <a:cs typeface="Calibri" charset="0"/>
+                        <a:latin typeface="Calibri" panose="020F0502020204030204" pitchFamily="34" charset="0"/>
+                        <a:ea typeface="Calibri" panose="020F0502020204030204" pitchFamily="34" charset="0"/>
+                        <a:cs typeface="Calibri" panose="020F0502020204030204" pitchFamily="34" charset="0"/>
                       </a:endParaRPr>
                     </a:p>
                   </a:txBody>
-                  <a:tcPr marL="91440" marR="91440" marT="45720" marB="45720" anchor="ctr">
+                  <a:tcPr anchor="ctr">
                     <a:lnL w="12700" cap="flat" cmpd="sng" algn="ctr">
                       <a:solidFill>
                         <a:srgbClr val="E2E8F0"/>
@@ -8667,7 +12473,7 @@
                     <a:bodyPr/>
                     <a:lstStyle/>
                     <a:p>
-                      <a:pPr indent="0" marL="0">
+                      <a:pPr marL="0" indent="0">
                         <a:buNone/>
                       </a:pPr>
                       <a:r>
@@ -8675,20 +12481,20 @@
                           <a:solidFill>
                             <a:srgbClr val="334155"/>
                           </a:solidFill>
-                          <a:latin typeface="Calibri" pitchFamily="34" charset="0"/>
-                          <a:ea typeface="Calibri" pitchFamily="34" charset="-122"/>
-                          <a:cs typeface="Calibri" pitchFamily="34" charset="-120"/>
+                          <a:latin typeface="Calibri" panose="020F0502020204030204" pitchFamily="34" charset="0"/>
+                          <a:ea typeface="Calibri" panose="020F0502020204030204" pitchFamily="34" charset="-122"/>
+                          <a:cs typeface="Calibri" panose="020F0502020204030204" pitchFamily="34" charset="-120"/>
                         </a:rPr>
                         <a:t>event with essentially no off-tx obs.</a:t>
                       </a:r>
                       <a:endParaRPr lang="en-US" sz="1200" dirty="0">
-                        <a:latin typeface="Calibri" charset="0"/>
-                        <a:ea typeface="Calibri" charset="0"/>
-                        <a:cs typeface="Calibri" charset="0"/>
+                        <a:latin typeface="Calibri" panose="020F0502020204030204" pitchFamily="34" charset="0"/>
+                        <a:ea typeface="Calibri" panose="020F0502020204030204" pitchFamily="34" charset="0"/>
+                        <a:cs typeface="Calibri" panose="020F0502020204030204" pitchFamily="34" charset="0"/>
                       </a:endParaRPr>
                     </a:p>
                   </a:txBody>
-                  <a:tcPr marL="91440" marR="91440" marT="45720" marB="45720" anchor="ctr">
+                  <a:tcPr anchor="ctr">
                     <a:lnL w="12700" cap="flat" cmpd="sng" algn="ctr">
                       <a:solidFill>
                         <a:srgbClr val="E2E8F0"/>
@@ -8732,7 +12538,7 @@
                     <a:bodyPr/>
                     <a:lstStyle/>
                     <a:p>
-                      <a:pPr indent="0" marL="0">
+                      <a:pPr marL="0" indent="0">
                         <a:buNone/>
                       </a:pPr>
                       <a:r>
@@ -8740,20 +12546,20 @@
                           <a:solidFill>
                             <a:srgbClr val="64748B"/>
                           </a:solidFill>
-                          <a:latin typeface="Calibri" pitchFamily="34" charset="0"/>
-                          <a:ea typeface="Calibri" pitchFamily="34" charset="-122"/>
-                          <a:cs typeface="Calibri" pitchFamily="34" charset="-120"/>
+                          <a:latin typeface="Calibri" panose="020F0502020204030204" pitchFamily="34" charset="0"/>
+                          <a:ea typeface="Calibri" panose="020F0502020204030204" pitchFamily="34" charset="-122"/>
+                          <a:cs typeface="Calibri" panose="020F0502020204030204" pitchFamily="34" charset="-120"/>
                         </a:rPr>
                         <a:t>—</a:t>
                       </a:r>
                       <a:endParaRPr lang="en-US" sz="1200" dirty="0">
-                        <a:latin typeface="Calibri" charset="0"/>
-                        <a:ea typeface="Calibri" charset="0"/>
-                        <a:cs typeface="Calibri" charset="0"/>
+                        <a:latin typeface="Calibri" panose="020F0502020204030204" pitchFamily="34" charset="0"/>
+                        <a:ea typeface="Calibri" panose="020F0502020204030204" pitchFamily="34" charset="0"/>
+                        <a:cs typeface="Calibri" panose="020F0502020204030204" pitchFamily="34" charset="0"/>
                       </a:endParaRPr>
                     </a:p>
                   </a:txBody>
-                  <a:tcPr marL="91440" marR="91440" marT="45720" marB="45720" anchor="ctr">
+                  <a:tcPr anchor="ctr">
                     <a:lnL w="12700" cap="flat" cmpd="sng" algn="ctr">
                       <a:solidFill>
                         <a:srgbClr val="E2E8F0"/>
@@ -8812,13 +12618,12 @@
             <a:avLst/>
           </a:prstGeom>
           <a:noFill/>
-          <a:ln/>
         </p:spPr>
         <p:txBody>
           <a:bodyPr wrap="square" lIns="0" tIns="0" rIns="0" bIns="0" rtlCol="0" anchor="ctr"/>
           <a:lstStyle/>
           <a:p>
-            <a:pPr indent="0" marL="0">
+            <a:pPr marL="0" indent="0">
               <a:buNone/>
             </a:pPr>
             <a:r>
@@ -8829,9 +12634,6 @@
               </a:rPr>
               <a:t>Note: </a:t>
             </a:r>
-            <a:pPr indent="0" marL="0">
-              <a:buNone/>
-            </a:pPr>
             <a:r>
               <a:rPr lang="en-US" sz="1100" i="1" dirty="0">
                 <a:solidFill>
@@ -8886,13 +12688,12 @@
             <a:avLst/>
           </a:prstGeom>
           <a:noFill/>
-          <a:ln/>
         </p:spPr>
         <p:txBody>
           <a:bodyPr wrap="square" lIns="0" tIns="0" rIns="0" bIns="0" rtlCol="0" anchor="ctr"/>
           <a:lstStyle/>
           <a:p>
-            <a:pPr indent="0" marL="0">
+            <a:pPr marL="0" indent="0">
               <a:buNone/>
             </a:pPr>
             <a:r>
@@ -8903,9 +12704,6 @@
               </a:rPr>
               <a:t>Donor set  </a:t>
             </a:r>
-            <a:pPr indent="0" marL="0">
-              <a:buNone/>
-            </a:pPr>
             <a:r>
               <a:rPr lang="en-US" sz="1100" dirty="0">
                 <a:solidFill>
@@ -8960,13 +12758,12 @@
             <a:avLst/>
           </a:prstGeom>
           <a:noFill/>
-          <a:ln/>
         </p:spPr>
         <p:txBody>
           <a:bodyPr wrap="square" lIns="0" tIns="0" rIns="0" bIns="0" rtlCol="0" anchor="ctr"/>
           <a:lstStyle/>
           <a:p>
-            <a:pPr indent="0" marL="0">
+            <a:pPr marL="0" indent="0">
               <a:buNone/>
             </a:pPr>
             <a:r>
@@ -8977,9 +12774,6 @@
               </a:rPr>
               <a:t>Recipient set  </a:t>
             </a:r>
-            <a:pPr indent="0" marL="0">
-              <a:buNone/>
-            </a:pPr>
             <a:r>
               <a:rPr lang="en-US" sz="1100" dirty="0">
                 <a:solidFill>
@@ -9000,14 +12794,15 @@
 </p:sld>
 </file>
 
-<file path=ppt/slides/slide6.xml><?xml version="1.0" encoding="utf-8"?>
+<file path=ppt/slides/slide7.xml><?xml version="1.0" encoding="utf-8"?>
 <p:sld xmlns:a="http://schemas.openxmlformats.org/drawingml/2006/main" xmlns:r="http://schemas.openxmlformats.org/officeDocument/2006/relationships" xmlns:p="http://schemas.openxmlformats.org/presentationml/2006/main">
-  <p:cSld name="Slide 6">
+  <p:cSld>
     <p:bg>
       <p:bgPr>
         <a:solidFill>
           <a:srgbClr val="FFFFFF"/>
         </a:solidFill>
+        <a:effectLst/>
       </p:bgPr>
     </p:bg>
     <p:spTree>
@@ -9039,13 +12834,12 @@
             <a:avLst/>
           </a:prstGeom>
           <a:noFill/>
-          <a:ln/>
         </p:spPr>
         <p:txBody>
           <a:bodyPr wrap="square" lIns="0" tIns="0" rIns="0" bIns="0" rtlCol="0" anchor="ctr"/>
           <a:lstStyle/>
           <a:p>
-            <a:pPr indent="0" marL="0">
+            <a:pPr marL="0" indent="0">
               <a:buNone/>
             </a:pPr>
             <a:r>
@@ -9053,9 +12847,9 @@
                 <a:solidFill>
                   <a:srgbClr val="1E293B"/>
                 </a:solidFill>
-                <a:latin typeface="Calibri" pitchFamily="34" charset="0"/>
-                <a:ea typeface="Calibri" pitchFamily="34" charset="-122"/>
-                <a:cs typeface="Calibri" pitchFamily="34" charset="-120"/>
+                <a:latin typeface="Calibri" panose="020F0502020204030204" pitchFamily="34" charset="0"/>
+                <a:ea typeface="Calibri" panose="020F0502020204030204" pitchFamily="34" charset="-122"/>
+                <a:cs typeface="Calibri" panose="020F0502020204030204" pitchFamily="34" charset="-120"/>
               </a:rPr>
               <a:t>Eight patterns (P1–P8) — option B: mini-timelines</a:t>
             </a:r>
@@ -9101,13 +12895,12 @@
             <a:avLst/>
           </a:prstGeom>
           <a:noFill/>
-          <a:ln/>
         </p:spPr>
         <p:txBody>
           <a:bodyPr wrap="square" rtlCol="0" anchor="ctr"/>
           <a:lstStyle/>
           <a:p>
-            <a:pPr algn="r" indent="0" marL="0">
+            <a:pPr marL="0" indent="0" algn="r">
               <a:buNone/>
             </a:pPr>
             <a:r>
@@ -9137,13 +12930,12 @@
             <a:avLst/>
           </a:prstGeom>
           <a:noFill/>
-          <a:ln/>
         </p:spPr>
         <p:txBody>
           <a:bodyPr wrap="square" lIns="0" tIns="0" rIns="0" bIns="0" rtlCol="0" anchor="ctr"/>
           <a:lstStyle/>
           <a:p>
-            <a:pPr indent="0" marL="0">
+            <a:pPr marL="0" indent="0">
               <a:buNone/>
             </a:pPr>
             <a:r>
@@ -9184,7 +12976,7 @@
             <a:prstDash val="solid"/>
           </a:ln>
           <a:effectLst>
-            <a:outerShdw sx="100000" sy="100000" kx="0" ky="0" algn="bl" rotWithShape="0" blurRad="101600" dist="25400" dir="2700000">
+            <a:outerShdw blurRad="101600" dist="25400" dir="2700000" algn="bl" rotWithShape="0">
               <a:srgbClr val="000000">
                 <a:alpha val="10000"/>
               </a:srgbClr>
@@ -9207,13 +12999,12 @@
             <a:avLst/>
           </a:prstGeom>
           <a:noFill/>
-          <a:ln/>
         </p:spPr>
         <p:txBody>
           <a:bodyPr wrap="square" lIns="0" tIns="0" rIns="0" bIns="0" rtlCol="0" anchor="ctr"/>
           <a:lstStyle/>
           <a:p>
-            <a:pPr indent="0" marL="0">
+            <a:pPr marL="0" indent="0">
               <a:buNone/>
             </a:pPr>
             <a:r>
@@ -9243,13 +13034,12 @@
             <a:avLst/>
           </a:prstGeom>
           <a:noFill/>
-          <a:ln/>
         </p:spPr>
         <p:txBody>
           <a:bodyPr wrap="square" lIns="0" tIns="0" rIns="0" bIns="0" rtlCol="0" anchor="ctr"/>
           <a:lstStyle/>
           <a:p>
-            <a:pPr indent="0" marL="0">
+            <a:pPr marL="0" indent="0">
               <a:buNone/>
             </a:pPr>
             <a:r>
@@ -9306,13 +13096,12 @@
             <a:avLst/>
           </a:prstGeom>
           <a:noFill/>
-          <a:ln/>
         </p:spPr>
         <p:txBody>
           <a:bodyPr wrap="square" lIns="0" tIns="0" rIns="0" bIns="0" rtlCol="0" anchor="ctr"/>
           <a:lstStyle/>
           <a:p>
-            <a:pPr algn="ctr" indent="0" marL="0">
+            <a:pPr marL="0" indent="0" algn="ctr">
               <a:buNone/>
             </a:pPr>
             <a:r>
@@ -9365,13 +13154,12 @@
             <a:avLst/>
           </a:prstGeom>
           <a:noFill/>
-          <a:ln/>
         </p:spPr>
         <p:txBody>
           <a:bodyPr wrap="square" lIns="0" tIns="0" rIns="0" bIns="0" rtlCol="0" anchor="ctr"/>
           <a:lstStyle/>
           <a:p>
-            <a:pPr algn="ctr" indent="0" marL="0">
+            <a:pPr marL="0" indent="0" algn="ctr">
               <a:buNone/>
             </a:pPr>
             <a:r>
@@ -9401,13 +13189,12 @@
             <a:avLst/>
           </a:prstGeom>
           <a:noFill/>
-          <a:ln/>
         </p:spPr>
         <p:txBody>
           <a:bodyPr wrap="square" lIns="0" tIns="0" rIns="0" bIns="0" rtlCol="0" anchor="ctr"/>
           <a:lstStyle/>
           <a:p>
-            <a:pPr algn="ctr" indent="0" marL="0">
+            <a:pPr marL="0" indent="0" algn="ctr">
               <a:buNone/>
             </a:pPr>
             <a:r>
@@ -9476,8 +13263,8 @@
         </p:nvSpPr>
         <p:spPr>
           <a:xfrm>
-            <a:off x="1899666" y="3081528"/>
-            <a:ext cx="219456" cy="-219456"/>
+            <a:off x="1899666" y="2862072"/>
+            <a:ext cx="219456" cy="219456"/>
           </a:xfrm>
           <a:prstGeom prst="line">
             <a:avLst/>
@@ -9517,7 +13304,7 @@
             <a:prstDash val="solid"/>
           </a:ln>
           <a:effectLst>
-            <a:outerShdw sx="100000" sy="100000" kx="0" ky="0" algn="bl" rotWithShape="0" blurRad="101600" dist="25400" dir="2700000">
+            <a:outerShdw blurRad="101600" dist="25400" dir="2700000" algn="bl" rotWithShape="0">
               <a:srgbClr val="000000">
                 <a:alpha val="10000"/>
               </a:srgbClr>
@@ -9540,13 +13327,12 @@
             <a:avLst/>
           </a:prstGeom>
           <a:noFill/>
-          <a:ln/>
         </p:spPr>
         <p:txBody>
           <a:bodyPr wrap="square" lIns="0" tIns="0" rIns="0" bIns="0" rtlCol="0" anchor="ctr"/>
           <a:lstStyle/>
           <a:p>
-            <a:pPr indent="0" marL="0">
+            <a:pPr marL="0" indent="0">
               <a:buNone/>
             </a:pPr>
             <a:r>
@@ -9576,13 +13362,12 @@
             <a:avLst/>
           </a:prstGeom>
           <a:noFill/>
-          <a:ln/>
         </p:spPr>
         <p:txBody>
           <a:bodyPr wrap="square" lIns="0" tIns="0" rIns="0" bIns="0" rtlCol="0" anchor="ctr"/>
           <a:lstStyle/>
           <a:p>
-            <a:pPr indent="0" marL="0">
+            <a:pPr marL="0" indent="0">
               <a:buNone/>
             </a:pPr>
             <a:r>
@@ -9639,13 +13424,12 @@
             <a:avLst/>
           </a:prstGeom>
           <a:noFill/>
-          <a:ln/>
         </p:spPr>
         <p:txBody>
           <a:bodyPr wrap="square" lIns="0" tIns="0" rIns="0" bIns="0" rtlCol="0" anchor="ctr"/>
           <a:lstStyle/>
           <a:p>
-            <a:pPr algn="ctr" indent="0" marL="0">
+            <a:pPr marL="0" indent="0" algn="ctr">
               <a:buNone/>
             </a:pPr>
             <a:r>
@@ -9698,13 +13482,12 @@
             <a:avLst/>
           </a:prstGeom>
           <a:noFill/>
-          <a:ln/>
         </p:spPr>
         <p:txBody>
           <a:bodyPr wrap="square" lIns="0" tIns="0" rIns="0" bIns="0" rtlCol="0" anchor="ctr"/>
           <a:lstStyle/>
           <a:p>
-            <a:pPr algn="ctr" indent="0" marL="0">
+            <a:pPr marL="0" indent="0" algn="ctr">
               <a:buNone/>
             </a:pPr>
             <a:r>
@@ -9734,13 +13517,12 @@
             <a:avLst/>
           </a:prstGeom>
           <a:noFill/>
-          <a:ln/>
         </p:spPr>
         <p:txBody>
           <a:bodyPr wrap="square" lIns="0" tIns="0" rIns="0" bIns="0" rtlCol="0" anchor="ctr"/>
           <a:lstStyle/>
           <a:p>
-            <a:pPr algn="ctr" indent="0" marL="0">
+            <a:pPr marL="0" indent="0" algn="ctr">
               <a:buNone/>
             </a:pPr>
             <a:r>
@@ -9855,8 +13637,8 @@
         </p:nvSpPr>
         <p:spPr>
           <a:xfrm>
-            <a:off x="5273802" y="3081528"/>
-            <a:ext cx="219456" cy="-219456"/>
+            <a:off x="5273802" y="2862072"/>
+            <a:ext cx="219456" cy="219456"/>
           </a:xfrm>
           <a:prstGeom prst="line">
             <a:avLst/>
@@ -9896,7 +13678,7 @@
             <a:prstDash val="solid"/>
           </a:ln>
           <a:effectLst>
-            <a:outerShdw sx="100000" sy="100000" kx="0" ky="0" algn="bl" rotWithShape="0" blurRad="101600" dist="25400" dir="2700000">
+            <a:outerShdw blurRad="101600" dist="25400" dir="2700000" algn="bl" rotWithShape="0">
               <a:srgbClr val="000000">
                 <a:alpha val="10000"/>
               </a:srgbClr>
@@ -9919,13 +13701,12 @@
             <a:avLst/>
           </a:prstGeom>
           <a:noFill/>
-          <a:ln/>
         </p:spPr>
         <p:txBody>
           <a:bodyPr wrap="square" lIns="0" tIns="0" rIns="0" bIns="0" rtlCol="0" anchor="ctr"/>
           <a:lstStyle/>
           <a:p>
-            <a:pPr indent="0" marL="0">
+            <a:pPr marL="0" indent="0">
               <a:buNone/>
             </a:pPr>
             <a:r>
@@ -9955,13 +13736,12 @@
             <a:avLst/>
           </a:prstGeom>
           <a:noFill/>
-          <a:ln/>
         </p:spPr>
         <p:txBody>
           <a:bodyPr wrap="square" lIns="0" tIns="0" rIns="0" bIns="0" rtlCol="0" anchor="ctr"/>
           <a:lstStyle/>
           <a:p>
-            <a:pPr indent="0" marL="0">
+            <a:pPr marL="0" indent="0">
               <a:buNone/>
             </a:pPr>
             <a:r>
@@ -10018,13 +13798,12 @@
             <a:avLst/>
           </a:prstGeom>
           <a:noFill/>
-          <a:ln/>
         </p:spPr>
         <p:txBody>
           <a:bodyPr wrap="square" lIns="0" tIns="0" rIns="0" bIns="0" rtlCol="0" anchor="ctr"/>
           <a:lstStyle/>
           <a:p>
-            <a:pPr algn="ctr" indent="0" marL="0">
+            <a:pPr marL="0" indent="0" algn="ctr">
               <a:buNone/>
             </a:pPr>
             <a:r>
@@ -10077,13 +13856,12 @@
             <a:avLst/>
           </a:prstGeom>
           <a:noFill/>
-          <a:ln/>
         </p:spPr>
         <p:txBody>
           <a:bodyPr wrap="square" lIns="0" tIns="0" rIns="0" bIns="0" rtlCol="0" anchor="ctr"/>
           <a:lstStyle/>
           <a:p>
-            <a:pPr algn="ctr" indent="0" marL="0">
+            <a:pPr marL="0" indent="0" algn="ctr">
               <a:buNone/>
             </a:pPr>
             <a:r>
@@ -10113,13 +13891,12 @@
             <a:avLst/>
           </a:prstGeom>
           <a:noFill/>
-          <a:ln/>
         </p:spPr>
         <p:txBody>
           <a:bodyPr wrap="square" lIns="0" tIns="0" rIns="0" bIns="0" rtlCol="0" anchor="ctr"/>
           <a:lstStyle/>
           <a:p>
-            <a:pPr algn="ctr" indent="0" marL="0">
+            <a:pPr marL="0" indent="0" algn="ctr">
               <a:buNone/>
             </a:pPr>
             <a:r>
@@ -10208,7 +13985,7 @@
             <a:prstDash val="solid"/>
           </a:ln>
           <a:effectLst>
-            <a:outerShdw sx="100000" sy="100000" kx="0" ky="0" algn="bl" rotWithShape="0" blurRad="101600" dist="25400" dir="2700000">
+            <a:outerShdw blurRad="101600" dist="25400" dir="2700000" algn="bl" rotWithShape="0">
               <a:srgbClr val="000000">
                 <a:alpha val="10000"/>
               </a:srgbClr>
@@ -10231,13 +14008,12 @@
             <a:avLst/>
           </a:prstGeom>
           <a:noFill/>
-          <a:ln/>
         </p:spPr>
         <p:txBody>
           <a:bodyPr wrap="square" lIns="0" tIns="0" rIns="0" bIns="0" rtlCol="0" anchor="ctr"/>
           <a:lstStyle/>
           <a:p>
-            <a:pPr indent="0" marL="0">
+            <a:pPr marL="0" indent="0">
               <a:buNone/>
             </a:pPr>
             <a:r>
@@ -10267,13 +14043,12 @@
             <a:avLst/>
           </a:prstGeom>
           <a:noFill/>
-          <a:ln/>
         </p:spPr>
         <p:txBody>
           <a:bodyPr wrap="square" lIns="0" tIns="0" rIns="0" bIns="0" rtlCol="0" anchor="ctr"/>
           <a:lstStyle/>
           <a:p>
-            <a:pPr indent="0" marL="0">
+            <a:pPr marL="0" indent="0">
               <a:buNone/>
             </a:pPr>
             <a:r>
@@ -10330,13 +14105,12 @@
             <a:avLst/>
           </a:prstGeom>
           <a:noFill/>
-          <a:ln/>
         </p:spPr>
         <p:txBody>
           <a:bodyPr wrap="square" lIns="0" tIns="0" rIns="0" bIns="0" rtlCol="0" anchor="ctr"/>
           <a:lstStyle/>
           <a:p>
-            <a:pPr algn="ctr" indent="0" marL="0">
+            <a:pPr marL="0" indent="0" algn="ctr">
               <a:buNone/>
             </a:pPr>
             <a:r>
@@ -10389,13 +14163,12 @@
             <a:avLst/>
           </a:prstGeom>
           <a:noFill/>
-          <a:ln/>
         </p:spPr>
         <p:txBody>
           <a:bodyPr wrap="square" lIns="0" tIns="0" rIns="0" bIns="0" rtlCol="0" anchor="ctr"/>
           <a:lstStyle/>
           <a:p>
-            <a:pPr algn="ctr" indent="0" marL="0">
+            <a:pPr marL="0" indent="0" algn="ctr">
               <a:buNone/>
             </a:pPr>
             <a:r>
@@ -10425,13 +14198,12 @@
             <a:avLst/>
           </a:prstGeom>
           <a:noFill/>
-          <a:ln/>
         </p:spPr>
         <p:txBody>
           <a:bodyPr wrap="square" lIns="0" tIns="0" rIns="0" bIns="0" rtlCol="0" anchor="ctr"/>
           <a:lstStyle/>
           <a:p>
-            <a:pPr algn="ctr" indent="0" marL="0">
+            <a:pPr marL="0" indent="0" algn="ctr">
               <a:buNone/>
             </a:pPr>
             <a:r>
@@ -10566,7 +14338,7 @@
             <a:prstDash val="solid"/>
           </a:ln>
           <a:effectLst>
-            <a:outerShdw sx="100000" sy="100000" kx="0" ky="0" algn="bl" rotWithShape="0" blurRad="101600" dist="25400" dir="2700000">
+            <a:outerShdw blurRad="101600" dist="25400" dir="2700000" algn="bl" rotWithShape="0">
               <a:srgbClr val="000000">
                 <a:alpha val="10000"/>
               </a:srgbClr>
@@ -10589,13 +14361,12 @@
             <a:avLst/>
           </a:prstGeom>
           <a:noFill/>
-          <a:ln/>
         </p:spPr>
         <p:txBody>
           <a:bodyPr wrap="square" lIns="0" tIns="0" rIns="0" bIns="0" rtlCol="0" anchor="ctr"/>
           <a:lstStyle/>
           <a:p>
-            <a:pPr indent="0" marL="0">
+            <a:pPr marL="0" indent="0">
               <a:buNone/>
             </a:pPr>
             <a:r>
@@ -10625,13 +14396,12 @@
             <a:avLst/>
           </a:prstGeom>
           <a:noFill/>
-          <a:ln/>
         </p:spPr>
         <p:txBody>
           <a:bodyPr wrap="square" lIns="0" tIns="0" rIns="0" bIns="0" rtlCol="0" anchor="ctr"/>
           <a:lstStyle/>
           <a:p>
-            <a:pPr indent="0" marL="0">
+            <a:pPr marL="0" indent="0">
               <a:buNone/>
             </a:pPr>
             <a:r>
@@ -10688,13 +14458,12 @@
             <a:avLst/>
           </a:prstGeom>
           <a:noFill/>
-          <a:ln/>
         </p:spPr>
         <p:txBody>
           <a:bodyPr wrap="square" lIns="0" tIns="0" rIns="0" bIns="0" rtlCol="0" anchor="ctr"/>
           <a:lstStyle/>
           <a:p>
-            <a:pPr algn="ctr" indent="0" marL="0">
+            <a:pPr marL="0" indent="0" algn="ctr">
               <a:buNone/>
             </a:pPr>
             <a:r>
@@ -10747,13 +14516,12 @@
             <a:avLst/>
           </a:prstGeom>
           <a:noFill/>
-          <a:ln/>
         </p:spPr>
         <p:txBody>
           <a:bodyPr wrap="square" lIns="0" tIns="0" rIns="0" bIns="0" rtlCol="0" anchor="ctr"/>
           <a:lstStyle/>
           <a:p>
-            <a:pPr algn="ctr" indent="0" marL="0">
+            <a:pPr marL="0" indent="0" algn="ctr">
               <a:buNone/>
             </a:pPr>
             <a:r>
@@ -10783,13 +14551,12 @@
             <a:avLst/>
           </a:prstGeom>
           <a:noFill/>
-          <a:ln/>
         </p:spPr>
         <p:txBody>
           <a:bodyPr wrap="square" lIns="0" tIns="0" rIns="0" bIns="0" rtlCol="0" anchor="ctr"/>
           <a:lstStyle/>
           <a:p>
-            <a:pPr algn="ctr" indent="0" marL="0">
+            <a:pPr marL="0" indent="0" algn="ctr">
               <a:buNone/>
             </a:pPr>
             <a:r>
@@ -10876,7 +14643,7 @@
             <a:prstDash val="solid"/>
           </a:ln>
           <a:effectLst>
-            <a:outerShdw sx="100000" sy="100000" kx="0" ky="0" algn="bl" rotWithShape="0" blurRad="101600" dist="25400" dir="2700000">
+            <a:outerShdw blurRad="101600" dist="25400" dir="2700000" algn="bl" rotWithShape="0">
               <a:srgbClr val="000000">
                 <a:alpha val="10000"/>
               </a:srgbClr>
@@ -10899,13 +14666,12 @@
             <a:avLst/>
           </a:prstGeom>
           <a:noFill/>
-          <a:ln/>
         </p:spPr>
         <p:txBody>
           <a:bodyPr wrap="square" lIns="0" tIns="0" rIns="0" bIns="0" rtlCol="0" anchor="ctr"/>
           <a:lstStyle/>
           <a:p>
-            <a:pPr indent="0" marL="0">
+            <a:pPr marL="0" indent="0">
               <a:buNone/>
             </a:pPr>
             <a:r>
@@ -10935,13 +14701,12 @@
             <a:avLst/>
           </a:prstGeom>
           <a:noFill/>
-          <a:ln/>
         </p:spPr>
         <p:txBody>
           <a:bodyPr wrap="square" lIns="0" tIns="0" rIns="0" bIns="0" rtlCol="0" anchor="ctr"/>
           <a:lstStyle/>
           <a:p>
-            <a:pPr indent="0" marL="0">
+            <a:pPr marL="0" indent="0">
               <a:buNone/>
             </a:pPr>
             <a:r>
@@ -10998,13 +14763,12 @@
             <a:avLst/>
           </a:prstGeom>
           <a:noFill/>
-          <a:ln/>
         </p:spPr>
         <p:txBody>
           <a:bodyPr wrap="square" lIns="0" tIns="0" rIns="0" bIns="0" rtlCol="0" anchor="ctr"/>
           <a:lstStyle/>
           <a:p>
-            <a:pPr algn="ctr" indent="0" marL="0">
+            <a:pPr marL="0" indent="0" algn="ctr">
               <a:buNone/>
             </a:pPr>
             <a:r>
@@ -11057,13 +14821,12 @@
             <a:avLst/>
           </a:prstGeom>
           <a:noFill/>
-          <a:ln/>
         </p:spPr>
         <p:txBody>
           <a:bodyPr wrap="square" lIns="0" tIns="0" rIns="0" bIns="0" rtlCol="0" anchor="ctr"/>
           <a:lstStyle/>
           <a:p>
-            <a:pPr algn="ctr" indent="0" marL="0">
+            <a:pPr marL="0" indent="0" algn="ctr">
               <a:buNone/>
             </a:pPr>
             <a:r>
@@ -11093,13 +14856,12 @@
             <a:avLst/>
           </a:prstGeom>
           <a:noFill/>
-          <a:ln/>
         </p:spPr>
         <p:txBody>
           <a:bodyPr wrap="square" lIns="0" tIns="0" rIns="0" bIns="0" rtlCol="0" anchor="ctr"/>
           <a:lstStyle/>
           <a:p>
-            <a:pPr algn="ctr" indent="0" marL="0">
+            <a:pPr marL="0" indent="0" algn="ctr">
               <a:buNone/>
             </a:pPr>
             <a:r>
@@ -11232,7 +14994,7 @@
             <a:prstDash val="solid"/>
           </a:ln>
           <a:effectLst>
-            <a:outerShdw sx="100000" sy="100000" kx="0" ky="0" algn="bl" rotWithShape="0" blurRad="101600" dist="25400" dir="2700000">
+            <a:outerShdw blurRad="101600" dist="25400" dir="2700000" algn="bl" rotWithShape="0">
               <a:srgbClr val="000000">
                 <a:alpha val="10000"/>
               </a:srgbClr>
@@ -11255,13 +15017,12 @@
             <a:avLst/>
           </a:prstGeom>
           <a:noFill/>
-          <a:ln/>
         </p:spPr>
         <p:txBody>
           <a:bodyPr wrap="square" lIns="0" tIns="0" rIns="0" bIns="0" rtlCol="0" anchor="ctr"/>
           <a:lstStyle/>
           <a:p>
-            <a:pPr indent="0" marL="0">
+            <a:pPr marL="0" indent="0">
               <a:buNone/>
             </a:pPr>
             <a:r>
@@ -11291,13 +15052,12 @@
             <a:avLst/>
           </a:prstGeom>
           <a:noFill/>
-          <a:ln/>
         </p:spPr>
         <p:txBody>
           <a:bodyPr wrap="square" lIns="0" tIns="0" rIns="0" bIns="0" rtlCol="0" anchor="ctr"/>
           <a:lstStyle/>
           <a:p>
-            <a:pPr indent="0" marL="0">
+            <a:pPr marL="0" indent="0">
               <a:buNone/>
             </a:pPr>
             <a:r>
@@ -11354,13 +15114,12 @@
             <a:avLst/>
           </a:prstGeom>
           <a:noFill/>
-          <a:ln/>
         </p:spPr>
         <p:txBody>
           <a:bodyPr wrap="square" lIns="0" tIns="0" rIns="0" bIns="0" rtlCol="0" anchor="ctr"/>
           <a:lstStyle/>
           <a:p>
-            <a:pPr algn="ctr" indent="0" marL="0">
+            <a:pPr marL="0" indent="0" algn="ctr">
               <a:buNone/>
             </a:pPr>
             <a:r>
@@ -11413,13 +15172,12 @@
             <a:avLst/>
           </a:prstGeom>
           <a:noFill/>
-          <a:ln/>
         </p:spPr>
         <p:txBody>
           <a:bodyPr wrap="square" lIns="0" tIns="0" rIns="0" bIns="0" rtlCol="0" anchor="ctr"/>
           <a:lstStyle/>
           <a:p>
-            <a:pPr algn="ctr" indent="0" marL="0">
+            <a:pPr marL="0" indent="0" algn="ctr">
               <a:buNone/>
             </a:pPr>
             <a:r>
@@ -11449,13 +15207,12 @@
             <a:avLst/>
           </a:prstGeom>
           <a:noFill/>
-          <a:ln/>
         </p:spPr>
         <p:txBody>
           <a:bodyPr wrap="square" lIns="0" tIns="0" rIns="0" bIns="0" rtlCol="0" anchor="ctr"/>
           <a:lstStyle/>
           <a:p>
-            <a:pPr algn="ctr" indent="0" marL="0">
+            <a:pPr marL="0" indent="0" algn="ctr">
               <a:buNone/>
             </a:pPr>
             <a:r>
@@ -11570,8 +15327,8 @@
         </p:nvSpPr>
         <p:spPr>
           <a:xfrm>
-            <a:off x="8087868" y="5596128"/>
-            <a:ext cx="219456" cy="-219456"/>
+            <a:off x="8087868" y="5376672"/>
+            <a:ext cx="219456" cy="219456"/>
           </a:xfrm>
           <a:prstGeom prst="line">
             <a:avLst/>
@@ -11611,7 +15368,7 @@
             <a:prstDash val="solid"/>
           </a:ln>
           <a:effectLst>
-            <a:outerShdw sx="100000" sy="100000" kx="0" ky="0" algn="bl" rotWithShape="0" blurRad="101600" dist="25400" dir="2700000">
+            <a:outerShdw blurRad="101600" dist="25400" dir="2700000" algn="bl" rotWithShape="0">
               <a:srgbClr val="000000">
                 <a:alpha val="10000"/>
               </a:srgbClr>
@@ -11634,13 +15391,12 @@
             <a:avLst/>
           </a:prstGeom>
           <a:noFill/>
-          <a:ln/>
         </p:spPr>
         <p:txBody>
           <a:bodyPr wrap="square" lIns="0" tIns="0" rIns="0" bIns="0" rtlCol="0" anchor="ctr"/>
           <a:lstStyle/>
           <a:p>
-            <a:pPr indent="0" marL="0">
+            <a:pPr marL="0" indent="0">
               <a:buNone/>
             </a:pPr>
             <a:r>
@@ -11670,13 +15426,12 @@
             <a:avLst/>
           </a:prstGeom>
           <a:noFill/>
-          <a:ln/>
         </p:spPr>
         <p:txBody>
           <a:bodyPr wrap="square" lIns="0" tIns="0" rIns="0" bIns="0" rtlCol="0" anchor="ctr"/>
           <a:lstStyle/>
           <a:p>
-            <a:pPr indent="0" marL="0">
+            <a:pPr marL="0" indent="0">
               <a:buNone/>
             </a:pPr>
             <a:r>
@@ -11733,13 +15488,12 @@
             <a:avLst/>
           </a:prstGeom>
           <a:noFill/>
-          <a:ln/>
         </p:spPr>
         <p:txBody>
           <a:bodyPr wrap="square" lIns="0" tIns="0" rIns="0" bIns="0" rtlCol="0" anchor="ctr"/>
           <a:lstStyle/>
           <a:p>
-            <a:pPr algn="ctr" indent="0" marL="0">
+            <a:pPr marL="0" indent="0" algn="ctr">
               <a:buNone/>
             </a:pPr>
             <a:r>
@@ -11792,13 +15546,12 @@
             <a:avLst/>
           </a:prstGeom>
           <a:noFill/>
-          <a:ln/>
         </p:spPr>
         <p:txBody>
           <a:bodyPr wrap="square" lIns="0" tIns="0" rIns="0" bIns="0" rtlCol="0" anchor="ctr"/>
           <a:lstStyle/>
           <a:p>
-            <a:pPr algn="ctr" indent="0" marL="0">
+            <a:pPr marL="0" indent="0" algn="ctr">
               <a:buNone/>
             </a:pPr>
             <a:r>
@@ -11828,13 +15581,12 @@
             <a:avLst/>
           </a:prstGeom>
           <a:noFill/>
-          <a:ln/>
         </p:spPr>
         <p:txBody>
           <a:bodyPr wrap="square" lIns="0" tIns="0" rIns="0" bIns="0" rtlCol="0" anchor="ctr"/>
           <a:lstStyle/>
           <a:p>
-            <a:pPr algn="ctr" indent="0" marL="0">
+            <a:pPr marL="0" indent="0" algn="ctr">
               <a:buNone/>
             </a:pPr>
             <a:r>
@@ -11903,8 +15655,8 @@
         </p:nvSpPr>
         <p:spPr>
           <a:xfrm>
-            <a:off x="9781794" y="5596128"/>
-            <a:ext cx="219456" cy="-219456"/>
+            <a:off x="9781794" y="5376672"/>
+            <a:ext cx="219456" cy="219456"/>
           </a:xfrm>
           <a:prstGeom prst="line">
             <a:avLst/>
@@ -11924,6 +15676,30 @@
     <a:masterClrMapping/>
   </p:clrMapOvr>
 </p:sld>
+</file>
+
+<file path=ppt/tags/tag1.xml><?xml version="1.0" encoding="utf-8"?>
+<p:tagLst xmlns:p="http://schemas.openxmlformats.org/presentationml/2006/main">
+  <p:tag name="VCTCREATESHAPEHANDLED" val="0"/>
+</p:tagLst>
+</file>
+
+<file path=ppt/tags/tag2.xml><?xml version="1.0" encoding="utf-8"?>
+<p:tagLst xmlns:p="http://schemas.openxmlformats.org/presentationml/2006/main">
+  <p:tag name="THINKCELLSHAPEDONOTDELETE" val="thinkcellActiveDocDoNotDelete"/>
+</p:tagLst>
+</file>
+
+<file path=ppt/tags/tag3.xml><?xml version="1.0" encoding="utf-8"?>
+<p:tagLst xmlns:p="http://schemas.openxmlformats.org/presentationml/2006/main">
+  <p:tag name="THINKCELLSHAPEDONOTDELETE" val="trqd2V2Org5mpMtT4zjNzDA"/>
+</p:tagLst>
+</file>
+
+<file path=ppt/tags/tag4.xml><?xml version="1.0" encoding="utf-8"?>
+<p:tagLst xmlns:p="http://schemas.openxmlformats.org/presentationml/2006/main">
+  <p:tag name="commondata" val="eyJoZGlkIjoiZTYxNjUyMTQ2NjdhYWQzODIyOGVkZDMwNTQxOGIyNjIifQ=="/>
+</p:tagLst>
 </file>
 
 <file path=ppt/theme/theme1.xml><?xml version="1.0" encoding="utf-8"?>
@@ -11969,7 +15745,7 @@
     </a:clrScheme>
     <a:fontScheme name="Office">
       <a:majorFont>
-        <a:latin typeface="Calibri Light" panose="020F0302020204030204"/>
+        <a:latin typeface="Calibri Light"/>
         <a:ea typeface=""/>
         <a:cs typeface=""/>
         <a:font script="Jpan" typeface="游ゴシック Light"/>
@@ -12002,26 +15778,9 @@
         <a:font script="Viet" typeface="Times New Roman"/>
         <a:font script="Uigh" typeface="Microsoft Uighur"/>
         <a:font script="Geor" typeface="Sylfaen"/>
-        <a:font script="Armn" typeface="Arial"/>
-        <a:font script="Bugi" typeface="Leelawadee UI"/>
-        <a:font script="Bopo" typeface="Microsoft JhengHei"/>
-        <a:font script="Java" typeface="Javanese Text"/>
-        <a:font script="Lisu" typeface="Segoe UI"/>
-        <a:font script="Mymr" typeface="Myanmar Text"/>
-        <a:font script="Nkoo" typeface="Ebrima"/>
-        <a:font script="Olck" typeface="Nirmala UI"/>
-        <a:font script="Osma" typeface="Ebrima"/>
-        <a:font script="Phag" typeface="Phagspa"/>
-        <a:font script="Syrn" typeface="Estrangelo Edessa"/>
-        <a:font script="Syrj" typeface="Estrangelo Edessa"/>
-        <a:font script="Syre" typeface="Estrangelo Edessa"/>
-        <a:font script="Sora" typeface="Nirmala UI"/>
-        <a:font script="Tale" typeface="Microsoft Tai Le"/>
-        <a:font script="Talu" typeface="Microsoft New Tai Lue"/>
-        <a:font script="Tfng" typeface="Ebrima"/>
       </a:majorFont>
       <a:minorFont>
-        <a:latin typeface="Calibri" panose="020F0502020204030204"/>
+        <a:latin typeface="Calibri"/>
         <a:ea typeface=""/>
         <a:cs typeface=""/>
         <a:font script="Jpan" typeface="游ゴシック"/>
@@ -12054,23 +15813,6 @@
         <a:font script="Viet" typeface="Arial"/>
         <a:font script="Uigh" typeface="Microsoft Uighur"/>
         <a:font script="Geor" typeface="Sylfaen"/>
-        <a:font script="Armn" typeface="Arial"/>
-        <a:font script="Bugi" typeface="Leelawadee UI"/>
-        <a:font script="Bopo" typeface="Microsoft JhengHei"/>
-        <a:font script="Java" typeface="Javanese Text"/>
-        <a:font script="Lisu" typeface="Segoe UI"/>
-        <a:font script="Mymr" typeface="Myanmar Text"/>
-        <a:font script="Nkoo" typeface="Ebrima"/>
-        <a:font script="Olck" typeface="Nirmala UI"/>
-        <a:font script="Osma" typeface="Ebrima"/>
-        <a:font script="Phag" typeface="Phagspa"/>
-        <a:font script="Syrn" typeface="Estrangelo Edessa"/>
-        <a:font script="Syrj" typeface="Estrangelo Edessa"/>
-        <a:font script="Syre" typeface="Estrangelo Edessa"/>
-        <a:font script="Sora" typeface="Nirmala UI"/>
-        <a:font script="Tale" typeface="Microsoft Tai Le"/>
-        <a:font script="Talu" typeface="Microsoft New Tai Lue"/>
-        <a:font script="Tfng" typeface="Ebrima"/>
       </a:minorFont>
     </a:fontScheme>
     <a:fmtScheme name="Office">
@@ -12211,8 +15953,265 @@
       </a:bgFillStyleLst>
     </a:fmtScheme>
   </a:themeElements>
-  <a:objectDefaults/>
-  <a:extraClrSchemeLst/>
+  <a:extLst>
+    <a:ext uri="{05A4C25C-085E-4340-85A3-A5531E510DB2}">
+      <thm15:themeFamily xmlns:thm15="http://schemas.microsoft.com/office/thememl/2012/main" name="Office Theme" id="{62F939B6-93AF-4DB8-9C6B-D6C7DFDC589F}" vid="{4A3C46E8-61CC-4603-A589-7422A47A8E4A}"/>
+    </a:ext>
+  </a:extLst>
+</a:theme>
+</file>
+
+<file path=ppt/theme/theme2.xml><?xml version="1.0" encoding="utf-8"?>
+<a:theme xmlns:a="http://schemas.openxmlformats.org/drawingml/2006/main" name="Office Theme">
+  <a:themeElements>
+    <a:clrScheme name="Office">
+      <a:dk1>
+        <a:sysClr val="windowText" lastClr="000000"/>
+      </a:dk1>
+      <a:lt1>
+        <a:sysClr val="window" lastClr="FFFFFF"/>
+      </a:lt1>
+      <a:dk2>
+        <a:srgbClr val="44546A"/>
+      </a:dk2>
+      <a:lt2>
+        <a:srgbClr val="E7E6E6"/>
+      </a:lt2>
+      <a:accent1>
+        <a:srgbClr val="4472C4"/>
+      </a:accent1>
+      <a:accent2>
+        <a:srgbClr val="ED7D31"/>
+      </a:accent2>
+      <a:accent3>
+        <a:srgbClr val="A5A5A5"/>
+      </a:accent3>
+      <a:accent4>
+        <a:srgbClr val="FFC000"/>
+      </a:accent4>
+      <a:accent5>
+        <a:srgbClr val="5B9BD5"/>
+      </a:accent5>
+      <a:accent6>
+        <a:srgbClr val="70AD47"/>
+      </a:accent6>
+      <a:hlink>
+        <a:srgbClr val="0563C1"/>
+      </a:hlink>
+      <a:folHlink>
+        <a:srgbClr val="954F72"/>
+      </a:folHlink>
+    </a:clrScheme>
+    <a:fontScheme name="Office">
+      <a:majorFont>
+        <a:latin typeface="Calibri Light"/>
+        <a:ea typeface=""/>
+        <a:cs typeface=""/>
+        <a:font script="Jpan" typeface="游ゴシック Light"/>
+        <a:font script="Hang" typeface="맑은 고딕"/>
+        <a:font script="Hans" typeface="等线 Light"/>
+        <a:font script="Hant" typeface="新細明體"/>
+        <a:font script="Arab" typeface="Times New Roman"/>
+        <a:font script="Hebr" typeface="Times New Roman"/>
+        <a:font script="Thai" typeface="Angsana New"/>
+        <a:font script="Ethi" typeface="Nyala"/>
+        <a:font script="Beng" typeface="Vrinda"/>
+        <a:font script="Gujr" typeface="Shruti"/>
+        <a:font script="Khmr" typeface="MoolBoran"/>
+        <a:font script="Knda" typeface="Tunga"/>
+        <a:font script="Guru" typeface="Raavi"/>
+        <a:font script="Cans" typeface="Euphemia"/>
+        <a:font script="Cher" typeface="Plantagenet Cherokee"/>
+        <a:font script="Yiii" typeface="Microsoft Yi Baiti"/>
+        <a:font script="Tibt" typeface="Microsoft Himalaya"/>
+        <a:font script="Thaa" typeface="MV Boli"/>
+        <a:font script="Deva" typeface="Mangal"/>
+        <a:font script="Telu" typeface="Gautami"/>
+        <a:font script="Taml" typeface="Latha"/>
+        <a:font script="Syrc" typeface="Estrangelo Edessa"/>
+        <a:font script="Orya" typeface="Kalinga"/>
+        <a:font script="Mlym" typeface="Kartika"/>
+        <a:font script="Laoo" typeface="DokChampa"/>
+        <a:font script="Sinh" typeface="Iskoola Pota"/>
+        <a:font script="Mong" typeface="Mongolian Baiti"/>
+        <a:font script="Viet" typeface="Times New Roman"/>
+        <a:font script="Uigh" typeface="Microsoft Uighur"/>
+        <a:font script="Geor" typeface="Sylfaen"/>
+      </a:majorFont>
+      <a:minorFont>
+        <a:latin typeface="Calibri"/>
+        <a:ea typeface=""/>
+        <a:cs typeface=""/>
+        <a:font script="Jpan" typeface="游ゴシック"/>
+        <a:font script="Hang" typeface="맑은 고딕"/>
+        <a:font script="Hans" typeface="等线"/>
+        <a:font script="Hant" typeface="新細明體"/>
+        <a:font script="Arab" typeface="Arial"/>
+        <a:font script="Hebr" typeface="Arial"/>
+        <a:font script="Thai" typeface="Cordia New"/>
+        <a:font script="Ethi" typeface="Nyala"/>
+        <a:font script="Beng" typeface="Vrinda"/>
+        <a:font script="Gujr" typeface="Shruti"/>
+        <a:font script="Khmr" typeface="DaunPenh"/>
+        <a:font script="Knda" typeface="Tunga"/>
+        <a:font script="Guru" typeface="Raavi"/>
+        <a:font script="Cans" typeface="Euphemia"/>
+        <a:font script="Cher" typeface="Plantagenet Cherokee"/>
+        <a:font script="Yiii" typeface="Microsoft Yi Baiti"/>
+        <a:font script="Tibt" typeface="Microsoft Himalaya"/>
+        <a:font script="Thaa" typeface="MV Boli"/>
+        <a:font script="Deva" typeface="Mangal"/>
+        <a:font script="Telu" typeface="Gautami"/>
+        <a:font script="Taml" typeface="Latha"/>
+        <a:font script="Syrc" typeface="Estrangelo Edessa"/>
+        <a:font script="Orya" typeface="Kalinga"/>
+        <a:font script="Mlym" typeface="Kartika"/>
+        <a:font script="Laoo" typeface="DokChampa"/>
+        <a:font script="Sinh" typeface="Iskoola Pota"/>
+        <a:font script="Mong" typeface="Mongolian Baiti"/>
+        <a:font script="Viet" typeface="Arial"/>
+        <a:font script="Uigh" typeface="Microsoft Uighur"/>
+        <a:font script="Geor" typeface="Sylfaen"/>
+      </a:minorFont>
+    </a:fontScheme>
+    <a:fmtScheme name="Office">
+      <a:fillStyleLst>
+        <a:solidFill>
+          <a:schemeClr val="phClr"/>
+        </a:solidFill>
+        <a:gradFill rotWithShape="1">
+          <a:gsLst>
+            <a:gs pos="0">
+              <a:schemeClr val="phClr">
+                <a:lumMod val="110000"/>
+                <a:satMod val="105000"/>
+                <a:tint val="67000"/>
+              </a:schemeClr>
+            </a:gs>
+            <a:gs pos="50000">
+              <a:schemeClr val="phClr">
+                <a:lumMod val="105000"/>
+                <a:satMod val="103000"/>
+                <a:tint val="73000"/>
+              </a:schemeClr>
+            </a:gs>
+            <a:gs pos="100000">
+              <a:schemeClr val="phClr">
+                <a:lumMod val="105000"/>
+                <a:satMod val="109000"/>
+                <a:tint val="81000"/>
+              </a:schemeClr>
+            </a:gs>
+          </a:gsLst>
+          <a:lin ang="5400000" scaled="0"/>
+        </a:gradFill>
+        <a:gradFill rotWithShape="1">
+          <a:gsLst>
+            <a:gs pos="0">
+              <a:schemeClr val="phClr">
+                <a:satMod val="103000"/>
+                <a:lumMod val="102000"/>
+                <a:tint val="94000"/>
+              </a:schemeClr>
+            </a:gs>
+            <a:gs pos="50000">
+              <a:schemeClr val="phClr">
+                <a:satMod val="110000"/>
+                <a:lumMod val="100000"/>
+                <a:shade val="100000"/>
+              </a:schemeClr>
+            </a:gs>
+            <a:gs pos="100000">
+              <a:schemeClr val="phClr">
+                <a:lumMod val="99000"/>
+                <a:satMod val="120000"/>
+                <a:shade val="78000"/>
+              </a:schemeClr>
+            </a:gs>
+          </a:gsLst>
+          <a:lin ang="5400000" scaled="0"/>
+        </a:gradFill>
+      </a:fillStyleLst>
+      <a:lnStyleLst>
+        <a:ln w="6350" cap="flat" cmpd="sng" algn="ctr">
+          <a:solidFill>
+            <a:schemeClr val="phClr"/>
+          </a:solidFill>
+          <a:prstDash val="solid"/>
+          <a:miter lim="800000"/>
+        </a:ln>
+        <a:ln w="12700" cap="flat" cmpd="sng" algn="ctr">
+          <a:solidFill>
+            <a:schemeClr val="phClr"/>
+          </a:solidFill>
+          <a:prstDash val="solid"/>
+          <a:miter lim="800000"/>
+        </a:ln>
+        <a:ln w="19050" cap="flat" cmpd="sng" algn="ctr">
+          <a:solidFill>
+            <a:schemeClr val="phClr"/>
+          </a:solidFill>
+          <a:prstDash val="solid"/>
+          <a:miter lim="800000"/>
+        </a:ln>
+      </a:lnStyleLst>
+      <a:effectStyleLst>
+        <a:effectStyle>
+          <a:effectLst/>
+        </a:effectStyle>
+        <a:effectStyle>
+          <a:effectLst/>
+        </a:effectStyle>
+        <a:effectStyle>
+          <a:effectLst>
+            <a:outerShdw blurRad="57150" dist="19050" dir="5400000" algn="ctr" rotWithShape="0">
+              <a:srgbClr val="000000">
+                <a:alpha val="63000"/>
+              </a:srgbClr>
+            </a:outerShdw>
+          </a:effectLst>
+        </a:effectStyle>
+      </a:effectStyleLst>
+      <a:bgFillStyleLst>
+        <a:solidFill>
+          <a:schemeClr val="phClr"/>
+        </a:solidFill>
+        <a:solidFill>
+          <a:schemeClr val="phClr">
+            <a:tint val="95000"/>
+            <a:satMod val="170000"/>
+          </a:schemeClr>
+        </a:solidFill>
+        <a:gradFill rotWithShape="1">
+          <a:gsLst>
+            <a:gs pos="0">
+              <a:schemeClr val="phClr">
+                <a:tint val="93000"/>
+                <a:satMod val="150000"/>
+                <a:shade val="98000"/>
+                <a:lumMod val="102000"/>
+              </a:schemeClr>
+            </a:gs>
+            <a:gs pos="50000">
+              <a:schemeClr val="phClr">
+                <a:tint val="98000"/>
+                <a:satMod val="130000"/>
+                <a:shade val="90000"/>
+                <a:lumMod val="103000"/>
+              </a:schemeClr>
+            </a:gs>
+            <a:gs pos="100000">
+              <a:schemeClr val="phClr">
+                <a:shade val="63000"/>
+                <a:satMod val="120000"/>
+              </a:schemeClr>
+            </a:gs>
+          </a:gsLst>
+          <a:lin ang="5400000" scaled="0"/>
+        </a:gradFill>
+      </a:bgFillStyleLst>
+    </a:fmtScheme>
+  </a:themeElements>
   <a:extLst>
     <a:ext uri="{05A4C25C-085E-4340-85A3-A5531E510DB2}">
       <thm15:themeFamily xmlns:thm15="http://schemas.microsoft.com/office/thememl/2012/main" name="Office Theme" id="{62F939B6-93AF-4DB8-9C6B-D6C7DFDC589F}" vid="{4A3C46E8-61CC-4603-A589-7422A47A8E4A}"/>
